--- a/docs/pptx/auc3/jx-auc3-linsubhr-sens-death.pptx
+++ b/docs/pptx/auc3/jx-auc3-linsubhr-sens-death.pptx
@@ -5033,7 +5033,7 @@
           <p:spPr>
             <a:xfrm>
               <a:off x="817517" y="1896563"/>
-              <a:ext cx="6178966" cy="82021"/>
+              <a:ext cx="6842729" cy="82021"/>
             </a:xfrm>
             <a:prstGeom prst="rect">
               <a:avLst/>
@@ -5065,7 +5065,7 @@
                   <a:latin typeface="Helvetica"/>
                   <a:cs typeface="Helvetica"/>
                 </a:rPr>
-                <a:t>HR per 0.1 ratio decline: 2.71 (1.63-4.51), p = &lt;0.001  |  per IQR decline (Δ = 0.28): 16.47 (3.96-68.58)  |  IQR: [0.70, 0.98]</a:t>
+                <a:t>HR per 0.1 ratio decline: 2.71 (1.63-4.51), p_Bonf = &lt;0.001 (n = 6)  |  per IQR decline (Δ = 0.28): 16.47 (3.96-68.58)  |  IQR: [0.70, 0.98]</a:t>
               </a:r>
             </a:p>
           </p:txBody>

--- a/docs/pptx/auc3/jx-auc3-linsubhr-sens-death.pptx
+++ b/docs/pptx/auc3/jx-auc3-linsubhr-sens-death.pptx
@@ -4756,8 +4756,8 @@
           </p:nvSpPr>
           <p:spPr>
             <a:xfrm>
-              <a:off x="2137719" y="5785772"/>
-              <a:ext cx="155356" cy="80101"/>
+              <a:off x="2134610" y="5785772"/>
+              <a:ext cx="161574" cy="80101"/>
             </a:xfrm>
             <a:prstGeom prst="rect">
               <a:avLst/>
@@ -4789,7 +4789,7 @@
                   <a:latin typeface="Helvetica"/>
                   <a:cs typeface="Helvetica"/>
                 </a:rPr>
-                <a:t>0.6</a:t>
+                <a:t>-40</a:t>
               </a:r>
             </a:p>
           </p:txBody>
@@ -4802,8 +4802,8 @@
           </p:nvSpPr>
           <p:spPr>
             <a:xfrm>
-              <a:off x="3878840" y="5785772"/>
-              <a:ext cx="155356" cy="80101"/>
+              <a:off x="3875731" y="5785772"/>
+              <a:ext cx="161574" cy="80101"/>
             </a:xfrm>
             <a:prstGeom prst="rect">
               <a:avLst/>
@@ -4835,7 +4835,7 @@
                   <a:latin typeface="Helvetica"/>
                   <a:cs typeface="Helvetica"/>
                 </a:rPr>
-                <a:t>0.8</a:t>
+                <a:t>-20</a:t>
               </a:r>
             </a:p>
           </p:txBody>
@@ -4848,8 +4848,8 @@
           </p:nvSpPr>
           <p:spPr>
             <a:xfrm>
-              <a:off x="5619961" y="5785772"/>
-              <a:ext cx="155356" cy="80101"/>
+              <a:off x="5666549" y="5785772"/>
+              <a:ext cx="62179" cy="80101"/>
             </a:xfrm>
             <a:prstGeom prst="rect">
               <a:avLst/>
@@ -4881,7 +4881,7 @@
                   <a:latin typeface="Helvetica"/>
                   <a:cs typeface="Helvetica"/>
                 </a:rPr>
-                <a:t>1.0</a:t>
+                <a:t>0</a:t>
               </a:r>
             </a:p>
           </p:txBody>
@@ -4894,8 +4894,8 @@
           </p:nvSpPr>
           <p:spPr>
             <a:xfrm>
-              <a:off x="7361081" y="5785772"/>
-              <a:ext cx="155356" cy="80101"/>
+              <a:off x="7376580" y="5785772"/>
+              <a:ext cx="124358" cy="80101"/>
             </a:xfrm>
             <a:prstGeom prst="rect">
               <a:avLst/>
@@ -4927,7 +4927,7 @@
                   <a:latin typeface="Helvetica"/>
                   <a:cs typeface="Helvetica"/>
                 </a:rPr>
-                <a:t>1.2</a:t>
+                <a:t>20</a:t>
               </a:r>
             </a:p>
           </p:txBody>
@@ -4940,8 +4940,8 @@
           </p:nvSpPr>
           <p:spPr>
             <a:xfrm>
-              <a:off x="2691419" y="5925448"/>
-              <a:ext cx="4051889" cy="100218"/>
+              <a:off x="1561815" y="5925448"/>
+              <a:ext cx="6311097" cy="100218"/>
             </a:xfrm>
             <a:prstGeom prst="rect">
               <a:avLst/>
@@ -4973,7 +4973,7 @@
                   <a:latin typeface="Helvetica"/>
                   <a:cs typeface="Helvetica"/>
                 </a:rPr>
-                <a:t>Sensitivity eGFR Ratio (CKD-EPI 2012 CysC / CKD-EPI 2021 Cr)</a:t>
+                <a:t>Sensitivity eGFR Difference (%): 100 × (CKD-EPI 2012 CysC − CKD-EPI 2021 Cr) / CKD-EPI 2021 Cr</a:t>
               </a:r>
             </a:p>
           </p:txBody>
@@ -5033,7 +5033,7 @@
           <p:spPr>
             <a:xfrm>
               <a:off x="817517" y="1896563"/>
-              <a:ext cx="6842729" cy="82021"/>
+              <a:ext cx="6969465" cy="82021"/>
             </a:xfrm>
             <a:prstGeom prst="rect">
               <a:avLst/>
@@ -5065,7 +5065,7 @@
                   <a:latin typeface="Helvetica"/>
                   <a:cs typeface="Helvetica"/>
                 </a:rPr>
-                <a:t>HR per 0.1 ratio decline: 2.71 (1.63-4.51), p_Bonf = &lt;0.001 (n = 6)  |  per IQR decline (Δ = 0.28): 16.47 (3.96-68.58)  |  IQR: [0.70, 0.98]</a:t>
+                <a:t>HR per 10 % decline: 2.71 (1.63-4.51), p_Bonf = &lt;0.001 (n = 6)  |  per IQR decline (Δ = 28.1 %): 16.47 (3.96-68.58)  |  IQR: [-30.1, -2.1] %</a:t>
               </a:r>
             </a:p>
           </p:txBody>

--- a/docs/pptx/auc3/jx-auc3-linsubhr-sens-death.pptx
+++ b/docs/pptx/auc3/jx-auc3-linsubhr-sens-death.pptx
@@ -2265,27 +2265,62 @@
         </p:sp>
         <p:sp>
           <p:nvSpPr>
-            <p:cNvPr id="4" name="pl4"/>
-            <p:cNvSpPr/>
-            <p:nvPr/>
-          </p:nvSpPr>
-          <p:spPr>
-            <a:xfrm>
-              <a:off x="817517" y="5142518"/>
-              <a:ext cx="7799693" cy="0"/>
+            <p:cNvPr id="4" name="rc4"/>
+            <p:cNvSpPr/>
+            <p:nvPr/>
+          </p:nvSpPr>
+          <p:spPr>
+            <a:xfrm>
+              <a:off x="457200" y="1600200"/>
+              <a:ext cx="8229600" cy="4525962"/>
+            </a:xfrm>
+            <a:prstGeom prst="rect">
+              <a:avLst/>
+            </a:prstGeom>
+            <a:solidFill>
+              <a:srgbClr val="FFFFFF">
+                <a:alpha val="100000"/>
+              </a:srgbClr>
+            </a:solidFill>
+            <a:ln w="13550" cap="rnd">
+              <a:solidFill>
+                <a:srgbClr val="FFFFFF">
+                  <a:alpha val="100000"/>
+                </a:srgbClr>
+              </a:solidFill>
+              <a:prstDash val="solid"/>
+              <a:round/>
+            </a:ln>
+          </p:spPr>
+          <p:txBody>
+            <a:bodyPr/>
+            <a:lstStyle/>
+            <a:p/>
+          </p:txBody>
+        </p:sp>
+        <p:sp>
+          <p:nvSpPr>
+            <p:cNvPr id="5" name="pl5"/>
+            <p:cNvSpPr/>
+            <p:nvPr/>
+          </p:nvSpPr>
+          <p:spPr>
+            <a:xfrm>
+              <a:off x="887106" y="3250627"/>
+              <a:ext cx="7660515" cy="0"/>
             </a:xfrm>
             <a:custGeom>
               <a:avLst/>
               <a:pathLst>
-                <a:path w="7799693" h="0">
+                <a:path w="7660515" h="0">
                   <a:moveTo>
                     <a:pt x="0" y="0"/>
                   </a:moveTo>
                   <a:lnTo>
-                    <a:pt x="7799693" y="0"/>
-                  </a:lnTo>
-                  <a:lnTo>
-                    <a:pt x="7799693" y="0"/>
+                    <a:pt x="7660515" y="0"/>
+                  </a:lnTo>
+                  <a:lnTo>
+                    <a:pt x="7660515" y="0"/>
                   </a:lnTo>
                 </a:path>
               </a:pathLst>
@@ -2308,27 +2343,27 @@
         </p:sp>
         <p:sp>
           <p:nvSpPr>
-            <p:cNvPr id="5" name="pl5"/>
-            <p:cNvSpPr/>
-            <p:nvPr/>
-          </p:nvSpPr>
-          <p:spPr>
-            <a:xfrm>
-              <a:off x="817517" y="4313054"/>
-              <a:ext cx="7799693" cy="0"/>
+            <p:cNvPr id="6" name="pl6"/>
+            <p:cNvSpPr/>
+            <p:nvPr/>
+          </p:nvSpPr>
+          <p:spPr>
+            <a:xfrm>
+              <a:off x="887106" y="2951293"/>
+              <a:ext cx="7660515" cy="0"/>
             </a:xfrm>
             <a:custGeom>
               <a:avLst/>
               <a:pathLst>
-                <a:path w="7799693" h="0">
+                <a:path w="7660515" h="0">
                   <a:moveTo>
                     <a:pt x="0" y="0"/>
                   </a:moveTo>
                   <a:lnTo>
-                    <a:pt x="7799693" y="0"/>
-                  </a:lnTo>
-                  <a:lnTo>
-                    <a:pt x="7799693" y="0"/>
+                    <a:pt x="7660515" y="0"/>
+                  </a:lnTo>
+                  <a:lnTo>
+                    <a:pt x="7660515" y="0"/>
                   </a:lnTo>
                 </a:path>
               </a:pathLst>
@@ -2351,27 +2386,27 @@
         </p:sp>
         <p:sp>
           <p:nvSpPr>
-            <p:cNvPr id="6" name="pl6"/>
-            <p:cNvSpPr/>
-            <p:nvPr/>
-          </p:nvSpPr>
-          <p:spPr>
-            <a:xfrm>
-              <a:off x="817517" y="3483591"/>
-              <a:ext cx="7799693" cy="0"/>
+            <p:cNvPr id="7" name="pl7"/>
+            <p:cNvSpPr/>
+            <p:nvPr/>
+          </p:nvSpPr>
+          <p:spPr>
+            <a:xfrm>
+              <a:off x="887106" y="2651959"/>
+              <a:ext cx="7660515" cy="0"/>
             </a:xfrm>
             <a:custGeom>
               <a:avLst/>
               <a:pathLst>
-                <a:path w="7799693" h="0">
+                <a:path w="7660515" h="0">
                   <a:moveTo>
                     <a:pt x="0" y="0"/>
                   </a:moveTo>
                   <a:lnTo>
-                    <a:pt x="7799693" y="0"/>
-                  </a:lnTo>
-                  <a:lnTo>
-                    <a:pt x="7799693" y="0"/>
+                    <a:pt x="7660515" y="0"/>
+                  </a:lnTo>
+                  <a:lnTo>
+                    <a:pt x="7660515" y="0"/>
                   </a:lnTo>
                 </a:path>
               </a:pathLst>
@@ -2394,27 +2429,27 @@
         </p:sp>
         <p:sp>
           <p:nvSpPr>
-            <p:cNvPr id="7" name="pl7"/>
-            <p:cNvSpPr/>
-            <p:nvPr/>
-          </p:nvSpPr>
-          <p:spPr>
-            <a:xfrm>
-              <a:off x="817517" y="2654127"/>
-              <a:ext cx="7799693" cy="0"/>
+            <p:cNvPr id="8" name="pl8"/>
+            <p:cNvSpPr/>
+            <p:nvPr/>
+          </p:nvSpPr>
+          <p:spPr>
+            <a:xfrm>
+              <a:off x="887106" y="2352625"/>
+              <a:ext cx="7660515" cy="0"/>
             </a:xfrm>
             <a:custGeom>
               <a:avLst/>
               <a:pathLst>
-                <a:path w="7799693" h="0">
+                <a:path w="7660515" h="0">
                   <a:moveTo>
                     <a:pt x="0" y="0"/>
                   </a:moveTo>
                   <a:lnTo>
-                    <a:pt x="7799693" y="0"/>
-                  </a:lnTo>
-                  <a:lnTo>
-                    <a:pt x="7799693" y="0"/>
+                    <a:pt x="7660515" y="0"/>
+                  </a:lnTo>
+                  <a:lnTo>
+                    <a:pt x="7660515" y="0"/>
                   </a:lnTo>
                 </a:path>
               </a:pathLst>
@@ -2437,21 +2472,21 @@
         </p:sp>
         <p:sp>
           <p:nvSpPr>
-            <p:cNvPr id="8" name="pl8"/>
-            <p:cNvSpPr/>
-            <p:nvPr/>
-          </p:nvSpPr>
-          <p:spPr>
-            <a:xfrm>
-              <a:off x="1344837" y="2073503"/>
-              <a:ext cx="0" cy="3649639"/>
+            <p:cNvPr id="9" name="pl9"/>
+            <p:cNvSpPr/>
+            <p:nvPr/>
+          </p:nvSpPr>
+          <p:spPr>
+            <a:xfrm>
+              <a:off x="1405017" y="2143092"/>
+              <a:ext cx="0" cy="1317069"/>
             </a:xfrm>
             <a:custGeom>
               <a:avLst/>
               <a:pathLst>
-                <a:path w="0" h="3649639">
+                <a:path w="0" h="1317069">
                   <a:moveTo>
-                    <a:pt x="0" y="3649639"/>
+                    <a:pt x="0" y="1317069"/>
                   </a:moveTo>
                   <a:lnTo>
                     <a:pt x="0" y="0"/>
@@ -2480,21 +2515,21 @@
         </p:sp>
         <p:sp>
           <p:nvSpPr>
-            <p:cNvPr id="9" name="pl9"/>
-            <p:cNvSpPr/>
-            <p:nvPr/>
-          </p:nvSpPr>
-          <p:spPr>
-            <a:xfrm>
-              <a:off x="3085958" y="2073503"/>
-              <a:ext cx="0" cy="3649639"/>
+            <p:cNvPr id="10" name="pl10"/>
+            <p:cNvSpPr/>
+            <p:nvPr/>
+          </p:nvSpPr>
+          <p:spPr>
+            <a:xfrm>
+              <a:off x="3115069" y="2143092"/>
+              <a:ext cx="0" cy="1317069"/>
             </a:xfrm>
             <a:custGeom>
               <a:avLst/>
               <a:pathLst>
-                <a:path w="0" h="3649639">
+                <a:path w="0" h="1317069">
                   <a:moveTo>
-                    <a:pt x="0" y="3649639"/>
+                    <a:pt x="0" y="1317069"/>
                   </a:moveTo>
                   <a:lnTo>
                     <a:pt x="0" y="0"/>
@@ -2523,21 +2558,21 @@
         </p:sp>
         <p:sp>
           <p:nvSpPr>
-            <p:cNvPr id="10" name="pl10"/>
-            <p:cNvSpPr/>
-            <p:nvPr/>
-          </p:nvSpPr>
-          <p:spPr>
-            <a:xfrm>
-              <a:off x="4827079" y="2073503"/>
-              <a:ext cx="0" cy="3649639"/>
+            <p:cNvPr id="11" name="pl11"/>
+            <p:cNvSpPr/>
+            <p:nvPr/>
+          </p:nvSpPr>
+          <p:spPr>
+            <a:xfrm>
+              <a:off x="4825121" y="2143092"/>
+              <a:ext cx="0" cy="1317069"/>
             </a:xfrm>
             <a:custGeom>
               <a:avLst/>
               <a:pathLst>
-                <a:path w="0" h="3649639">
+                <a:path w="0" h="1317069">
                   <a:moveTo>
-                    <a:pt x="0" y="3649639"/>
+                    <a:pt x="0" y="1317069"/>
                   </a:moveTo>
                   <a:lnTo>
                     <a:pt x="0" y="0"/>
@@ -2566,21 +2601,21 @@
         </p:sp>
         <p:sp>
           <p:nvSpPr>
-            <p:cNvPr id="11" name="pl11"/>
-            <p:cNvSpPr/>
-            <p:nvPr/>
-          </p:nvSpPr>
-          <p:spPr>
-            <a:xfrm>
-              <a:off x="6568199" y="2073503"/>
-              <a:ext cx="0" cy="3649639"/>
+            <p:cNvPr id="12" name="pl12"/>
+            <p:cNvSpPr/>
+            <p:nvPr/>
+          </p:nvSpPr>
+          <p:spPr>
+            <a:xfrm>
+              <a:off x="6535173" y="2143092"/>
+              <a:ext cx="0" cy="1317069"/>
             </a:xfrm>
             <a:custGeom>
               <a:avLst/>
               <a:pathLst>
-                <a:path w="0" h="3649639">
+                <a:path w="0" h="1317069">
                   <a:moveTo>
-                    <a:pt x="0" y="3649639"/>
+                    <a:pt x="0" y="1317069"/>
                   </a:moveTo>
                   <a:lnTo>
                     <a:pt x="0" y="0"/>
@@ -2609,21 +2644,21 @@
         </p:sp>
         <p:sp>
           <p:nvSpPr>
-            <p:cNvPr id="12" name="pl12"/>
-            <p:cNvSpPr/>
-            <p:nvPr/>
-          </p:nvSpPr>
-          <p:spPr>
-            <a:xfrm>
-              <a:off x="8309320" y="2073503"/>
-              <a:ext cx="0" cy="3649639"/>
+            <p:cNvPr id="13" name="pl13"/>
+            <p:cNvSpPr/>
+            <p:nvPr/>
+          </p:nvSpPr>
+          <p:spPr>
+            <a:xfrm>
+              <a:off x="8245225" y="2143092"/>
+              <a:ext cx="0" cy="1317069"/>
             </a:xfrm>
             <a:custGeom>
               <a:avLst/>
               <a:pathLst>
-                <a:path w="0" h="3649639">
+                <a:path w="0" h="1317069">
                   <a:moveTo>
-                    <a:pt x="0" y="3649639"/>
+                    <a:pt x="0" y="1317069"/>
                   </a:moveTo>
                   <a:lnTo>
                     <a:pt x="0" y="0"/>
@@ -2652,27 +2687,27 @@
         </p:sp>
         <p:sp>
           <p:nvSpPr>
-            <p:cNvPr id="13" name="pl13"/>
-            <p:cNvSpPr/>
-            <p:nvPr/>
-          </p:nvSpPr>
-          <p:spPr>
-            <a:xfrm>
-              <a:off x="817517" y="5557249"/>
-              <a:ext cx="7799693" cy="0"/>
+            <p:cNvPr id="14" name="pl14"/>
+            <p:cNvSpPr/>
+            <p:nvPr/>
+          </p:nvSpPr>
+          <p:spPr>
+            <a:xfrm>
+              <a:off x="887106" y="3400294"/>
+              <a:ext cx="7660515" cy="0"/>
             </a:xfrm>
             <a:custGeom>
               <a:avLst/>
               <a:pathLst>
-                <a:path w="7799693" h="0">
+                <a:path w="7660515" h="0">
                   <a:moveTo>
                     <a:pt x="0" y="0"/>
                   </a:moveTo>
                   <a:lnTo>
-                    <a:pt x="7799693" y="0"/>
-                  </a:lnTo>
-                  <a:lnTo>
-                    <a:pt x="7799693" y="0"/>
+                    <a:pt x="7660515" y="0"/>
+                  </a:lnTo>
+                  <a:lnTo>
+                    <a:pt x="7660515" y="0"/>
                   </a:lnTo>
                 </a:path>
               </a:pathLst>
@@ -2695,27 +2730,27 @@
         </p:sp>
         <p:sp>
           <p:nvSpPr>
-            <p:cNvPr id="14" name="pl14"/>
-            <p:cNvSpPr/>
-            <p:nvPr/>
-          </p:nvSpPr>
-          <p:spPr>
-            <a:xfrm>
-              <a:off x="817517" y="4727786"/>
-              <a:ext cx="7799693" cy="0"/>
+            <p:cNvPr id="15" name="pl15"/>
+            <p:cNvSpPr/>
+            <p:nvPr/>
+          </p:nvSpPr>
+          <p:spPr>
+            <a:xfrm>
+              <a:off x="887106" y="3100960"/>
+              <a:ext cx="7660515" cy="0"/>
             </a:xfrm>
             <a:custGeom>
               <a:avLst/>
               <a:pathLst>
-                <a:path w="7799693" h="0">
+                <a:path w="7660515" h="0">
                   <a:moveTo>
                     <a:pt x="0" y="0"/>
                   </a:moveTo>
                   <a:lnTo>
-                    <a:pt x="7799693" y="0"/>
-                  </a:lnTo>
-                  <a:lnTo>
-                    <a:pt x="7799693" y="0"/>
+                    <a:pt x="7660515" y="0"/>
+                  </a:lnTo>
+                  <a:lnTo>
+                    <a:pt x="7660515" y="0"/>
                   </a:lnTo>
                 </a:path>
               </a:pathLst>
@@ -2738,27 +2773,27 @@
         </p:sp>
         <p:sp>
           <p:nvSpPr>
-            <p:cNvPr id="15" name="pl15"/>
-            <p:cNvSpPr/>
-            <p:nvPr/>
-          </p:nvSpPr>
-          <p:spPr>
-            <a:xfrm>
-              <a:off x="817517" y="3898322"/>
-              <a:ext cx="7799693" cy="0"/>
+            <p:cNvPr id="16" name="pl16"/>
+            <p:cNvSpPr/>
+            <p:nvPr/>
+          </p:nvSpPr>
+          <p:spPr>
+            <a:xfrm>
+              <a:off x="887106" y="2801626"/>
+              <a:ext cx="7660515" cy="0"/>
             </a:xfrm>
             <a:custGeom>
               <a:avLst/>
               <a:pathLst>
-                <a:path w="7799693" h="0">
+                <a:path w="7660515" h="0">
                   <a:moveTo>
                     <a:pt x="0" y="0"/>
                   </a:moveTo>
                   <a:lnTo>
-                    <a:pt x="7799693" y="0"/>
-                  </a:lnTo>
-                  <a:lnTo>
-                    <a:pt x="7799693" y="0"/>
+                    <a:pt x="7660515" y="0"/>
+                  </a:lnTo>
+                  <a:lnTo>
+                    <a:pt x="7660515" y="0"/>
                   </a:lnTo>
                 </a:path>
               </a:pathLst>
@@ -2781,27 +2816,27 @@
         </p:sp>
         <p:sp>
           <p:nvSpPr>
-            <p:cNvPr id="16" name="pl16"/>
-            <p:cNvSpPr/>
-            <p:nvPr/>
-          </p:nvSpPr>
-          <p:spPr>
-            <a:xfrm>
-              <a:off x="817517" y="3068859"/>
-              <a:ext cx="7799693" cy="0"/>
+            <p:cNvPr id="17" name="pl17"/>
+            <p:cNvSpPr/>
+            <p:nvPr/>
+          </p:nvSpPr>
+          <p:spPr>
+            <a:xfrm>
+              <a:off x="887106" y="2502292"/>
+              <a:ext cx="7660515" cy="0"/>
             </a:xfrm>
             <a:custGeom>
               <a:avLst/>
               <a:pathLst>
-                <a:path w="7799693" h="0">
+                <a:path w="7660515" h="0">
                   <a:moveTo>
                     <a:pt x="0" y="0"/>
                   </a:moveTo>
                   <a:lnTo>
-                    <a:pt x="7799693" y="0"/>
-                  </a:lnTo>
-                  <a:lnTo>
-                    <a:pt x="7799693" y="0"/>
+                    <a:pt x="7660515" y="0"/>
+                  </a:lnTo>
+                  <a:lnTo>
+                    <a:pt x="7660515" y="0"/>
                   </a:lnTo>
                 </a:path>
               </a:pathLst>
@@ -2824,27 +2859,27 @@
         </p:sp>
         <p:sp>
           <p:nvSpPr>
-            <p:cNvPr id="17" name="pl17"/>
-            <p:cNvSpPr/>
-            <p:nvPr/>
-          </p:nvSpPr>
-          <p:spPr>
-            <a:xfrm>
-              <a:off x="817517" y="2239395"/>
-              <a:ext cx="7799693" cy="0"/>
+            <p:cNvPr id="18" name="pl18"/>
+            <p:cNvSpPr/>
+            <p:nvPr/>
+          </p:nvSpPr>
+          <p:spPr>
+            <a:xfrm>
+              <a:off x="887106" y="2202958"/>
+              <a:ext cx="7660515" cy="0"/>
             </a:xfrm>
             <a:custGeom>
               <a:avLst/>
               <a:pathLst>
-                <a:path w="7799693" h="0">
+                <a:path w="7660515" h="0">
                   <a:moveTo>
                     <a:pt x="0" y="0"/>
                   </a:moveTo>
                   <a:lnTo>
-                    <a:pt x="7799693" y="0"/>
-                  </a:lnTo>
-                  <a:lnTo>
-                    <a:pt x="7799693" y="0"/>
+                    <a:pt x="7660515" y="0"/>
+                  </a:lnTo>
+                  <a:lnTo>
+                    <a:pt x="7660515" y="0"/>
                   </a:lnTo>
                 </a:path>
               </a:pathLst>
@@ -2867,21 +2902,21 @@
         </p:sp>
         <p:sp>
           <p:nvSpPr>
-            <p:cNvPr id="18" name="pl18"/>
-            <p:cNvSpPr/>
-            <p:nvPr/>
-          </p:nvSpPr>
-          <p:spPr>
-            <a:xfrm>
-              <a:off x="2215398" y="2073503"/>
-              <a:ext cx="0" cy="3649639"/>
+            <p:cNvPr id="19" name="pl19"/>
+            <p:cNvSpPr/>
+            <p:nvPr/>
+          </p:nvSpPr>
+          <p:spPr>
+            <a:xfrm>
+              <a:off x="2260043" y="2143092"/>
+              <a:ext cx="0" cy="1317069"/>
             </a:xfrm>
             <a:custGeom>
               <a:avLst/>
               <a:pathLst>
-                <a:path w="0" h="3649639">
+                <a:path w="0" h="1317069">
                   <a:moveTo>
-                    <a:pt x="0" y="3649639"/>
+                    <a:pt x="0" y="1317069"/>
                   </a:moveTo>
                   <a:lnTo>
                     <a:pt x="0" y="0"/>
@@ -2910,21 +2945,21 @@
         </p:sp>
         <p:sp>
           <p:nvSpPr>
-            <p:cNvPr id="19" name="pl19"/>
-            <p:cNvSpPr/>
-            <p:nvPr/>
-          </p:nvSpPr>
-          <p:spPr>
-            <a:xfrm>
-              <a:off x="3956518" y="2073503"/>
-              <a:ext cx="0" cy="3649639"/>
+            <p:cNvPr id="20" name="pl20"/>
+            <p:cNvSpPr/>
+            <p:nvPr/>
+          </p:nvSpPr>
+          <p:spPr>
+            <a:xfrm>
+              <a:off x="3970095" y="2143092"/>
+              <a:ext cx="0" cy="1317069"/>
             </a:xfrm>
             <a:custGeom>
               <a:avLst/>
               <a:pathLst>
-                <a:path w="0" h="3649639">
+                <a:path w="0" h="1317069">
                   <a:moveTo>
-                    <a:pt x="0" y="3649639"/>
+                    <a:pt x="0" y="1317069"/>
                   </a:moveTo>
                   <a:lnTo>
                     <a:pt x="0" y="0"/>
@@ -2953,21 +2988,21 @@
         </p:sp>
         <p:sp>
           <p:nvSpPr>
-            <p:cNvPr id="20" name="pl20"/>
-            <p:cNvSpPr/>
-            <p:nvPr/>
-          </p:nvSpPr>
-          <p:spPr>
-            <a:xfrm>
-              <a:off x="5697639" y="2073503"/>
-              <a:ext cx="0" cy="3649639"/>
+            <p:cNvPr id="21" name="pl21"/>
+            <p:cNvSpPr/>
+            <p:nvPr/>
+          </p:nvSpPr>
+          <p:spPr>
+            <a:xfrm>
+              <a:off x="5680147" y="2143092"/>
+              <a:ext cx="0" cy="1317069"/>
             </a:xfrm>
             <a:custGeom>
               <a:avLst/>
               <a:pathLst>
-                <a:path w="0" h="3649639">
+                <a:path w="0" h="1317069">
                   <a:moveTo>
-                    <a:pt x="0" y="3649639"/>
+                    <a:pt x="0" y="1317069"/>
                   </a:moveTo>
                   <a:lnTo>
                     <a:pt x="0" y="0"/>
@@ -2996,21 +3031,21 @@
         </p:sp>
         <p:sp>
           <p:nvSpPr>
-            <p:cNvPr id="21" name="pl21"/>
-            <p:cNvSpPr/>
-            <p:nvPr/>
-          </p:nvSpPr>
-          <p:spPr>
-            <a:xfrm>
-              <a:off x="7438760" y="2073503"/>
-              <a:ext cx="0" cy="3649639"/>
+            <p:cNvPr id="22" name="pl22"/>
+            <p:cNvSpPr/>
+            <p:nvPr/>
+          </p:nvSpPr>
+          <p:spPr>
+            <a:xfrm>
+              <a:off x="7390199" y="2143092"/>
+              <a:ext cx="0" cy="1317069"/>
             </a:xfrm>
             <a:custGeom>
               <a:avLst/>
               <a:pathLst>
-                <a:path w="0" h="3649639">
+                <a:path w="0" h="1317069">
                   <a:moveTo>
-                    <a:pt x="0" y="3649639"/>
+                    <a:pt x="0" y="1317069"/>
                   </a:moveTo>
                   <a:lnTo>
                     <a:pt x="0" y="0"/>
@@ -3039,501 +3074,501 @@
         </p:sp>
         <p:sp>
           <p:nvSpPr>
-            <p:cNvPr id="22" name="pg22"/>
-            <p:cNvSpPr/>
-            <p:nvPr/>
-          </p:nvSpPr>
-          <p:spPr>
-            <a:xfrm>
-              <a:off x="1742575" y="2073503"/>
-              <a:ext cx="6520104" cy="3482882"/>
+            <p:cNvPr id="23" name="pg23"/>
+            <p:cNvSpPr/>
+            <p:nvPr/>
+          </p:nvSpPr>
+          <p:spPr>
+            <a:xfrm>
+              <a:off x="1795657" y="2143092"/>
+              <a:ext cx="6403759" cy="1256890"/>
             </a:xfrm>
             <a:custGeom>
               <a:avLst/>
               <a:pathLst>
-                <a:path w="6520104" h="3482882">
+                <a:path w="6403759" h="1256890">
                   <a:moveTo>
-                    <a:pt x="1720984" y="0"/>
+                    <a:pt x="1690274" y="0"/>
                   </a:moveTo>
                   <a:lnTo>
-                    <a:pt x="1721394" y="2632"/>
-                  </a:lnTo>
-                  <a:lnTo>
-                    <a:pt x="1793017" y="408276"/>
-                  </a:lnTo>
-                  <a:lnTo>
-                    <a:pt x="1864639" y="766652"/>
-                  </a:lnTo>
-                  <a:lnTo>
-                    <a:pt x="1936262" y="1083267"/>
-                  </a:lnTo>
-                  <a:lnTo>
-                    <a:pt x="2007885" y="1362988"/>
-                  </a:lnTo>
-                  <a:lnTo>
-                    <a:pt x="2079507" y="1610114"/>
-                  </a:lnTo>
-                  <a:lnTo>
-                    <a:pt x="2151130" y="1828443"/>
-                  </a:lnTo>
-                  <a:lnTo>
-                    <a:pt x="2222752" y="2021331"/>
-                  </a:lnTo>
-                  <a:lnTo>
-                    <a:pt x="2294375" y="2191742"/>
-                  </a:lnTo>
-                  <a:lnTo>
-                    <a:pt x="2365997" y="2342295"/>
-                  </a:lnTo>
-                  <a:lnTo>
-                    <a:pt x="2437620" y="2475305"/>
-                  </a:lnTo>
-                  <a:lnTo>
-                    <a:pt x="2509242" y="2592816"/>
-                  </a:lnTo>
-                  <a:lnTo>
-                    <a:pt x="2580865" y="2668302"/>
-                  </a:lnTo>
-                  <a:lnTo>
-                    <a:pt x="2652487" y="2700509"/>
-                  </a:lnTo>
-                  <a:lnTo>
-                    <a:pt x="2724110" y="2731445"/>
-                  </a:lnTo>
-                  <a:lnTo>
-                    <a:pt x="2795732" y="2761158"/>
-                  </a:lnTo>
-                  <a:lnTo>
-                    <a:pt x="2867355" y="2789698"/>
-                  </a:lnTo>
-                  <a:lnTo>
-                    <a:pt x="2938977" y="2817111"/>
-                  </a:lnTo>
-                  <a:lnTo>
-                    <a:pt x="3010600" y="2843441"/>
-                  </a:lnTo>
-                  <a:lnTo>
-                    <a:pt x="3082222" y="2868730"/>
-                  </a:lnTo>
-                  <a:lnTo>
-                    <a:pt x="3153845" y="2893022"/>
-                  </a:lnTo>
-                  <a:lnTo>
-                    <a:pt x="3225467" y="2916353"/>
-                  </a:lnTo>
-                  <a:lnTo>
-                    <a:pt x="3297090" y="2938763"/>
-                  </a:lnTo>
-                  <a:lnTo>
-                    <a:pt x="3368713" y="2960288"/>
-                  </a:lnTo>
-                  <a:lnTo>
-                    <a:pt x="3440335" y="2980963"/>
-                  </a:lnTo>
-                  <a:lnTo>
-                    <a:pt x="3511958" y="3000822"/>
-                  </a:lnTo>
-                  <a:lnTo>
-                    <a:pt x="3583580" y="3019895"/>
-                  </a:lnTo>
-                  <a:lnTo>
-                    <a:pt x="3655203" y="3038216"/>
-                  </a:lnTo>
-                  <a:lnTo>
-                    <a:pt x="3726825" y="3055813"/>
-                  </a:lnTo>
-                  <a:lnTo>
-                    <a:pt x="3798448" y="3072715"/>
-                  </a:lnTo>
-                  <a:lnTo>
-                    <a:pt x="3870070" y="3088949"/>
-                  </a:lnTo>
-                  <a:lnTo>
-                    <a:pt x="3941693" y="3104543"/>
-                  </a:lnTo>
-                  <a:lnTo>
-                    <a:pt x="4013315" y="3119520"/>
-                  </a:lnTo>
-                  <a:lnTo>
-                    <a:pt x="4084938" y="3133906"/>
-                  </a:lnTo>
-                  <a:lnTo>
-                    <a:pt x="4156560" y="3147723"/>
-                  </a:lnTo>
-                  <a:lnTo>
-                    <a:pt x="4228183" y="3160995"/>
-                  </a:lnTo>
-                  <a:lnTo>
-                    <a:pt x="4299805" y="3173743"/>
-                  </a:lnTo>
-                  <a:lnTo>
-                    <a:pt x="4371428" y="3185987"/>
-                  </a:lnTo>
-                  <a:lnTo>
-                    <a:pt x="4443050" y="3197747"/>
-                  </a:lnTo>
-                  <a:lnTo>
-                    <a:pt x="4514673" y="3209043"/>
-                  </a:lnTo>
-                  <a:lnTo>
-                    <a:pt x="4586295" y="3219893"/>
-                  </a:lnTo>
-                  <a:lnTo>
-                    <a:pt x="4657918" y="3230314"/>
-                  </a:lnTo>
-                  <a:lnTo>
-                    <a:pt x="4729541" y="3240324"/>
-                  </a:lnTo>
-                  <a:lnTo>
-                    <a:pt x="4801163" y="3249938"/>
-                  </a:lnTo>
-                  <a:lnTo>
-                    <a:pt x="4872786" y="3259173"/>
-                  </a:lnTo>
-                  <a:lnTo>
-                    <a:pt x="4944408" y="3268043"/>
-                  </a:lnTo>
-                  <a:lnTo>
-                    <a:pt x="5016031" y="3276563"/>
-                  </a:lnTo>
-                  <a:lnTo>
-                    <a:pt x="5087653" y="3284746"/>
-                  </a:lnTo>
-                  <a:lnTo>
-                    <a:pt x="5159276" y="3292606"/>
-                  </a:lnTo>
-                  <a:lnTo>
-                    <a:pt x="5230898" y="3300155"/>
-                  </a:lnTo>
-                  <a:lnTo>
-                    <a:pt x="5302521" y="3307406"/>
-                  </a:lnTo>
-                  <a:lnTo>
-                    <a:pt x="5374143" y="3314371"/>
-                  </a:lnTo>
-                  <a:lnTo>
-                    <a:pt x="5445766" y="3321061"/>
-                  </a:lnTo>
-                  <a:lnTo>
-                    <a:pt x="5517388" y="3327486"/>
-                  </a:lnTo>
-                  <a:lnTo>
-                    <a:pt x="5589011" y="3333658"/>
-                  </a:lnTo>
-                  <a:lnTo>
-                    <a:pt x="5660633" y="3339586"/>
-                  </a:lnTo>
-                  <a:lnTo>
-                    <a:pt x="5732256" y="3345280"/>
-                  </a:lnTo>
-                  <a:lnTo>
-                    <a:pt x="5803878" y="3350749"/>
-                  </a:lnTo>
-                  <a:lnTo>
-                    <a:pt x="5875501" y="3356002"/>
-                  </a:lnTo>
-                  <a:lnTo>
-                    <a:pt x="5947123" y="3361047"/>
-                  </a:lnTo>
-                  <a:lnTo>
-                    <a:pt x="6018746" y="3365894"/>
-                  </a:lnTo>
-                  <a:lnTo>
-                    <a:pt x="6090369" y="3370548"/>
-                  </a:lnTo>
-                  <a:lnTo>
-                    <a:pt x="6161991" y="3375019"/>
-                  </a:lnTo>
-                  <a:lnTo>
-                    <a:pt x="6233614" y="3379314"/>
-                  </a:lnTo>
-                  <a:lnTo>
-                    <a:pt x="6305236" y="3383438"/>
-                  </a:lnTo>
-                  <a:lnTo>
-                    <a:pt x="6376859" y="3387400"/>
-                  </a:lnTo>
-                  <a:lnTo>
-                    <a:pt x="6448481" y="3391206"/>
-                  </a:lnTo>
-                  <a:lnTo>
-                    <a:pt x="6520104" y="3394861"/>
-                  </a:lnTo>
-                  <a:lnTo>
-                    <a:pt x="6520104" y="3482882"/>
-                  </a:lnTo>
-                  <a:lnTo>
-                    <a:pt x="6448481" y="3482768"/>
-                  </a:lnTo>
-                  <a:lnTo>
-                    <a:pt x="6376859" y="3482639"/>
-                  </a:lnTo>
-                  <a:lnTo>
-                    <a:pt x="6305236" y="3482493"/>
-                  </a:lnTo>
-                  <a:lnTo>
-                    <a:pt x="6233614" y="3482328"/>
-                  </a:lnTo>
-                  <a:lnTo>
-                    <a:pt x="6161991" y="3482141"/>
-                  </a:lnTo>
-                  <a:lnTo>
-                    <a:pt x="6090369" y="3481929"/>
-                  </a:lnTo>
-                  <a:lnTo>
-                    <a:pt x="6018746" y="3481689"/>
-                  </a:lnTo>
-                  <a:lnTo>
-                    <a:pt x="5947123" y="3481418"/>
-                  </a:lnTo>
-                  <a:lnTo>
-                    <a:pt x="5875501" y="3481111"/>
-                  </a:lnTo>
-                  <a:lnTo>
-                    <a:pt x="5803878" y="3480763"/>
-                  </a:lnTo>
-                  <a:lnTo>
-                    <a:pt x="5732256" y="3480369"/>
-                  </a:lnTo>
-                  <a:lnTo>
-                    <a:pt x="5660633" y="3479924"/>
-                  </a:lnTo>
-                  <a:lnTo>
-                    <a:pt x="5589011" y="3479420"/>
-                  </a:lnTo>
-                  <a:lnTo>
-                    <a:pt x="5517388" y="3478849"/>
-                  </a:lnTo>
-                  <a:lnTo>
-                    <a:pt x="5445766" y="3478203"/>
-                  </a:lnTo>
-                  <a:lnTo>
-                    <a:pt x="5374143" y="3477472"/>
-                  </a:lnTo>
-                  <a:lnTo>
-                    <a:pt x="5302521" y="3476644"/>
-                  </a:lnTo>
-                  <a:lnTo>
-                    <a:pt x="5230898" y="3475708"/>
-                  </a:lnTo>
-                  <a:lnTo>
-                    <a:pt x="5159276" y="3474647"/>
-                  </a:lnTo>
-                  <a:lnTo>
-                    <a:pt x="5087653" y="3473447"/>
-                  </a:lnTo>
-                  <a:lnTo>
-                    <a:pt x="5016031" y="3472089"/>
-                  </a:lnTo>
-                  <a:lnTo>
-                    <a:pt x="4944408" y="3470551"/>
-                  </a:lnTo>
-                  <a:lnTo>
-                    <a:pt x="4872786" y="3468811"/>
-                  </a:lnTo>
-                  <a:lnTo>
-                    <a:pt x="4801163" y="3466841"/>
-                  </a:lnTo>
-                  <a:lnTo>
-                    <a:pt x="4729541" y="3464611"/>
-                  </a:lnTo>
-                  <a:lnTo>
-                    <a:pt x="4657918" y="3462087"/>
-                  </a:lnTo>
-                  <a:lnTo>
-                    <a:pt x="4586295" y="3459231"/>
-                  </a:lnTo>
-                  <a:lnTo>
-                    <a:pt x="4514673" y="3455997"/>
-                  </a:lnTo>
-                  <a:lnTo>
-                    <a:pt x="4443050" y="3452337"/>
-                  </a:lnTo>
-                  <a:lnTo>
-                    <a:pt x="4371428" y="3448194"/>
-                  </a:lnTo>
-                  <a:lnTo>
-                    <a:pt x="4299805" y="3443505"/>
-                  </a:lnTo>
-                  <a:lnTo>
-                    <a:pt x="4228183" y="3438197"/>
-                  </a:lnTo>
-                  <a:lnTo>
-                    <a:pt x="4156560" y="3432189"/>
-                  </a:lnTo>
-                  <a:lnTo>
-                    <a:pt x="4084938" y="3425389"/>
-                  </a:lnTo>
-                  <a:lnTo>
-                    <a:pt x="4013315" y="3417692"/>
-                  </a:lnTo>
-                  <a:lnTo>
-                    <a:pt x="3941693" y="3408980"/>
-                  </a:lnTo>
-                  <a:lnTo>
-                    <a:pt x="3870070" y="3399118"/>
-                  </a:lnTo>
-                  <a:lnTo>
-                    <a:pt x="3798448" y="3387956"/>
-                  </a:lnTo>
-                  <a:lnTo>
-                    <a:pt x="3726825" y="3375322"/>
-                  </a:lnTo>
-                  <a:lnTo>
-                    <a:pt x="3655203" y="3361021"/>
-                  </a:lnTo>
-                  <a:lnTo>
-                    <a:pt x="3583580" y="3344834"/>
-                  </a:lnTo>
-                  <a:lnTo>
-                    <a:pt x="3511958" y="3326512"/>
-                  </a:lnTo>
-                  <a:lnTo>
-                    <a:pt x="3440335" y="3305773"/>
-                  </a:lnTo>
-                  <a:lnTo>
-                    <a:pt x="3368713" y="3282299"/>
-                  </a:lnTo>
-                  <a:lnTo>
-                    <a:pt x="3297090" y="3255728"/>
-                  </a:lnTo>
-                  <a:lnTo>
-                    <a:pt x="3225467" y="3225654"/>
-                  </a:lnTo>
-                  <a:lnTo>
-                    <a:pt x="3153845" y="3191612"/>
-                  </a:lnTo>
-                  <a:lnTo>
-                    <a:pt x="3082222" y="3153080"/>
-                  </a:lnTo>
-                  <a:lnTo>
-                    <a:pt x="3010600" y="3109467"/>
-                  </a:lnTo>
-                  <a:lnTo>
-                    <a:pt x="2938977" y="3060100"/>
-                  </a:lnTo>
-                  <a:lnTo>
-                    <a:pt x="2867355" y="3004223"/>
-                  </a:lnTo>
-                  <a:lnTo>
-                    <a:pt x="2795732" y="2940975"/>
-                  </a:lnTo>
-                  <a:lnTo>
-                    <a:pt x="2724110" y="2869386"/>
-                  </a:lnTo>
-                  <a:lnTo>
-                    <a:pt x="2652487" y="2788354"/>
-                  </a:lnTo>
-                  <a:lnTo>
-                    <a:pt x="2580865" y="2696634"/>
-                  </a:lnTo>
-                  <a:lnTo>
-                    <a:pt x="2509242" y="2634770"/>
-                  </a:lnTo>
-                  <a:lnTo>
-                    <a:pt x="2437620" y="2599860"/>
-                  </a:lnTo>
-                  <a:lnTo>
-                    <a:pt x="2365997" y="2563514"/>
-                  </a:lnTo>
-                  <a:lnTo>
-                    <a:pt x="2294375" y="2525673"/>
-                  </a:lnTo>
-                  <a:lnTo>
-                    <a:pt x="2222752" y="2486276"/>
-                  </a:lnTo>
-                  <a:lnTo>
-                    <a:pt x="2151130" y="2445259"/>
-                  </a:lnTo>
-                  <a:lnTo>
-                    <a:pt x="2079507" y="2402556"/>
-                  </a:lnTo>
-                  <a:lnTo>
-                    <a:pt x="2007885" y="2358096"/>
-                  </a:lnTo>
-                  <a:lnTo>
-                    <a:pt x="1936262" y="2311809"/>
-                  </a:lnTo>
-                  <a:lnTo>
-                    <a:pt x="1864639" y="2263618"/>
-                  </a:lnTo>
-                  <a:lnTo>
-                    <a:pt x="1793017" y="2213445"/>
-                  </a:lnTo>
-                  <a:lnTo>
-                    <a:pt x="1721394" y="2161209"/>
-                  </a:lnTo>
-                  <a:lnTo>
-                    <a:pt x="1649772" y="2106825"/>
-                  </a:lnTo>
-                  <a:lnTo>
-                    <a:pt x="1578149" y="2050205"/>
-                  </a:lnTo>
-                  <a:lnTo>
-                    <a:pt x="1506527" y="1991257"/>
-                  </a:lnTo>
-                  <a:lnTo>
-                    <a:pt x="1434904" y="1929885"/>
-                  </a:lnTo>
-                  <a:lnTo>
-                    <a:pt x="1363282" y="1865988"/>
-                  </a:lnTo>
-                  <a:lnTo>
-                    <a:pt x="1291659" y="1799465"/>
-                  </a:lnTo>
-                  <a:lnTo>
-                    <a:pt x="1220037" y="1730206"/>
-                  </a:lnTo>
-                  <a:lnTo>
-                    <a:pt x="1148414" y="1658099"/>
-                  </a:lnTo>
-                  <a:lnTo>
-                    <a:pt x="1076792" y="1583027"/>
-                  </a:lnTo>
-                  <a:lnTo>
-                    <a:pt x="1005169" y="1504868"/>
-                  </a:lnTo>
-                  <a:lnTo>
-                    <a:pt x="933547" y="1423494"/>
-                  </a:lnTo>
-                  <a:lnTo>
-                    <a:pt x="861924" y="1338775"/>
-                  </a:lnTo>
-                  <a:lnTo>
-                    <a:pt x="790302" y="1250572"/>
-                  </a:lnTo>
-                  <a:lnTo>
-                    <a:pt x="718679" y="1158742"/>
-                  </a:lnTo>
-                  <a:lnTo>
-                    <a:pt x="647057" y="1063136"/>
-                  </a:lnTo>
-                  <a:lnTo>
-                    <a:pt x="575434" y="963599"/>
-                  </a:lnTo>
-                  <a:lnTo>
-                    <a:pt x="503811" y="859968"/>
-                  </a:lnTo>
-                  <a:lnTo>
-                    <a:pt x="432189" y="752076"/>
-                  </a:lnTo>
-                  <a:lnTo>
-                    <a:pt x="360566" y="639748"/>
-                  </a:lnTo>
-                  <a:lnTo>
-                    <a:pt x="288944" y="522800"/>
-                  </a:lnTo>
-                  <a:lnTo>
-                    <a:pt x="217321" y="401044"/>
-                  </a:lnTo>
-                  <a:lnTo>
-                    <a:pt x="145699" y="274280"/>
-                  </a:lnTo>
-                  <a:lnTo>
-                    <a:pt x="74076" y="142304"/>
-                  </a:lnTo>
-                  <a:lnTo>
-                    <a:pt x="2454" y="4902"/>
+                    <a:pt x="1690678" y="950"/>
+                  </a:lnTo>
+                  <a:lnTo>
+                    <a:pt x="1761022" y="147337"/>
+                  </a:lnTo>
+                  <a:lnTo>
+                    <a:pt x="1831367" y="276666"/>
+                  </a:lnTo>
+                  <a:lnTo>
+                    <a:pt x="1901711" y="390925"/>
+                  </a:lnTo>
+                  <a:lnTo>
+                    <a:pt x="1972056" y="491870"/>
+                  </a:lnTo>
+                  <a:lnTo>
+                    <a:pt x="2042400" y="581052"/>
+                  </a:lnTo>
+                  <a:lnTo>
+                    <a:pt x="2112745" y="659842"/>
+                  </a:lnTo>
+                  <a:lnTo>
+                    <a:pt x="2183089" y="729450"/>
+                  </a:lnTo>
+                  <a:lnTo>
+                    <a:pt x="2253434" y="790948"/>
+                  </a:lnTo>
+                  <a:lnTo>
+                    <a:pt x="2323778" y="845279"/>
+                  </a:lnTo>
+                  <a:lnTo>
+                    <a:pt x="2394123" y="893279"/>
+                  </a:lnTo>
+                  <a:lnTo>
+                    <a:pt x="2464467" y="935686"/>
+                  </a:lnTo>
+                  <a:lnTo>
+                    <a:pt x="2534812" y="962927"/>
+                  </a:lnTo>
+                  <a:lnTo>
+                    <a:pt x="2605156" y="974550"/>
+                  </a:lnTo>
+                  <a:lnTo>
+                    <a:pt x="2675501" y="985714"/>
+                  </a:lnTo>
+                  <a:lnTo>
+                    <a:pt x="2745845" y="996437"/>
+                  </a:lnTo>
+                  <a:lnTo>
+                    <a:pt x="2816190" y="1006736"/>
+                  </a:lnTo>
+                  <a:lnTo>
+                    <a:pt x="2886534" y="1016629"/>
+                  </a:lnTo>
+                  <a:lnTo>
+                    <a:pt x="2956879" y="1026130"/>
+                  </a:lnTo>
+                  <a:lnTo>
+                    <a:pt x="3027223" y="1035257"/>
+                  </a:lnTo>
+                  <a:lnTo>
+                    <a:pt x="3097568" y="1044023"/>
+                  </a:lnTo>
+                  <a:lnTo>
+                    <a:pt x="3167912" y="1052443"/>
+                  </a:lnTo>
+                  <a:lnTo>
+                    <a:pt x="3238257" y="1060530"/>
+                  </a:lnTo>
+                  <a:lnTo>
+                    <a:pt x="3308601" y="1068298"/>
+                  </a:lnTo>
+                  <a:lnTo>
+                    <a:pt x="3378946" y="1075759"/>
+                  </a:lnTo>
+                  <a:lnTo>
+                    <a:pt x="3449290" y="1082926"/>
+                  </a:lnTo>
+                  <a:lnTo>
+                    <a:pt x="3519635" y="1089809"/>
+                  </a:lnTo>
+                  <a:lnTo>
+                    <a:pt x="3589979" y="1096420"/>
+                  </a:lnTo>
+                  <a:lnTo>
+                    <a:pt x="3660324" y="1102771"/>
+                  </a:lnTo>
+                  <a:lnTo>
+                    <a:pt x="3730668" y="1108870"/>
+                  </a:lnTo>
+                  <a:lnTo>
+                    <a:pt x="3801012" y="1114729"/>
+                  </a:lnTo>
+                  <a:lnTo>
+                    <a:pt x="3871357" y="1120356"/>
+                  </a:lnTo>
+                  <a:lnTo>
+                    <a:pt x="3941701" y="1125761"/>
+                  </a:lnTo>
+                  <a:lnTo>
+                    <a:pt x="4012046" y="1130952"/>
+                  </a:lnTo>
+                  <a:lnTo>
+                    <a:pt x="4082390" y="1135939"/>
+                  </a:lnTo>
+                  <a:lnTo>
+                    <a:pt x="4152735" y="1140728"/>
+                  </a:lnTo>
+                  <a:lnTo>
+                    <a:pt x="4223079" y="1145329"/>
+                  </a:lnTo>
+                  <a:lnTo>
+                    <a:pt x="4293424" y="1149747"/>
+                  </a:lnTo>
+                  <a:lnTo>
+                    <a:pt x="4363768" y="1153991"/>
+                  </a:lnTo>
+                  <a:lnTo>
+                    <a:pt x="4434113" y="1158068"/>
+                  </a:lnTo>
+                  <a:lnTo>
+                    <a:pt x="4504457" y="1161983"/>
+                  </a:lnTo>
+                  <a:lnTo>
+                    <a:pt x="4574802" y="1165744"/>
+                  </a:lnTo>
+                  <a:lnTo>
+                    <a:pt x="4645146" y="1169356"/>
+                  </a:lnTo>
+                  <a:lnTo>
+                    <a:pt x="4715491" y="1172826"/>
+                  </a:lnTo>
+                  <a:lnTo>
+                    <a:pt x="4785835" y="1176159"/>
+                  </a:lnTo>
+                  <a:lnTo>
+                    <a:pt x="4856180" y="1179360"/>
+                  </a:lnTo>
+                  <a:lnTo>
+                    <a:pt x="4926524" y="1182434"/>
+                  </a:lnTo>
+                  <a:lnTo>
+                    <a:pt x="4996869" y="1185387"/>
+                  </a:lnTo>
+                  <a:lnTo>
+                    <a:pt x="5067213" y="1188224"/>
+                  </a:lnTo>
+                  <a:lnTo>
+                    <a:pt x="5137558" y="1190948"/>
+                  </a:lnTo>
+                  <a:lnTo>
+                    <a:pt x="5207902" y="1193565"/>
+                  </a:lnTo>
+                  <a:lnTo>
+                    <a:pt x="5278247" y="1196078"/>
+                  </a:lnTo>
+                  <a:lnTo>
+                    <a:pt x="5348591" y="1198492"/>
+                  </a:lnTo>
+                  <a:lnTo>
+                    <a:pt x="5418936" y="1200811"/>
+                  </a:lnTo>
+                  <a:lnTo>
+                    <a:pt x="5489280" y="1203038"/>
+                  </a:lnTo>
+                  <a:lnTo>
+                    <a:pt x="5559625" y="1205178"/>
+                  </a:lnTo>
+                  <a:lnTo>
+                    <a:pt x="5629969" y="1207233"/>
+                  </a:lnTo>
+                  <a:lnTo>
+                    <a:pt x="5700314" y="1209206"/>
+                  </a:lnTo>
+                  <a:lnTo>
+                    <a:pt x="5770658" y="1211102"/>
+                  </a:lnTo>
+                  <a:lnTo>
+                    <a:pt x="5841003" y="1212923"/>
+                  </a:lnTo>
+                  <a:lnTo>
+                    <a:pt x="5911347" y="1214671"/>
+                  </a:lnTo>
+                  <a:lnTo>
+                    <a:pt x="5981692" y="1216351"/>
+                  </a:lnTo>
+                  <a:lnTo>
+                    <a:pt x="6052036" y="1217965"/>
+                  </a:lnTo>
+                  <a:lnTo>
+                    <a:pt x="6122381" y="1219514"/>
+                  </a:lnTo>
+                  <a:lnTo>
+                    <a:pt x="6192725" y="1221003"/>
+                  </a:lnTo>
+                  <a:lnTo>
+                    <a:pt x="6263070" y="1222433"/>
+                  </a:lnTo>
+                  <a:lnTo>
+                    <a:pt x="6333414" y="1223806"/>
+                  </a:lnTo>
+                  <a:lnTo>
+                    <a:pt x="6403759" y="1225125"/>
+                  </a:lnTo>
+                  <a:lnTo>
+                    <a:pt x="6403759" y="1256890"/>
+                  </a:lnTo>
+                  <a:lnTo>
+                    <a:pt x="6333414" y="1256849"/>
+                  </a:lnTo>
+                  <a:lnTo>
+                    <a:pt x="6263070" y="1256802"/>
+                  </a:lnTo>
+                  <a:lnTo>
+                    <a:pt x="6192725" y="1256749"/>
+                  </a:lnTo>
+                  <a:lnTo>
+                    <a:pt x="6122381" y="1256690"/>
+                  </a:lnTo>
+                  <a:lnTo>
+                    <a:pt x="6052036" y="1256622"/>
+                  </a:lnTo>
+                  <a:lnTo>
+                    <a:pt x="5981692" y="1256546"/>
+                  </a:lnTo>
+                  <a:lnTo>
+                    <a:pt x="5911347" y="1256459"/>
+                  </a:lnTo>
+                  <a:lnTo>
+                    <a:pt x="5841003" y="1256361"/>
+                  </a:lnTo>
+                  <a:lnTo>
+                    <a:pt x="5770658" y="1256251"/>
+                  </a:lnTo>
+                  <a:lnTo>
+                    <a:pt x="5700314" y="1256125"/>
+                  </a:lnTo>
+                  <a:lnTo>
+                    <a:pt x="5629969" y="1255983"/>
+                  </a:lnTo>
+                  <a:lnTo>
+                    <a:pt x="5559625" y="1255822"/>
+                  </a:lnTo>
+                  <a:lnTo>
+                    <a:pt x="5489280" y="1255640"/>
+                  </a:lnTo>
+                  <a:lnTo>
+                    <a:pt x="5418936" y="1255434"/>
+                  </a:lnTo>
+                  <a:lnTo>
+                    <a:pt x="5348591" y="1255201"/>
+                  </a:lnTo>
+                  <a:lnTo>
+                    <a:pt x="5278247" y="1254938"/>
+                  </a:lnTo>
+                  <a:lnTo>
+                    <a:pt x="5207902" y="1254639"/>
+                  </a:lnTo>
+                  <a:lnTo>
+                    <a:pt x="5137558" y="1254301"/>
+                  </a:lnTo>
+                  <a:lnTo>
+                    <a:pt x="5067213" y="1253918"/>
+                  </a:lnTo>
+                  <a:lnTo>
+                    <a:pt x="4996869" y="1253485"/>
+                  </a:lnTo>
+                  <a:lnTo>
+                    <a:pt x="4926524" y="1252995"/>
+                  </a:lnTo>
+                  <a:lnTo>
+                    <a:pt x="4856180" y="1252440"/>
+                  </a:lnTo>
+                  <a:lnTo>
+                    <a:pt x="4785835" y="1251812"/>
+                  </a:lnTo>
+                  <a:lnTo>
+                    <a:pt x="4715491" y="1251101"/>
+                  </a:lnTo>
+                  <a:lnTo>
+                    <a:pt x="4645146" y="1250296"/>
+                  </a:lnTo>
+                  <a:lnTo>
+                    <a:pt x="4574802" y="1249386"/>
+                  </a:lnTo>
+                  <a:lnTo>
+                    <a:pt x="4504457" y="1248355"/>
+                  </a:lnTo>
+                  <a:lnTo>
+                    <a:pt x="4434113" y="1247188"/>
+                  </a:lnTo>
+                  <a:lnTo>
+                    <a:pt x="4363768" y="1245867"/>
+                  </a:lnTo>
+                  <a:lnTo>
+                    <a:pt x="4293424" y="1244372"/>
+                  </a:lnTo>
+                  <a:lnTo>
+                    <a:pt x="4223079" y="1242680"/>
+                  </a:lnTo>
+                  <a:lnTo>
+                    <a:pt x="4152735" y="1240764"/>
+                  </a:lnTo>
+                  <a:lnTo>
+                    <a:pt x="4082390" y="1238596"/>
+                  </a:lnTo>
+                  <a:lnTo>
+                    <a:pt x="4012046" y="1236142"/>
+                  </a:lnTo>
+                  <a:lnTo>
+                    <a:pt x="3941701" y="1233364"/>
+                  </a:lnTo>
+                  <a:lnTo>
+                    <a:pt x="3871357" y="1230220"/>
+                  </a:lnTo>
+                  <a:lnTo>
+                    <a:pt x="3801012" y="1226661"/>
+                  </a:lnTo>
+                  <a:lnTo>
+                    <a:pt x="3730668" y="1222633"/>
+                  </a:lnTo>
+                  <a:lnTo>
+                    <a:pt x="3660324" y="1218074"/>
+                  </a:lnTo>
+                  <a:lnTo>
+                    <a:pt x="3589979" y="1212913"/>
+                  </a:lnTo>
+                  <a:lnTo>
+                    <a:pt x="3519635" y="1207071"/>
+                  </a:lnTo>
+                  <a:lnTo>
+                    <a:pt x="3449290" y="1200459"/>
+                  </a:lnTo>
+                  <a:lnTo>
+                    <a:pt x="3378946" y="1192975"/>
+                  </a:lnTo>
+                  <a:lnTo>
+                    <a:pt x="3308601" y="1184504"/>
+                  </a:lnTo>
+                  <a:lnTo>
+                    <a:pt x="3238257" y="1174915"/>
+                  </a:lnTo>
+                  <a:lnTo>
+                    <a:pt x="3167912" y="1164062"/>
+                  </a:lnTo>
+                  <a:lnTo>
+                    <a:pt x="3097568" y="1151777"/>
+                  </a:lnTo>
+                  <a:lnTo>
+                    <a:pt x="3027223" y="1137872"/>
+                  </a:lnTo>
+                  <a:lnTo>
+                    <a:pt x="2956879" y="1122133"/>
+                  </a:lnTo>
+                  <a:lnTo>
+                    <a:pt x="2886534" y="1104318"/>
+                  </a:lnTo>
+                  <a:lnTo>
+                    <a:pt x="2816190" y="1084153"/>
+                  </a:lnTo>
+                  <a:lnTo>
+                    <a:pt x="2745845" y="1061329"/>
+                  </a:lnTo>
+                  <a:lnTo>
+                    <a:pt x="2675501" y="1035493"/>
+                  </a:lnTo>
+                  <a:lnTo>
+                    <a:pt x="2605156" y="1006251"/>
+                  </a:lnTo>
+                  <a:lnTo>
+                    <a:pt x="2534812" y="973151"/>
+                  </a:lnTo>
+                  <a:lnTo>
+                    <a:pt x="2464467" y="950826"/>
+                  </a:lnTo>
+                  <a:lnTo>
+                    <a:pt x="2394123" y="938228"/>
+                  </a:lnTo>
+                  <a:lnTo>
+                    <a:pt x="2323778" y="925111"/>
+                  </a:lnTo>
+                  <a:lnTo>
+                    <a:pt x="2253434" y="911456"/>
+                  </a:lnTo>
+                  <a:lnTo>
+                    <a:pt x="2183089" y="897238"/>
+                  </a:lnTo>
+                  <a:lnTo>
+                    <a:pt x="2112745" y="882436"/>
+                  </a:lnTo>
+                  <a:lnTo>
+                    <a:pt x="2042400" y="867026"/>
+                  </a:lnTo>
+                  <a:lnTo>
+                    <a:pt x="1972056" y="850981"/>
+                  </a:lnTo>
+                  <a:lnTo>
+                    <a:pt x="1901711" y="834277"/>
+                  </a:lnTo>
+                  <a:lnTo>
+                    <a:pt x="1831367" y="816886"/>
+                  </a:lnTo>
+                  <a:lnTo>
+                    <a:pt x="1761022" y="798780"/>
+                  </a:lnTo>
+                  <a:lnTo>
+                    <a:pt x="1690678" y="779929"/>
+                  </a:lnTo>
+                  <a:lnTo>
+                    <a:pt x="1620333" y="760303"/>
+                  </a:lnTo>
+                  <a:lnTo>
+                    <a:pt x="1549989" y="739871"/>
+                  </a:lnTo>
+                  <a:lnTo>
+                    <a:pt x="1479644" y="718597"/>
+                  </a:lnTo>
+                  <a:lnTo>
+                    <a:pt x="1409300" y="696450"/>
+                  </a:lnTo>
+                  <a:lnTo>
+                    <a:pt x="1338955" y="673391"/>
+                  </a:lnTo>
+                  <a:lnTo>
+                    <a:pt x="1268611" y="649384"/>
+                  </a:lnTo>
+                  <a:lnTo>
+                    <a:pt x="1198266" y="624390"/>
+                  </a:lnTo>
+                  <a:lnTo>
+                    <a:pt x="1127922" y="598369"/>
+                  </a:lnTo>
+                  <a:lnTo>
+                    <a:pt x="1057577" y="571277"/>
+                  </a:lnTo>
+                  <a:lnTo>
+                    <a:pt x="987233" y="543071"/>
+                  </a:lnTo>
+                  <a:lnTo>
+                    <a:pt x="916888" y="513705"/>
+                  </a:lnTo>
+                  <a:lnTo>
+                    <a:pt x="846544" y="483132"/>
+                  </a:lnTo>
+                  <a:lnTo>
+                    <a:pt x="776199" y="451302"/>
+                  </a:lnTo>
+                  <a:lnTo>
+                    <a:pt x="705855" y="418162"/>
+                  </a:lnTo>
+                  <a:lnTo>
+                    <a:pt x="635510" y="383660"/>
+                  </a:lnTo>
+                  <a:lnTo>
+                    <a:pt x="565166" y="347740"/>
+                  </a:lnTo>
+                  <a:lnTo>
+                    <a:pt x="494821" y="310342"/>
+                  </a:lnTo>
+                  <a:lnTo>
+                    <a:pt x="424477" y="271406"/>
+                  </a:lnTo>
+                  <a:lnTo>
+                    <a:pt x="354132" y="230870"/>
+                  </a:lnTo>
+                  <a:lnTo>
+                    <a:pt x="283788" y="188666"/>
+                  </a:lnTo>
+                  <a:lnTo>
+                    <a:pt x="213443" y="144727"/>
+                  </a:lnTo>
+                  <a:lnTo>
+                    <a:pt x="143099" y="98981"/>
+                  </a:lnTo>
+                  <a:lnTo>
+                    <a:pt x="72754" y="51354"/>
+                  </a:lnTo>
+                  <a:lnTo>
+                    <a:pt x="2410" y="1769"/>
                   </a:lnTo>
                   <a:lnTo>
                     <a:pt x="0" y="0"/>
@@ -3556,225 +3591,225 @@
         </p:sp>
         <p:sp>
           <p:nvSpPr>
-            <p:cNvPr id="23" name="pl23"/>
-            <p:cNvSpPr/>
-            <p:nvPr/>
-          </p:nvSpPr>
-          <p:spPr>
-            <a:xfrm>
-              <a:off x="3463559" y="2073503"/>
-              <a:ext cx="4799119" cy="3394861"/>
+            <p:cNvPr id="24" name="pl24"/>
+            <p:cNvSpPr/>
+            <p:nvPr/>
+          </p:nvSpPr>
+          <p:spPr>
+            <a:xfrm>
+              <a:off x="3485932" y="2143092"/>
+              <a:ext cx="4713484" cy="1225125"/>
             </a:xfrm>
             <a:custGeom>
               <a:avLst/>
               <a:pathLst>
-                <a:path w="4799119" h="3394861">
+                <a:path w="4713484" h="1225125">
                   <a:moveTo>
                     <a:pt x="0" y="0"/>
                   </a:moveTo>
                   <a:lnTo>
-                    <a:pt x="410" y="2632"/>
-                  </a:lnTo>
-                  <a:lnTo>
-                    <a:pt x="72033" y="408276"/>
-                  </a:lnTo>
-                  <a:lnTo>
-                    <a:pt x="143655" y="766652"/>
-                  </a:lnTo>
-                  <a:lnTo>
-                    <a:pt x="215278" y="1083267"/>
-                  </a:lnTo>
-                  <a:lnTo>
-                    <a:pt x="286900" y="1362988"/>
-                  </a:lnTo>
-                  <a:lnTo>
-                    <a:pt x="358523" y="1610114"/>
-                  </a:lnTo>
-                  <a:lnTo>
-                    <a:pt x="430145" y="1828443"/>
-                  </a:lnTo>
-                  <a:lnTo>
-                    <a:pt x="501768" y="2021331"/>
-                  </a:lnTo>
-                  <a:lnTo>
-                    <a:pt x="573390" y="2191742"/>
-                  </a:lnTo>
-                  <a:lnTo>
-                    <a:pt x="645013" y="2342295"/>
-                  </a:lnTo>
-                  <a:lnTo>
-                    <a:pt x="716635" y="2475305"/>
-                  </a:lnTo>
-                  <a:lnTo>
-                    <a:pt x="788258" y="2592816"/>
-                  </a:lnTo>
-                  <a:lnTo>
-                    <a:pt x="859881" y="2668302"/>
-                  </a:lnTo>
-                  <a:lnTo>
-                    <a:pt x="931503" y="2700509"/>
-                  </a:lnTo>
-                  <a:lnTo>
-                    <a:pt x="1003126" y="2731445"/>
-                  </a:lnTo>
-                  <a:lnTo>
-                    <a:pt x="1074748" y="2761158"/>
-                  </a:lnTo>
-                  <a:lnTo>
-                    <a:pt x="1146371" y="2789698"/>
-                  </a:lnTo>
-                  <a:lnTo>
-                    <a:pt x="1217993" y="2817111"/>
-                  </a:lnTo>
-                  <a:lnTo>
-                    <a:pt x="1289616" y="2843441"/>
-                  </a:lnTo>
-                  <a:lnTo>
-                    <a:pt x="1361238" y="2868730"/>
-                  </a:lnTo>
-                  <a:lnTo>
-                    <a:pt x="1432861" y="2893022"/>
-                  </a:lnTo>
-                  <a:lnTo>
-                    <a:pt x="1504483" y="2916353"/>
-                  </a:lnTo>
-                  <a:lnTo>
-                    <a:pt x="1576106" y="2938763"/>
-                  </a:lnTo>
-                  <a:lnTo>
-                    <a:pt x="1647728" y="2960288"/>
-                  </a:lnTo>
-                  <a:lnTo>
-                    <a:pt x="1719351" y="2980963"/>
-                  </a:lnTo>
-                  <a:lnTo>
-                    <a:pt x="1790973" y="3000822"/>
-                  </a:lnTo>
-                  <a:lnTo>
-                    <a:pt x="1862596" y="3019895"/>
-                  </a:lnTo>
-                  <a:lnTo>
-                    <a:pt x="1934218" y="3038216"/>
-                  </a:lnTo>
-                  <a:lnTo>
-                    <a:pt x="2005841" y="3055813"/>
-                  </a:lnTo>
-                  <a:lnTo>
-                    <a:pt x="2077463" y="3072715"/>
-                  </a:lnTo>
-                  <a:lnTo>
-                    <a:pt x="2149086" y="3088949"/>
-                  </a:lnTo>
-                  <a:lnTo>
-                    <a:pt x="2220708" y="3104543"/>
-                  </a:lnTo>
-                  <a:lnTo>
-                    <a:pt x="2292331" y="3119520"/>
-                  </a:lnTo>
-                  <a:lnTo>
-                    <a:pt x="2363954" y="3133906"/>
-                  </a:lnTo>
-                  <a:lnTo>
-                    <a:pt x="2435576" y="3147723"/>
-                  </a:lnTo>
-                  <a:lnTo>
-                    <a:pt x="2507199" y="3160995"/>
-                  </a:lnTo>
-                  <a:lnTo>
-                    <a:pt x="2578821" y="3173743"/>
-                  </a:lnTo>
-                  <a:lnTo>
-                    <a:pt x="2650444" y="3185987"/>
-                  </a:lnTo>
-                  <a:lnTo>
-                    <a:pt x="2722066" y="3197747"/>
-                  </a:lnTo>
-                  <a:lnTo>
-                    <a:pt x="2793689" y="3209043"/>
-                  </a:lnTo>
-                  <a:lnTo>
-                    <a:pt x="2865311" y="3219893"/>
-                  </a:lnTo>
-                  <a:lnTo>
-                    <a:pt x="2936934" y="3230314"/>
-                  </a:lnTo>
-                  <a:lnTo>
-                    <a:pt x="3008556" y="3240324"/>
-                  </a:lnTo>
-                  <a:lnTo>
-                    <a:pt x="3080179" y="3249938"/>
-                  </a:lnTo>
-                  <a:lnTo>
-                    <a:pt x="3151801" y="3259173"/>
-                  </a:lnTo>
-                  <a:lnTo>
-                    <a:pt x="3223424" y="3268043"/>
-                  </a:lnTo>
-                  <a:lnTo>
-                    <a:pt x="3295046" y="3276563"/>
-                  </a:lnTo>
-                  <a:lnTo>
-                    <a:pt x="3366669" y="3284746"/>
-                  </a:lnTo>
-                  <a:lnTo>
-                    <a:pt x="3438291" y="3292606"/>
-                  </a:lnTo>
-                  <a:lnTo>
-                    <a:pt x="3509914" y="3300155"/>
-                  </a:lnTo>
-                  <a:lnTo>
-                    <a:pt x="3581536" y="3307406"/>
-                  </a:lnTo>
-                  <a:lnTo>
-                    <a:pt x="3653159" y="3314371"/>
-                  </a:lnTo>
-                  <a:lnTo>
-                    <a:pt x="3724782" y="3321061"/>
-                  </a:lnTo>
-                  <a:lnTo>
-                    <a:pt x="3796404" y="3327486"/>
-                  </a:lnTo>
-                  <a:lnTo>
-                    <a:pt x="3868027" y="3333658"/>
-                  </a:lnTo>
-                  <a:lnTo>
-                    <a:pt x="3939649" y="3339586"/>
-                  </a:lnTo>
-                  <a:lnTo>
-                    <a:pt x="4011272" y="3345280"/>
-                  </a:lnTo>
-                  <a:lnTo>
-                    <a:pt x="4082894" y="3350749"/>
-                  </a:lnTo>
-                  <a:lnTo>
-                    <a:pt x="4154517" y="3356002"/>
-                  </a:lnTo>
-                  <a:lnTo>
-                    <a:pt x="4226139" y="3361047"/>
-                  </a:lnTo>
-                  <a:lnTo>
-                    <a:pt x="4297762" y="3365894"/>
-                  </a:lnTo>
-                  <a:lnTo>
-                    <a:pt x="4369384" y="3370548"/>
-                  </a:lnTo>
-                  <a:lnTo>
-                    <a:pt x="4441007" y="3375019"/>
-                  </a:lnTo>
-                  <a:lnTo>
-                    <a:pt x="4512629" y="3379314"/>
-                  </a:lnTo>
-                  <a:lnTo>
-                    <a:pt x="4584252" y="3383438"/>
-                  </a:lnTo>
-                  <a:lnTo>
-                    <a:pt x="4655874" y="3387400"/>
-                  </a:lnTo>
-                  <a:lnTo>
-                    <a:pt x="4727497" y="3391206"/>
-                  </a:lnTo>
-                  <a:lnTo>
-                    <a:pt x="4799119" y="3394861"/>
+                    <a:pt x="403" y="950"/>
+                  </a:lnTo>
+                  <a:lnTo>
+                    <a:pt x="70747" y="147337"/>
+                  </a:lnTo>
+                  <a:lnTo>
+                    <a:pt x="141092" y="276666"/>
+                  </a:lnTo>
+                  <a:lnTo>
+                    <a:pt x="211436" y="390925"/>
+                  </a:lnTo>
+                  <a:lnTo>
+                    <a:pt x="281781" y="491870"/>
+                  </a:lnTo>
+                  <a:lnTo>
+                    <a:pt x="352125" y="581052"/>
+                  </a:lnTo>
+                  <a:lnTo>
+                    <a:pt x="422470" y="659842"/>
+                  </a:lnTo>
+                  <a:lnTo>
+                    <a:pt x="492814" y="729450"/>
+                  </a:lnTo>
+                  <a:lnTo>
+                    <a:pt x="563159" y="790948"/>
+                  </a:lnTo>
+                  <a:lnTo>
+                    <a:pt x="633503" y="845279"/>
+                  </a:lnTo>
+                  <a:lnTo>
+                    <a:pt x="703848" y="893279"/>
+                  </a:lnTo>
+                  <a:lnTo>
+                    <a:pt x="774192" y="935686"/>
+                  </a:lnTo>
+                  <a:lnTo>
+                    <a:pt x="844537" y="962927"/>
+                  </a:lnTo>
+                  <a:lnTo>
+                    <a:pt x="914881" y="974550"/>
+                  </a:lnTo>
+                  <a:lnTo>
+                    <a:pt x="985226" y="985714"/>
+                  </a:lnTo>
+                  <a:lnTo>
+                    <a:pt x="1055570" y="996437"/>
+                  </a:lnTo>
+                  <a:lnTo>
+                    <a:pt x="1125915" y="1006736"/>
+                  </a:lnTo>
+                  <a:lnTo>
+                    <a:pt x="1196259" y="1016629"/>
+                  </a:lnTo>
+                  <a:lnTo>
+                    <a:pt x="1266604" y="1026130"/>
+                  </a:lnTo>
+                  <a:lnTo>
+                    <a:pt x="1336948" y="1035257"/>
+                  </a:lnTo>
+                  <a:lnTo>
+                    <a:pt x="1407293" y="1044023"/>
+                  </a:lnTo>
+                  <a:lnTo>
+                    <a:pt x="1477637" y="1052443"/>
+                  </a:lnTo>
+                  <a:lnTo>
+                    <a:pt x="1547982" y="1060530"/>
+                  </a:lnTo>
+                  <a:lnTo>
+                    <a:pt x="1618326" y="1068298"/>
+                  </a:lnTo>
+                  <a:lnTo>
+                    <a:pt x="1688671" y="1075759"/>
+                  </a:lnTo>
+                  <a:lnTo>
+                    <a:pt x="1759015" y="1082926"/>
+                  </a:lnTo>
+                  <a:lnTo>
+                    <a:pt x="1829360" y="1089809"/>
+                  </a:lnTo>
+                  <a:lnTo>
+                    <a:pt x="1899704" y="1096420"/>
+                  </a:lnTo>
+                  <a:lnTo>
+                    <a:pt x="1970049" y="1102771"/>
+                  </a:lnTo>
+                  <a:lnTo>
+                    <a:pt x="2040393" y="1108870"/>
+                  </a:lnTo>
+                  <a:lnTo>
+                    <a:pt x="2110738" y="1114729"/>
+                  </a:lnTo>
+                  <a:lnTo>
+                    <a:pt x="2181082" y="1120356"/>
+                  </a:lnTo>
+                  <a:lnTo>
+                    <a:pt x="2251427" y="1125761"/>
+                  </a:lnTo>
+                  <a:lnTo>
+                    <a:pt x="2321771" y="1130952"/>
+                  </a:lnTo>
+                  <a:lnTo>
+                    <a:pt x="2392116" y="1135939"/>
+                  </a:lnTo>
+                  <a:lnTo>
+                    <a:pt x="2462460" y="1140728"/>
+                  </a:lnTo>
+                  <a:lnTo>
+                    <a:pt x="2532805" y="1145329"/>
+                  </a:lnTo>
+                  <a:lnTo>
+                    <a:pt x="2603149" y="1149747"/>
+                  </a:lnTo>
+                  <a:lnTo>
+                    <a:pt x="2673493" y="1153991"/>
+                  </a:lnTo>
+                  <a:lnTo>
+                    <a:pt x="2743838" y="1158068"/>
+                  </a:lnTo>
+                  <a:lnTo>
+                    <a:pt x="2814182" y="1161983"/>
+                  </a:lnTo>
+                  <a:lnTo>
+                    <a:pt x="2884527" y="1165744"/>
+                  </a:lnTo>
+                  <a:lnTo>
+                    <a:pt x="2954871" y="1169356"/>
+                  </a:lnTo>
+                  <a:lnTo>
+                    <a:pt x="3025216" y="1172826"/>
+                  </a:lnTo>
+                  <a:lnTo>
+                    <a:pt x="3095560" y="1176159"/>
+                  </a:lnTo>
+                  <a:lnTo>
+                    <a:pt x="3165905" y="1179360"/>
+                  </a:lnTo>
+                  <a:lnTo>
+                    <a:pt x="3236249" y="1182434"/>
+                  </a:lnTo>
+                  <a:lnTo>
+                    <a:pt x="3306594" y="1185387"/>
+                  </a:lnTo>
+                  <a:lnTo>
+                    <a:pt x="3376938" y="1188224"/>
+                  </a:lnTo>
+                  <a:lnTo>
+                    <a:pt x="3447283" y="1190948"/>
+                  </a:lnTo>
+                  <a:lnTo>
+                    <a:pt x="3517627" y="1193565"/>
+                  </a:lnTo>
+                  <a:lnTo>
+                    <a:pt x="3587972" y="1196078"/>
+                  </a:lnTo>
+                  <a:lnTo>
+                    <a:pt x="3658316" y="1198492"/>
+                  </a:lnTo>
+                  <a:lnTo>
+                    <a:pt x="3728661" y="1200811"/>
+                  </a:lnTo>
+                  <a:lnTo>
+                    <a:pt x="3799005" y="1203038"/>
+                  </a:lnTo>
+                  <a:lnTo>
+                    <a:pt x="3869350" y="1205178"/>
+                  </a:lnTo>
+                  <a:lnTo>
+                    <a:pt x="3939694" y="1207233"/>
+                  </a:lnTo>
+                  <a:lnTo>
+                    <a:pt x="4010039" y="1209206"/>
+                  </a:lnTo>
+                  <a:lnTo>
+                    <a:pt x="4080383" y="1211102"/>
+                  </a:lnTo>
+                  <a:lnTo>
+                    <a:pt x="4150728" y="1212923"/>
+                  </a:lnTo>
+                  <a:lnTo>
+                    <a:pt x="4221072" y="1214671"/>
+                  </a:lnTo>
+                  <a:lnTo>
+                    <a:pt x="4291417" y="1216351"/>
+                  </a:lnTo>
+                  <a:lnTo>
+                    <a:pt x="4361761" y="1217965"/>
+                  </a:lnTo>
+                  <a:lnTo>
+                    <a:pt x="4432106" y="1219514"/>
+                  </a:lnTo>
+                  <a:lnTo>
+                    <a:pt x="4502450" y="1221003"/>
+                  </a:lnTo>
+                  <a:lnTo>
+                    <a:pt x="4572795" y="1222433"/>
+                  </a:lnTo>
+                  <a:lnTo>
+                    <a:pt x="4643139" y="1223806"/>
+                  </a:lnTo>
+                  <a:lnTo>
+                    <a:pt x="4713484" y="1225125"/>
                   </a:lnTo>
                 </a:path>
               </a:pathLst>
@@ -3788,294 +3823,294 @@
         </p:sp>
         <p:sp>
           <p:nvSpPr>
-            <p:cNvPr id="24" name="pl24"/>
-            <p:cNvSpPr/>
-            <p:nvPr/>
-          </p:nvSpPr>
-          <p:spPr>
-            <a:xfrm>
-              <a:off x="1742575" y="2073503"/>
-              <a:ext cx="6520104" cy="3482882"/>
+            <p:cNvPr id="25" name="pl25"/>
+            <p:cNvSpPr/>
+            <p:nvPr/>
+          </p:nvSpPr>
+          <p:spPr>
+            <a:xfrm>
+              <a:off x="1795657" y="2143092"/>
+              <a:ext cx="6403759" cy="1256890"/>
             </a:xfrm>
             <a:custGeom>
               <a:avLst/>
               <a:pathLst>
-                <a:path w="6520104" h="3482882">
+                <a:path w="6403759" h="1256890">
                   <a:moveTo>
-                    <a:pt x="6520104" y="3482882"/>
+                    <a:pt x="6403759" y="1256890"/>
                   </a:moveTo>
                   <a:lnTo>
-                    <a:pt x="6448481" y="3482768"/>
-                  </a:lnTo>
-                  <a:lnTo>
-                    <a:pt x="6376859" y="3482639"/>
-                  </a:lnTo>
-                  <a:lnTo>
-                    <a:pt x="6305236" y="3482493"/>
-                  </a:lnTo>
-                  <a:lnTo>
-                    <a:pt x="6233614" y="3482328"/>
-                  </a:lnTo>
-                  <a:lnTo>
-                    <a:pt x="6161991" y="3482141"/>
-                  </a:lnTo>
-                  <a:lnTo>
-                    <a:pt x="6090369" y="3481929"/>
-                  </a:lnTo>
-                  <a:lnTo>
-                    <a:pt x="6018746" y="3481689"/>
-                  </a:lnTo>
-                  <a:lnTo>
-                    <a:pt x="5947123" y="3481418"/>
-                  </a:lnTo>
-                  <a:lnTo>
-                    <a:pt x="5875501" y="3481111"/>
-                  </a:lnTo>
-                  <a:lnTo>
-                    <a:pt x="5803878" y="3480763"/>
-                  </a:lnTo>
-                  <a:lnTo>
-                    <a:pt x="5732256" y="3480369"/>
-                  </a:lnTo>
-                  <a:lnTo>
-                    <a:pt x="5660633" y="3479924"/>
-                  </a:lnTo>
-                  <a:lnTo>
-                    <a:pt x="5589011" y="3479420"/>
-                  </a:lnTo>
-                  <a:lnTo>
-                    <a:pt x="5517388" y="3478849"/>
-                  </a:lnTo>
-                  <a:lnTo>
-                    <a:pt x="5445766" y="3478203"/>
-                  </a:lnTo>
-                  <a:lnTo>
-                    <a:pt x="5374143" y="3477472"/>
-                  </a:lnTo>
-                  <a:lnTo>
-                    <a:pt x="5302521" y="3476644"/>
-                  </a:lnTo>
-                  <a:lnTo>
-                    <a:pt x="5230898" y="3475708"/>
-                  </a:lnTo>
-                  <a:lnTo>
-                    <a:pt x="5159276" y="3474647"/>
-                  </a:lnTo>
-                  <a:lnTo>
-                    <a:pt x="5087653" y="3473447"/>
-                  </a:lnTo>
-                  <a:lnTo>
-                    <a:pt x="5016031" y="3472089"/>
-                  </a:lnTo>
-                  <a:lnTo>
-                    <a:pt x="4944408" y="3470551"/>
-                  </a:lnTo>
-                  <a:lnTo>
-                    <a:pt x="4872786" y="3468811"/>
-                  </a:lnTo>
-                  <a:lnTo>
-                    <a:pt x="4801163" y="3466841"/>
-                  </a:lnTo>
-                  <a:lnTo>
-                    <a:pt x="4729541" y="3464611"/>
-                  </a:lnTo>
-                  <a:lnTo>
-                    <a:pt x="4657918" y="3462087"/>
-                  </a:lnTo>
-                  <a:lnTo>
-                    <a:pt x="4586295" y="3459231"/>
-                  </a:lnTo>
-                  <a:lnTo>
-                    <a:pt x="4514673" y="3455997"/>
-                  </a:lnTo>
-                  <a:lnTo>
-                    <a:pt x="4443050" y="3452337"/>
-                  </a:lnTo>
-                  <a:lnTo>
-                    <a:pt x="4371428" y="3448194"/>
-                  </a:lnTo>
-                  <a:lnTo>
-                    <a:pt x="4299805" y="3443505"/>
-                  </a:lnTo>
-                  <a:lnTo>
-                    <a:pt x="4228183" y="3438197"/>
-                  </a:lnTo>
-                  <a:lnTo>
-                    <a:pt x="4156560" y="3432189"/>
-                  </a:lnTo>
-                  <a:lnTo>
-                    <a:pt x="4084938" y="3425389"/>
-                  </a:lnTo>
-                  <a:lnTo>
-                    <a:pt x="4013315" y="3417692"/>
-                  </a:lnTo>
-                  <a:lnTo>
-                    <a:pt x="3941693" y="3408980"/>
-                  </a:lnTo>
-                  <a:lnTo>
-                    <a:pt x="3870070" y="3399118"/>
-                  </a:lnTo>
-                  <a:lnTo>
-                    <a:pt x="3798448" y="3387956"/>
-                  </a:lnTo>
-                  <a:lnTo>
-                    <a:pt x="3726825" y="3375322"/>
-                  </a:lnTo>
-                  <a:lnTo>
-                    <a:pt x="3655203" y="3361021"/>
-                  </a:lnTo>
-                  <a:lnTo>
-                    <a:pt x="3583580" y="3344834"/>
-                  </a:lnTo>
-                  <a:lnTo>
-                    <a:pt x="3511958" y="3326512"/>
-                  </a:lnTo>
-                  <a:lnTo>
-                    <a:pt x="3440335" y="3305773"/>
-                  </a:lnTo>
-                  <a:lnTo>
-                    <a:pt x="3368713" y="3282299"/>
-                  </a:lnTo>
-                  <a:lnTo>
-                    <a:pt x="3297090" y="3255728"/>
-                  </a:lnTo>
-                  <a:lnTo>
-                    <a:pt x="3225467" y="3225654"/>
-                  </a:lnTo>
-                  <a:lnTo>
-                    <a:pt x="3153845" y="3191612"/>
-                  </a:lnTo>
-                  <a:lnTo>
-                    <a:pt x="3082222" y="3153080"/>
-                  </a:lnTo>
-                  <a:lnTo>
-                    <a:pt x="3010600" y="3109467"/>
-                  </a:lnTo>
-                  <a:lnTo>
-                    <a:pt x="2938977" y="3060100"/>
-                  </a:lnTo>
-                  <a:lnTo>
-                    <a:pt x="2867355" y="3004223"/>
-                  </a:lnTo>
-                  <a:lnTo>
-                    <a:pt x="2795732" y="2940975"/>
-                  </a:lnTo>
-                  <a:lnTo>
-                    <a:pt x="2724110" y="2869386"/>
-                  </a:lnTo>
-                  <a:lnTo>
-                    <a:pt x="2652487" y="2788354"/>
-                  </a:lnTo>
-                  <a:lnTo>
-                    <a:pt x="2580865" y="2696634"/>
-                  </a:lnTo>
-                  <a:lnTo>
-                    <a:pt x="2509242" y="2634770"/>
-                  </a:lnTo>
-                  <a:lnTo>
-                    <a:pt x="2437620" y="2599860"/>
-                  </a:lnTo>
-                  <a:lnTo>
-                    <a:pt x="2365997" y="2563514"/>
-                  </a:lnTo>
-                  <a:lnTo>
-                    <a:pt x="2294375" y="2525673"/>
-                  </a:lnTo>
-                  <a:lnTo>
-                    <a:pt x="2222752" y="2486276"/>
-                  </a:lnTo>
-                  <a:lnTo>
-                    <a:pt x="2151130" y="2445259"/>
-                  </a:lnTo>
-                  <a:lnTo>
-                    <a:pt x="2079507" y="2402556"/>
-                  </a:lnTo>
-                  <a:lnTo>
-                    <a:pt x="2007885" y="2358096"/>
-                  </a:lnTo>
-                  <a:lnTo>
-                    <a:pt x="1936262" y="2311809"/>
-                  </a:lnTo>
-                  <a:lnTo>
-                    <a:pt x="1864639" y="2263618"/>
-                  </a:lnTo>
-                  <a:lnTo>
-                    <a:pt x="1793017" y="2213445"/>
-                  </a:lnTo>
-                  <a:lnTo>
-                    <a:pt x="1721394" y="2161209"/>
-                  </a:lnTo>
-                  <a:lnTo>
-                    <a:pt x="1649772" y="2106825"/>
-                  </a:lnTo>
-                  <a:lnTo>
-                    <a:pt x="1578149" y="2050205"/>
-                  </a:lnTo>
-                  <a:lnTo>
-                    <a:pt x="1506527" y="1991257"/>
-                  </a:lnTo>
-                  <a:lnTo>
-                    <a:pt x="1434904" y="1929885"/>
-                  </a:lnTo>
-                  <a:lnTo>
-                    <a:pt x="1363282" y="1865988"/>
-                  </a:lnTo>
-                  <a:lnTo>
-                    <a:pt x="1291659" y="1799465"/>
-                  </a:lnTo>
-                  <a:lnTo>
-                    <a:pt x="1220037" y="1730206"/>
-                  </a:lnTo>
-                  <a:lnTo>
-                    <a:pt x="1148414" y="1658099"/>
-                  </a:lnTo>
-                  <a:lnTo>
-                    <a:pt x="1076792" y="1583027"/>
-                  </a:lnTo>
-                  <a:lnTo>
-                    <a:pt x="1005169" y="1504868"/>
-                  </a:lnTo>
-                  <a:lnTo>
-                    <a:pt x="933547" y="1423494"/>
-                  </a:lnTo>
-                  <a:lnTo>
-                    <a:pt x="861924" y="1338775"/>
-                  </a:lnTo>
-                  <a:lnTo>
-                    <a:pt x="790302" y="1250572"/>
-                  </a:lnTo>
-                  <a:lnTo>
-                    <a:pt x="718679" y="1158742"/>
-                  </a:lnTo>
-                  <a:lnTo>
-                    <a:pt x="647057" y="1063136"/>
-                  </a:lnTo>
-                  <a:lnTo>
-                    <a:pt x="575434" y="963599"/>
-                  </a:lnTo>
-                  <a:lnTo>
-                    <a:pt x="503811" y="859968"/>
-                  </a:lnTo>
-                  <a:lnTo>
-                    <a:pt x="432189" y="752076"/>
-                  </a:lnTo>
-                  <a:lnTo>
-                    <a:pt x="360566" y="639748"/>
-                  </a:lnTo>
-                  <a:lnTo>
-                    <a:pt x="288944" y="522800"/>
-                  </a:lnTo>
-                  <a:lnTo>
-                    <a:pt x="217321" y="401044"/>
-                  </a:lnTo>
-                  <a:lnTo>
-                    <a:pt x="145699" y="274280"/>
-                  </a:lnTo>
-                  <a:lnTo>
-                    <a:pt x="74076" y="142304"/>
-                  </a:lnTo>
-                  <a:lnTo>
-                    <a:pt x="2454" y="4902"/>
+                    <a:pt x="6333414" y="1256849"/>
+                  </a:lnTo>
+                  <a:lnTo>
+                    <a:pt x="6263070" y="1256802"/>
+                  </a:lnTo>
+                  <a:lnTo>
+                    <a:pt x="6192725" y="1256749"/>
+                  </a:lnTo>
+                  <a:lnTo>
+                    <a:pt x="6122381" y="1256690"/>
+                  </a:lnTo>
+                  <a:lnTo>
+                    <a:pt x="6052036" y="1256622"/>
+                  </a:lnTo>
+                  <a:lnTo>
+                    <a:pt x="5981692" y="1256546"/>
+                  </a:lnTo>
+                  <a:lnTo>
+                    <a:pt x="5911347" y="1256459"/>
+                  </a:lnTo>
+                  <a:lnTo>
+                    <a:pt x="5841003" y="1256361"/>
+                  </a:lnTo>
+                  <a:lnTo>
+                    <a:pt x="5770658" y="1256251"/>
+                  </a:lnTo>
+                  <a:lnTo>
+                    <a:pt x="5700314" y="1256125"/>
+                  </a:lnTo>
+                  <a:lnTo>
+                    <a:pt x="5629969" y="1255983"/>
+                  </a:lnTo>
+                  <a:lnTo>
+                    <a:pt x="5559625" y="1255822"/>
+                  </a:lnTo>
+                  <a:lnTo>
+                    <a:pt x="5489280" y="1255640"/>
+                  </a:lnTo>
+                  <a:lnTo>
+                    <a:pt x="5418936" y="1255434"/>
+                  </a:lnTo>
+                  <a:lnTo>
+                    <a:pt x="5348591" y="1255201"/>
+                  </a:lnTo>
+                  <a:lnTo>
+                    <a:pt x="5278247" y="1254938"/>
+                  </a:lnTo>
+                  <a:lnTo>
+                    <a:pt x="5207902" y="1254639"/>
+                  </a:lnTo>
+                  <a:lnTo>
+                    <a:pt x="5137558" y="1254301"/>
+                  </a:lnTo>
+                  <a:lnTo>
+                    <a:pt x="5067213" y="1253918"/>
+                  </a:lnTo>
+                  <a:lnTo>
+                    <a:pt x="4996869" y="1253485"/>
+                  </a:lnTo>
+                  <a:lnTo>
+                    <a:pt x="4926524" y="1252995"/>
+                  </a:lnTo>
+                  <a:lnTo>
+                    <a:pt x="4856180" y="1252440"/>
+                  </a:lnTo>
+                  <a:lnTo>
+                    <a:pt x="4785835" y="1251812"/>
+                  </a:lnTo>
+                  <a:lnTo>
+                    <a:pt x="4715491" y="1251101"/>
+                  </a:lnTo>
+                  <a:lnTo>
+                    <a:pt x="4645146" y="1250296"/>
+                  </a:lnTo>
+                  <a:lnTo>
+                    <a:pt x="4574802" y="1249386"/>
+                  </a:lnTo>
+                  <a:lnTo>
+                    <a:pt x="4504457" y="1248355"/>
+                  </a:lnTo>
+                  <a:lnTo>
+                    <a:pt x="4434113" y="1247188"/>
+                  </a:lnTo>
+                  <a:lnTo>
+                    <a:pt x="4363768" y="1245867"/>
+                  </a:lnTo>
+                  <a:lnTo>
+                    <a:pt x="4293424" y="1244372"/>
+                  </a:lnTo>
+                  <a:lnTo>
+                    <a:pt x="4223079" y="1242680"/>
+                  </a:lnTo>
+                  <a:lnTo>
+                    <a:pt x="4152735" y="1240764"/>
+                  </a:lnTo>
+                  <a:lnTo>
+                    <a:pt x="4082390" y="1238596"/>
+                  </a:lnTo>
+                  <a:lnTo>
+                    <a:pt x="4012046" y="1236142"/>
+                  </a:lnTo>
+                  <a:lnTo>
+                    <a:pt x="3941701" y="1233364"/>
+                  </a:lnTo>
+                  <a:lnTo>
+                    <a:pt x="3871357" y="1230220"/>
+                  </a:lnTo>
+                  <a:lnTo>
+                    <a:pt x="3801012" y="1226661"/>
+                  </a:lnTo>
+                  <a:lnTo>
+                    <a:pt x="3730668" y="1222633"/>
+                  </a:lnTo>
+                  <a:lnTo>
+                    <a:pt x="3660324" y="1218074"/>
+                  </a:lnTo>
+                  <a:lnTo>
+                    <a:pt x="3589979" y="1212913"/>
+                  </a:lnTo>
+                  <a:lnTo>
+                    <a:pt x="3519635" y="1207071"/>
+                  </a:lnTo>
+                  <a:lnTo>
+                    <a:pt x="3449290" y="1200459"/>
+                  </a:lnTo>
+                  <a:lnTo>
+                    <a:pt x="3378946" y="1192975"/>
+                  </a:lnTo>
+                  <a:lnTo>
+                    <a:pt x="3308601" y="1184504"/>
+                  </a:lnTo>
+                  <a:lnTo>
+                    <a:pt x="3238257" y="1174915"/>
+                  </a:lnTo>
+                  <a:lnTo>
+                    <a:pt x="3167912" y="1164062"/>
+                  </a:lnTo>
+                  <a:lnTo>
+                    <a:pt x="3097568" y="1151777"/>
+                  </a:lnTo>
+                  <a:lnTo>
+                    <a:pt x="3027223" y="1137872"/>
+                  </a:lnTo>
+                  <a:lnTo>
+                    <a:pt x="2956879" y="1122133"/>
+                  </a:lnTo>
+                  <a:lnTo>
+                    <a:pt x="2886534" y="1104318"/>
+                  </a:lnTo>
+                  <a:lnTo>
+                    <a:pt x="2816190" y="1084153"/>
+                  </a:lnTo>
+                  <a:lnTo>
+                    <a:pt x="2745845" y="1061329"/>
+                  </a:lnTo>
+                  <a:lnTo>
+                    <a:pt x="2675501" y="1035493"/>
+                  </a:lnTo>
+                  <a:lnTo>
+                    <a:pt x="2605156" y="1006251"/>
+                  </a:lnTo>
+                  <a:lnTo>
+                    <a:pt x="2534812" y="973151"/>
+                  </a:lnTo>
+                  <a:lnTo>
+                    <a:pt x="2464467" y="950826"/>
+                  </a:lnTo>
+                  <a:lnTo>
+                    <a:pt x="2394123" y="938228"/>
+                  </a:lnTo>
+                  <a:lnTo>
+                    <a:pt x="2323778" y="925111"/>
+                  </a:lnTo>
+                  <a:lnTo>
+                    <a:pt x="2253434" y="911456"/>
+                  </a:lnTo>
+                  <a:lnTo>
+                    <a:pt x="2183089" y="897238"/>
+                  </a:lnTo>
+                  <a:lnTo>
+                    <a:pt x="2112745" y="882436"/>
+                  </a:lnTo>
+                  <a:lnTo>
+                    <a:pt x="2042400" y="867026"/>
+                  </a:lnTo>
+                  <a:lnTo>
+                    <a:pt x="1972056" y="850981"/>
+                  </a:lnTo>
+                  <a:lnTo>
+                    <a:pt x="1901711" y="834277"/>
+                  </a:lnTo>
+                  <a:lnTo>
+                    <a:pt x="1831367" y="816886"/>
+                  </a:lnTo>
+                  <a:lnTo>
+                    <a:pt x="1761022" y="798780"/>
+                  </a:lnTo>
+                  <a:lnTo>
+                    <a:pt x="1690678" y="779929"/>
+                  </a:lnTo>
+                  <a:lnTo>
+                    <a:pt x="1620333" y="760303"/>
+                  </a:lnTo>
+                  <a:lnTo>
+                    <a:pt x="1549989" y="739871"/>
+                  </a:lnTo>
+                  <a:lnTo>
+                    <a:pt x="1479644" y="718597"/>
+                  </a:lnTo>
+                  <a:lnTo>
+                    <a:pt x="1409300" y="696450"/>
+                  </a:lnTo>
+                  <a:lnTo>
+                    <a:pt x="1338955" y="673391"/>
+                  </a:lnTo>
+                  <a:lnTo>
+                    <a:pt x="1268611" y="649384"/>
+                  </a:lnTo>
+                  <a:lnTo>
+                    <a:pt x="1198266" y="624390"/>
+                  </a:lnTo>
+                  <a:lnTo>
+                    <a:pt x="1127922" y="598369"/>
+                  </a:lnTo>
+                  <a:lnTo>
+                    <a:pt x="1057577" y="571277"/>
+                  </a:lnTo>
+                  <a:lnTo>
+                    <a:pt x="987233" y="543071"/>
+                  </a:lnTo>
+                  <a:lnTo>
+                    <a:pt x="916888" y="513705"/>
+                  </a:lnTo>
+                  <a:lnTo>
+                    <a:pt x="846544" y="483132"/>
+                  </a:lnTo>
+                  <a:lnTo>
+                    <a:pt x="776199" y="451302"/>
+                  </a:lnTo>
+                  <a:lnTo>
+                    <a:pt x="705855" y="418162"/>
+                  </a:lnTo>
+                  <a:lnTo>
+                    <a:pt x="635510" y="383660"/>
+                  </a:lnTo>
+                  <a:lnTo>
+                    <a:pt x="565166" y="347740"/>
+                  </a:lnTo>
+                  <a:lnTo>
+                    <a:pt x="494821" y="310342"/>
+                  </a:lnTo>
+                  <a:lnTo>
+                    <a:pt x="424477" y="271406"/>
+                  </a:lnTo>
+                  <a:lnTo>
+                    <a:pt x="354132" y="230870"/>
+                  </a:lnTo>
+                  <a:lnTo>
+                    <a:pt x="283788" y="188666"/>
+                  </a:lnTo>
+                  <a:lnTo>
+                    <a:pt x="213443" y="144727"/>
+                  </a:lnTo>
+                  <a:lnTo>
+                    <a:pt x="143099" y="98981"/>
+                  </a:lnTo>
+                  <a:lnTo>
+                    <a:pt x="72754" y="51354"/>
+                  </a:lnTo>
+                  <a:lnTo>
+                    <a:pt x="2410" y="1769"/>
                   </a:lnTo>
                   <a:lnTo>
                     <a:pt x="0" y="0"/>
@@ -4092,240 +4127,240 @@
         </p:sp>
         <p:sp>
           <p:nvSpPr>
-            <p:cNvPr id="25" name="pl25"/>
-            <p:cNvSpPr/>
-            <p:nvPr/>
-          </p:nvSpPr>
-          <p:spPr>
-            <a:xfrm>
-              <a:off x="3041404" y="2073503"/>
-              <a:ext cx="5221274" cy="3474981"/>
+            <p:cNvPr id="26" name="pl26"/>
+            <p:cNvSpPr/>
+            <p:nvPr/>
+          </p:nvSpPr>
+          <p:spPr>
+            <a:xfrm>
+              <a:off x="3071310" y="2143092"/>
+              <a:ext cx="5128105" cy="1254039"/>
             </a:xfrm>
             <a:custGeom>
               <a:avLst/>
               <a:pathLst>
-                <a:path w="5221274" h="3474981">
+                <a:path w="5128105" h="1254039">
                   <a:moveTo>
                     <a:pt x="0" y="0"/>
                   </a:moveTo>
                   <a:lnTo>
-                    <a:pt x="64452" y="249055"/>
-                  </a:lnTo>
-                  <a:lnTo>
-                    <a:pt x="136075" y="504003"/>
-                  </a:lnTo>
-                  <a:lnTo>
-                    <a:pt x="207697" y="738856"/>
-                  </a:lnTo>
-                  <a:lnTo>
-                    <a:pt x="279320" y="955200"/>
-                  </a:lnTo>
-                  <a:lnTo>
-                    <a:pt x="350942" y="1154491"/>
-                  </a:lnTo>
-                  <a:lnTo>
-                    <a:pt x="422565" y="1338076"/>
-                  </a:lnTo>
-                  <a:lnTo>
-                    <a:pt x="494187" y="1507190"/>
-                  </a:lnTo>
-                  <a:lnTo>
-                    <a:pt x="565810" y="1662976"/>
-                  </a:lnTo>
-                  <a:lnTo>
-                    <a:pt x="637432" y="1806483"/>
-                  </a:lnTo>
-                  <a:lnTo>
-                    <a:pt x="709055" y="1938680"/>
-                  </a:lnTo>
-                  <a:lnTo>
-                    <a:pt x="780677" y="2060457"/>
-                  </a:lnTo>
-                  <a:lnTo>
-                    <a:pt x="852300" y="2172636"/>
-                  </a:lnTo>
-                  <a:lnTo>
-                    <a:pt x="923922" y="2275973"/>
-                  </a:lnTo>
-                  <a:lnTo>
-                    <a:pt x="995545" y="2371166"/>
-                  </a:lnTo>
-                  <a:lnTo>
-                    <a:pt x="1067168" y="2458856"/>
-                  </a:lnTo>
-                  <a:lnTo>
-                    <a:pt x="1138790" y="2539634"/>
-                  </a:lnTo>
-                  <a:lnTo>
-                    <a:pt x="1210413" y="2614046"/>
-                  </a:lnTo>
-                  <a:lnTo>
-                    <a:pt x="1282035" y="2682593"/>
-                  </a:lnTo>
-                  <a:lnTo>
-                    <a:pt x="1353658" y="2745737"/>
-                  </a:lnTo>
-                  <a:lnTo>
-                    <a:pt x="1425280" y="2803905"/>
-                  </a:lnTo>
-                  <a:lnTo>
-                    <a:pt x="1496903" y="2857488"/>
-                  </a:lnTo>
-                  <a:lnTo>
-                    <a:pt x="1568525" y="2906847"/>
-                  </a:lnTo>
-                  <a:lnTo>
-                    <a:pt x="1640148" y="2952317"/>
-                  </a:lnTo>
-                  <a:lnTo>
-                    <a:pt x="1711770" y="2994202"/>
-                  </a:lnTo>
-                  <a:lnTo>
-                    <a:pt x="1783393" y="3032786"/>
-                  </a:lnTo>
-                  <a:lnTo>
-                    <a:pt x="1855015" y="3068330"/>
-                  </a:lnTo>
-                  <a:lnTo>
-                    <a:pt x="1926638" y="3101071"/>
-                  </a:lnTo>
-                  <a:lnTo>
-                    <a:pt x="1998260" y="3131233"/>
-                  </a:lnTo>
-                  <a:lnTo>
-                    <a:pt x="2069883" y="3159017"/>
-                  </a:lnTo>
-                  <a:lnTo>
-                    <a:pt x="2141505" y="3184611"/>
-                  </a:lnTo>
-                  <a:lnTo>
-                    <a:pt x="2213128" y="3208188"/>
-                  </a:lnTo>
-                  <a:lnTo>
-                    <a:pt x="2284750" y="3229906"/>
-                  </a:lnTo>
-                  <a:lnTo>
-                    <a:pt x="2356373" y="3249913"/>
-                  </a:lnTo>
-                  <a:lnTo>
-                    <a:pt x="2427996" y="3268343"/>
-                  </a:lnTo>
-                  <a:lnTo>
-                    <a:pt x="2499618" y="3285320"/>
-                  </a:lnTo>
-                  <a:lnTo>
-                    <a:pt x="2571241" y="3300960"/>
-                  </a:lnTo>
-                  <a:lnTo>
-                    <a:pt x="2642863" y="3315366"/>
-                  </a:lnTo>
-                  <a:lnTo>
-                    <a:pt x="2714486" y="3328638"/>
-                  </a:lnTo>
-                  <a:lnTo>
-                    <a:pt x="2786108" y="3340863"/>
-                  </a:lnTo>
-                  <a:lnTo>
-                    <a:pt x="2857731" y="3352124"/>
-                  </a:lnTo>
-                  <a:lnTo>
-                    <a:pt x="2929353" y="3362498"/>
-                  </a:lnTo>
-                  <a:lnTo>
-                    <a:pt x="3000976" y="3372055"/>
-                  </a:lnTo>
-                  <a:lnTo>
-                    <a:pt x="3072598" y="3380858"/>
-                  </a:lnTo>
-                  <a:lnTo>
-                    <a:pt x="3144221" y="3388967"/>
-                  </a:lnTo>
-                  <a:lnTo>
-                    <a:pt x="3215843" y="3396437"/>
-                  </a:lnTo>
-                  <a:lnTo>
-                    <a:pt x="3287466" y="3403319"/>
-                  </a:lnTo>
-                  <a:lnTo>
-                    <a:pt x="3359088" y="3409658"/>
-                  </a:lnTo>
-                  <a:lnTo>
-                    <a:pt x="3430711" y="3415497"/>
-                  </a:lnTo>
-                  <a:lnTo>
-                    <a:pt x="3502333" y="3420876"/>
-                  </a:lnTo>
-                  <a:lnTo>
-                    <a:pt x="3573956" y="3425832"/>
-                  </a:lnTo>
-                  <a:lnTo>
-                    <a:pt x="3645578" y="3430396"/>
-                  </a:lnTo>
-                  <a:lnTo>
-                    <a:pt x="3717201" y="3434601"/>
-                  </a:lnTo>
-                  <a:lnTo>
-                    <a:pt x="3788824" y="3438475"/>
-                  </a:lnTo>
-                  <a:lnTo>
-                    <a:pt x="3860446" y="3442043"/>
-                  </a:lnTo>
-                  <a:lnTo>
-                    <a:pt x="3932069" y="3445330"/>
-                  </a:lnTo>
-                  <a:lnTo>
-                    <a:pt x="4003691" y="3448358"/>
-                  </a:lnTo>
-                  <a:lnTo>
-                    <a:pt x="4075314" y="3451147"/>
-                  </a:lnTo>
-                  <a:lnTo>
-                    <a:pt x="4146936" y="3453716"/>
-                  </a:lnTo>
-                  <a:lnTo>
-                    <a:pt x="4218559" y="3456083"/>
-                  </a:lnTo>
-                  <a:lnTo>
-                    <a:pt x="4290181" y="3458263"/>
-                  </a:lnTo>
-                  <a:lnTo>
-                    <a:pt x="4361804" y="3460272"/>
-                  </a:lnTo>
-                  <a:lnTo>
-                    <a:pt x="4433426" y="3462122"/>
-                  </a:lnTo>
-                  <a:lnTo>
-                    <a:pt x="4505049" y="3463826"/>
-                  </a:lnTo>
-                  <a:lnTo>
-                    <a:pt x="4576671" y="3465397"/>
-                  </a:lnTo>
-                  <a:lnTo>
-                    <a:pt x="4648294" y="3466843"/>
-                  </a:lnTo>
-                  <a:lnTo>
-                    <a:pt x="4719916" y="3468175"/>
-                  </a:lnTo>
-                  <a:lnTo>
-                    <a:pt x="4791539" y="3469402"/>
-                  </a:lnTo>
-                  <a:lnTo>
-                    <a:pt x="4863161" y="3470533"/>
-                  </a:lnTo>
-                  <a:lnTo>
-                    <a:pt x="4934784" y="3471574"/>
-                  </a:lnTo>
-                  <a:lnTo>
-                    <a:pt x="5006406" y="3472534"/>
-                  </a:lnTo>
-                  <a:lnTo>
-                    <a:pt x="5078029" y="3473417"/>
-                  </a:lnTo>
-                  <a:lnTo>
-                    <a:pt x="5149652" y="3474232"/>
-                  </a:lnTo>
-                  <a:lnTo>
-                    <a:pt x="5221274" y="3474981"/>
+                    <a:pt x="63302" y="89878"/>
+                  </a:lnTo>
+                  <a:lnTo>
+                    <a:pt x="133647" y="181882"/>
+                  </a:lnTo>
+                  <a:lnTo>
+                    <a:pt x="203991" y="266636"/>
+                  </a:lnTo>
+                  <a:lnTo>
+                    <a:pt x="274336" y="344709"/>
+                  </a:lnTo>
+                  <a:lnTo>
+                    <a:pt x="344680" y="416628"/>
+                  </a:lnTo>
+                  <a:lnTo>
+                    <a:pt x="415025" y="482880"/>
+                  </a:lnTo>
+                  <a:lnTo>
+                    <a:pt x="485369" y="543909"/>
+                  </a:lnTo>
+                  <a:lnTo>
+                    <a:pt x="555713" y="600129"/>
+                  </a:lnTo>
+                  <a:lnTo>
+                    <a:pt x="626058" y="651917"/>
+                  </a:lnTo>
+                  <a:lnTo>
+                    <a:pt x="696402" y="699624"/>
+                  </a:lnTo>
+                  <a:lnTo>
+                    <a:pt x="766747" y="743570"/>
+                  </a:lnTo>
+                  <a:lnTo>
+                    <a:pt x="837091" y="784053"/>
+                  </a:lnTo>
+                  <a:lnTo>
+                    <a:pt x="907436" y="821345"/>
+                  </a:lnTo>
+                  <a:lnTo>
+                    <a:pt x="977780" y="855698"/>
+                  </a:lnTo>
+                  <a:lnTo>
+                    <a:pt x="1048125" y="887343"/>
+                  </a:lnTo>
+                  <a:lnTo>
+                    <a:pt x="1118469" y="916494"/>
+                  </a:lnTo>
+                  <a:lnTo>
+                    <a:pt x="1188814" y="943347"/>
+                  </a:lnTo>
+                  <a:lnTo>
+                    <a:pt x="1259158" y="968084"/>
+                  </a:lnTo>
+                  <a:lnTo>
+                    <a:pt x="1329503" y="990872"/>
+                  </a:lnTo>
+                  <a:lnTo>
+                    <a:pt x="1399847" y="1011863"/>
+                  </a:lnTo>
+                  <a:lnTo>
+                    <a:pt x="1470192" y="1031200"/>
+                  </a:lnTo>
+                  <a:lnTo>
+                    <a:pt x="1540536" y="1049013"/>
+                  </a:lnTo>
+                  <a:lnTo>
+                    <a:pt x="1610881" y="1065421"/>
+                  </a:lnTo>
+                  <a:lnTo>
+                    <a:pt x="1681225" y="1080537"/>
+                  </a:lnTo>
+                  <a:lnTo>
+                    <a:pt x="1751570" y="1094461"/>
+                  </a:lnTo>
+                  <a:lnTo>
+                    <a:pt x="1821914" y="1107288"/>
+                  </a:lnTo>
+                  <a:lnTo>
+                    <a:pt x="1892259" y="1119103"/>
+                  </a:lnTo>
+                  <a:lnTo>
+                    <a:pt x="1962603" y="1129988"/>
+                  </a:lnTo>
+                  <a:lnTo>
+                    <a:pt x="2032948" y="1140014"/>
+                  </a:lnTo>
+                  <a:lnTo>
+                    <a:pt x="2103292" y="1149251"/>
+                  </a:lnTo>
+                  <a:lnTo>
+                    <a:pt x="2173637" y="1157759"/>
+                  </a:lnTo>
+                  <a:lnTo>
+                    <a:pt x="2243981" y="1165597"/>
+                  </a:lnTo>
+                  <a:lnTo>
+                    <a:pt x="2314326" y="1172817"/>
+                  </a:lnTo>
+                  <a:lnTo>
+                    <a:pt x="2384670" y="1179468"/>
+                  </a:lnTo>
+                  <a:lnTo>
+                    <a:pt x="2455015" y="1185595"/>
+                  </a:lnTo>
+                  <a:lnTo>
+                    <a:pt x="2525359" y="1191238"/>
+                  </a:lnTo>
+                  <a:lnTo>
+                    <a:pt x="2595704" y="1196437"/>
+                  </a:lnTo>
+                  <a:lnTo>
+                    <a:pt x="2666048" y="1201227"/>
+                  </a:lnTo>
+                  <a:lnTo>
+                    <a:pt x="2736393" y="1205638"/>
+                  </a:lnTo>
+                  <a:lnTo>
+                    <a:pt x="2806737" y="1209702"/>
+                  </a:lnTo>
+                  <a:lnTo>
+                    <a:pt x="2877082" y="1213446"/>
+                  </a:lnTo>
+                  <a:lnTo>
+                    <a:pt x="2947426" y="1216895"/>
+                  </a:lnTo>
+                  <a:lnTo>
+                    <a:pt x="3017771" y="1220072"/>
+                  </a:lnTo>
+                  <a:lnTo>
+                    <a:pt x="3088115" y="1222998"/>
+                  </a:lnTo>
+                  <a:lnTo>
+                    <a:pt x="3158460" y="1225694"/>
+                  </a:lnTo>
+                  <a:lnTo>
+                    <a:pt x="3228804" y="1228177"/>
+                  </a:lnTo>
+                  <a:lnTo>
+                    <a:pt x="3299149" y="1230465"/>
+                  </a:lnTo>
+                  <a:lnTo>
+                    <a:pt x="3369493" y="1232572"/>
+                  </a:lnTo>
+                  <a:lnTo>
+                    <a:pt x="3439838" y="1234514"/>
+                  </a:lnTo>
+                  <a:lnTo>
+                    <a:pt x="3510182" y="1236302"/>
+                  </a:lnTo>
+                  <a:lnTo>
+                    <a:pt x="3580527" y="1237949"/>
+                  </a:lnTo>
+                  <a:lnTo>
+                    <a:pt x="3650871" y="1239466"/>
+                  </a:lnTo>
+                  <a:lnTo>
+                    <a:pt x="3721216" y="1240864"/>
+                  </a:lnTo>
+                  <a:lnTo>
+                    <a:pt x="3791560" y="1242152"/>
+                  </a:lnTo>
+                  <a:lnTo>
+                    <a:pt x="3861905" y="1243338"/>
+                  </a:lnTo>
+                  <a:lnTo>
+                    <a:pt x="3932249" y="1244431"/>
+                  </a:lnTo>
+                  <a:lnTo>
+                    <a:pt x="4002594" y="1245437"/>
+                  </a:lnTo>
+                  <a:lnTo>
+                    <a:pt x="4072938" y="1246365"/>
+                  </a:lnTo>
+                  <a:lnTo>
+                    <a:pt x="4143282" y="1247219"/>
+                  </a:lnTo>
+                  <a:lnTo>
+                    <a:pt x="4213627" y="1248006"/>
+                  </a:lnTo>
+                  <a:lnTo>
+                    <a:pt x="4283971" y="1248730"/>
+                  </a:lnTo>
+                  <a:lnTo>
+                    <a:pt x="4354316" y="1249398"/>
+                  </a:lnTo>
+                  <a:lnTo>
+                    <a:pt x="4424660" y="1250013"/>
+                  </a:lnTo>
+                  <a:lnTo>
+                    <a:pt x="4495005" y="1250580"/>
+                  </a:lnTo>
+                  <a:lnTo>
+                    <a:pt x="4565349" y="1251102"/>
+                  </a:lnTo>
+                  <a:lnTo>
+                    <a:pt x="4635694" y="1251582"/>
+                  </a:lnTo>
+                  <a:lnTo>
+                    <a:pt x="4706038" y="1252025"/>
+                  </a:lnTo>
+                  <a:lnTo>
+                    <a:pt x="4776383" y="1252433"/>
+                  </a:lnTo>
+                  <a:lnTo>
+                    <a:pt x="4846727" y="1252809"/>
+                  </a:lnTo>
+                  <a:lnTo>
+                    <a:pt x="4917072" y="1253155"/>
+                  </a:lnTo>
+                  <a:lnTo>
+                    <a:pt x="4987416" y="1253474"/>
+                  </a:lnTo>
+                  <a:lnTo>
+                    <a:pt x="5057761" y="1253768"/>
+                  </a:lnTo>
+                  <a:lnTo>
+                    <a:pt x="5128105" y="1254039"/>
                   </a:lnTo>
                 </a:path>
               </a:pathLst>
@@ -4348,27 +4383,27 @@
         </p:sp>
         <p:sp>
           <p:nvSpPr>
-            <p:cNvPr id="26" name="pl26"/>
-            <p:cNvSpPr/>
-            <p:nvPr/>
-          </p:nvSpPr>
-          <p:spPr>
-            <a:xfrm>
-              <a:off x="817517" y="4727786"/>
-              <a:ext cx="7799693" cy="0"/>
+            <p:cNvPr id="27" name="pl27"/>
+            <p:cNvSpPr/>
+            <p:nvPr/>
+          </p:nvSpPr>
+          <p:spPr>
+            <a:xfrm>
+              <a:off x="887106" y="3100960"/>
+              <a:ext cx="7660515" cy="0"/>
             </a:xfrm>
             <a:custGeom>
               <a:avLst/>
               <a:pathLst>
-                <a:path w="7799693" h="0">
+                <a:path w="7660515" h="0">
                   <a:moveTo>
                     <a:pt x="0" y="0"/>
                   </a:moveTo>
                   <a:lnTo>
-                    <a:pt x="7799693" y="0"/>
-                  </a:lnTo>
-                  <a:lnTo>
-                    <a:pt x="7799693" y="0"/>
+                    <a:pt x="7660515" y="0"/>
+                  </a:lnTo>
+                  <a:lnTo>
+                    <a:pt x="7660515" y="0"/>
                   </a:lnTo>
                 </a:path>
               </a:pathLst>
@@ -4391,21 +4426,21 @@
         </p:sp>
         <p:sp>
           <p:nvSpPr>
-            <p:cNvPr id="27" name="pl27"/>
-            <p:cNvSpPr/>
-            <p:nvPr/>
-          </p:nvSpPr>
-          <p:spPr>
-            <a:xfrm>
-              <a:off x="4293144" y="2073503"/>
-              <a:ext cx="0" cy="3649639"/>
+            <p:cNvPr id="28" name="pl28"/>
+            <p:cNvSpPr/>
+            <p:nvPr/>
+          </p:nvSpPr>
+          <p:spPr>
+            <a:xfrm>
+              <a:off x="4300713" y="2143092"/>
+              <a:ext cx="0" cy="1317069"/>
             </a:xfrm>
             <a:custGeom>
               <a:avLst/>
               <a:pathLst>
-                <a:path w="0" h="3649639">
+                <a:path w="0" h="1317069">
                   <a:moveTo>
-                    <a:pt x="0" y="3649639"/>
+                    <a:pt x="0" y="1317069"/>
                   </a:moveTo>
                   <a:lnTo>
                     <a:pt x="0" y="0"/>
@@ -4434,21 +4469,21 @@
         </p:sp>
         <p:sp>
           <p:nvSpPr>
-            <p:cNvPr id="28" name="pl28"/>
-            <p:cNvSpPr/>
-            <p:nvPr/>
-          </p:nvSpPr>
-          <p:spPr>
-            <a:xfrm>
-              <a:off x="3074393" y="2073503"/>
-              <a:ext cx="0" cy="3649639"/>
+            <p:cNvPr id="29" name="pl29"/>
+            <p:cNvSpPr/>
+            <p:nvPr/>
+          </p:nvSpPr>
+          <p:spPr>
+            <a:xfrm>
+              <a:off x="3103710" y="2143092"/>
+              <a:ext cx="0" cy="1317069"/>
             </a:xfrm>
             <a:custGeom>
               <a:avLst/>
               <a:pathLst>
-                <a:path w="0" h="3649639">
+                <a:path w="0" h="1317069">
                   <a:moveTo>
-                    <a:pt x="0" y="3649639"/>
+                    <a:pt x="0" y="1317069"/>
                   </a:moveTo>
                   <a:lnTo>
                     <a:pt x="0" y="0"/>
@@ -4477,21 +4512,21 @@
         </p:sp>
         <p:sp>
           <p:nvSpPr>
-            <p:cNvPr id="29" name="pl29"/>
-            <p:cNvSpPr/>
-            <p:nvPr/>
-          </p:nvSpPr>
-          <p:spPr>
-            <a:xfrm>
-              <a:off x="5518580" y="2073503"/>
-              <a:ext cx="0" cy="3649639"/>
+            <p:cNvPr id="30" name="pl30"/>
+            <p:cNvSpPr/>
+            <p:nvPr/>
+          </p:nvSpPr>
+          <p:spPr>
+            <a:xfrm>
+              <a:off x="5504283" y="2143092"/>
+              <a:ext cx="0" cy="1317069"/>
             </a:xfrm>
             <a:custGeom>
               <a:avLst/>
               <a:pathLst>
-                <a:path w="0" h="3649639">
+                <a:path w="0" h="1317069">
                   <a:moveTo>
-                    <a:pt x="0" y="3649639"/>
+                    <a:pt x="0" y="1317069"/>
                   </a:moveTo>
                   <a:lnTo>
                     <a:pt x="0" y="0"/>
@@ -4520,13 +4555,13 @@
         </p:sp>
         <p:sp>
           <p:nvSpPr>
-            <p:cNvPr id="30" name="tx30"/>
-            <p:cNvSpPr/>
-            <p:nvPr/>
-          </p:nvSpPr>
-          <p:spPr>
-            <a:xfrm>
-              <a:off x="692708" y="5517199"/>
+            <p:cNvPr id="31" name="tx31"/>
+            <p:cNvSpPr/>
+            <p:nvPr/>
+          </p:nvSpPr>
+          <p:spPr>
+            <a:xfrm>
+              <a:off x="762297" y="3360243"/>
               <a:ext cx="62179" cy="80101"/>
             </a:xfrm>
             <a:prstGeom prst="rect">
@@ -4566,13 +4601,13 @@
         </p:sp>
         <p:sp>
           <p:nvSpPr>
-            <p:cNvPr id="31" name="tx31"/>
-            <p:cNvSpPr/>
-            <p:nvPr/>
-          </p:nvSpPr>
-          <p:spPr>
-            <a:xfrm>
-              <a:off x="692708" y="4687735"/>
+            <p:cNvPr id="32" name="tx32"/>
+            <p:cNvSpPr/>
+            <p:nvPr/>
+          </p:nvSpPr>
+          <p:spPr>
+            <a:xfrm>
+              <a:off x="762297" y="3060909"/>
               <a:ext cx="62179" cy="80101"/>
             </a:xfrm>
             <a:prstGeom prst="rect">
@@ -4612,13 +4647,13 @@
         </p:sp>
         <p:sp>
           <p:nvSpPr>
-            <p:cNvPr id="32" name="tx32"/>
-            <p:cNvSpPr/>
-            <p:nvPr/>
-          </p:nvSpPr>
-          <p:spPr>
-            <a:xfrm>
-              <a:off x="692708" y="3858272"/>
+            <p:cNvPr id="33" name="tx33"/>
+            <p:cNvSpPr/>
+            <p:nvPr/>
+          </p:nvSpPr>
+          <p:spPr>
+            <a:xfrm>
+              <a:off x="762297" y="2761575"/>
               <a:ext cx="62179" cy="80101"/>
             </a:xfrm>
             <a:prstGeom prst="rect">
@@ -4658,13 +4693,13 @@
         </p:sp>
         <p:sp>
           <p:nvSpPr>
-            <p:cNvPr id="33" name="tx33"/>
-            <p:cNvSpPr/>
-            <p:nvPr/>
-          </p:nvSpPr>
-          <p:spPr>
-            <a:xfrm>
-              <a:off x="692708" y="3028808"/>
+            <p:cNvPr id="34" name="tx34"/>
+            <p:cNvSpPr/>
+            <p:nvPr/>
+          </p:nvSpPr>
+          <p:spPr>
+            <a:xfrm>
+              <a:off x="762297" y="2462242"/>
               <a:ext cx="62179" cy="80101"/>
             </a:xfrm>
             <a:prstGeom prst="rect">
@@ -4704,13 +4739,13 @@
         </p:sp>
         <p:sp>
           <p:nvSpPr>
-            <p:cNvPr id="34" name="tx34"/>
-            <p:cNvSpPr/>
-            <p:nvPr/>
-          </p:nvSpPr>
-          <p:spPr>
-            <a:xfrm>
-              <a:off x="692708" y="2199345"/>
+            <p:cNvPr id="35" name="tx35"/>
+            <p:cNvSpPr/>
+            <p:nvPr/>
+          </p:nvSpPr>
+          <p:spPr>
+            <a:xfrm>
+              <a:off x="762297" y="2162908"/>
               <a:ext cx="62179" cy="80101"/>
             </a:xfrm>
             <a:prstGeom prst="rect">
@@ -4750,13 +4785,13 @@
         </p:sp>
         <p:sp>
           <p:nvSpPr>
-            <p:cNvPr id="35" name="tx35"/>
-            <p:cNvSpPr/>
-            <p:nvPr/>
-          </p:nvSpPr>
-          <p:spPr>
-            <a:xfrm>
-              <a:off x="2134610" y="5785772"/>
+            <p:cNvPr id="36" name="tx36"/>
+            <p:cNvSpPr/>
+            <p:nvPr/>
+          </p:nvSpPr>
+          <p:spPr>
+            <a:xfrm>
+              <a:off x="2179256" y="3522791"/>
               <a:ext cx="161574" cy="80101"/>
             </a:xfrm>
             <a:prstGeom prst="rect">
@@ -4796,13 +4831,13 @@
         </p:sp>
         <p:sp>
           <p:nvSpPr>
-            <p:cNvPr id="36" name="tx36"/>
-            <p:cNvSpPr/>
-            <p:nvPr/>
-          </p:nvSpPr>
-          <p:spPr>
-            <a:xfrm>
-              <a:off x="3875731" y="5785772"/>
+            <p:cNvPr id="37" name="tx37"/>
+            <p:cNvSpPr/>
+            <p:nvPr/>
+          </p:nvSpPr>
+          <p:spPr>
+            <a:xfrm>
+              <a:off x="3889308" y="3522791"/>
               <a:ext cx="161574" cy="80101"/>
             </a:xfrm>
             <a:prstGeom prst="rect">
@@ -4842,13 +4877,13 @@
         </p:sp>
         <p:sp>
           <p:nvSpPr>
-            <p:cNvPr id="37" name="tx37"/>
-            <p:cNvSpPr/>
-            <p:nvPr/>
-          </p:nvSpPr>
-          <p:spPr>
-            <a:xfrm>
-              <a:off x="5666549" y="5785772"/>
+            <p:cNvPr id="38" name="tx38"/>
+            <p:cNvSpPr/>
+            <p:nvPr/>
+          </p:nvSpPr>
+          <p:spPr>
+            <a:xfrm>
+              <a:off x="5649057" y="3522791"/>
               <a:ext cx="62179" cy="80101"/>
             </a:xfrm>
             <a:prstGeom prst="rect">
@@ -4888,13 +4923,13 @@
         </p:sp>
         <p:sp>
           <p:nvSpPr>
-            <p:cNvPr id="38" name="tx38"/>
-            <p:cNvSpPr/>
-            <p:nvPr/>
-          </p:nvSpPr>
-          <p:spPr>
-            <a:xfrm>
-              <a:off x="7376580" y="5785772"/>
+            <p:cNvPr id="39" name="tx39"/>
+            <p:cNvSpPr/>
+            <p:nvPr/>
+          </p:nvSpPr>
+          <p:spPr>
+            <a:xfrm>
+              <a:off x="7328020" y="3522791"/>
               <a:ext cx="124358" cy="80101"/>
             </a:xfrm>
             <a:prstGeom prst="rect">
@@ -4934,13 +4969,13 @@
         </p:sp>
         <p:sp>
           <p:nvSpPr>
-            <p:cNvPr id="39" name="tx39"/>
-            <p:cNvSpPr/>
-            <p:nvPr/>
-          </p:nvSpPr>
-          <p:spPr>
-            <a:xfrm>
-              <a:off x="1561815" y="5925448"/>
+            <p:cNvPr id="40" name="tx40"/>
+            <p:cNvSpPr/>
+            <p:nvPr/>
+          </p:nvSpPr>
+          <p:spPr>
+            <a:xfrm>
+              <a:off x="1561815" y="3662467"/>
               <a:ext cx="6311097" cy="100218"/>
             </a:xfrm>
             <a:prstGeom prst="rect">
@@ -4980,13 +5015,13 @@
         </p:sp>
         <p:sp>
           <p:nvSpPr>
-            <p:cNvPr id="40" name="tx40"/>
+            <p:cNvPr id="41" name="tx41"/>
             <p:cNvSpPr/>
             <p:nvPr/>
           </p:nvSpPr>
           <p:spPr>
             <a:xfrm rot="-5400000">
-              <a:off x="181100" y="3848213"/>
+              <a:off x="250689" y="2751517"/>
               <a:ext cx="791596" cy="100218"/>
             </a:xfrm>
             <a:prstGeom prst="rect">
@@ -5026,13 +5061,13 @@
         </p:sp>
         <p:sp>
           <p:nvSpPr>
-            <p:cNvPr id="41" name="tx41"/>
-            <p:cNvSpPr/>
-            <p:nvPr/>
-          </p:nvSpPr>
-          <p:spPr>
-            <a:xfrm>
-              <a:off x="817517" y="1896563"/>
+            <p:cNvPr id="42" name="tx42"/>
+            <p:cNvSpPr/>
+            <p:nvPr/>
+          </p:nvSpPr>
+          <p:spPr>
+            <a:xfrm>
+              <a:off x="887106" y="1966152"/>
               <a:ext cx="6969465" cy="82021"/>
             </a:xfrm>
             <a:prstGeom prst="rect">
@@ -5072,13 +5107,3483 @@
         </p:sp>
         <p:sp>
           <p:nvSpPr>
-            <p:cNvPr id="42" name="tx42"/>
-            <p:cNvSpPr/>
-            <p:nvPr/>
-          </p:nvSpPr>
-          <p:spPr>
-            <a:xfrm>
-              <a:off x="817517" y="1669789"/>
+            <p:cNvPr id="43" name="tx43"/>
+            <p:cNvSpPr/>
+            <p:nvPr/>
+          </p:nvSpPr>
+          <p:spPr>
+            <a:xfrm>
+              <a:off x="887106" y="1739378"/>
+              <a:ext cx="4309384" cy="120152"/>
+            </a:xfrm>
+            <a:prstGeom prst="rect">
+              <a:avLst/>
+            </a:prstGeom>
+            <a:noFill/>
+          </p:spPr>
+          <p:txBody>
+            <a:bodyPr lIns="0" rIns="0" tIns="0" bIns="0" anchorCtr="1" anchor="ctr" wrap="none"/>
+            <a:lstStyle/>
+            <a:p>
+              <a:pPr algn="l" marL="0" marR="0" indent="0">
+                <a:lnSpc>
+                  <a:spcPts val="1320"/>
+                </a:lnSpc>
+                <a:spcBef>
+                  <a:spcPts val="0"/>
+                </a:spcBef>
+                <a:spcAft>
+                  <a:spcPts val="0"/>
+                </a:spcAft>
+              </a:pPr>
+              <a:r>
+                <a:rPr sz="1320">
+                  <a:solidFill>
+                    <a:srgbClr val="000000">
+                      <a:alpha val="100000"/>
+                    </a:srgbClr>
+                  </a:solidFill>
+                  <a:latin typeface="Helvetica"/>
+                  <a:cs typeface="Helvetica"/>
+                </a:rPr>
+                <a:t>90-Day Death (Cox PH) (Sensitivity, Carboplatin AUC ≥ 3)</a:t>
+              </a:r>
+            </a:p>
+          </p:txBody>
+        </p:sp>
+        <p:sp>
+          <p:nvSpPr>
+            <p:cNvPr id="44" name="pl44"/>
+            <p:cNvSpPr/>
+            <p:nvPr/>
+          </p:nvSpPr>
+          <p:spPr>
+            <a:xfrm>
+              <a:off x="887106" y="5444019"/>
+              <a:ext cx="7660515" cy="0"/>
+            </a:xfrm>
+            <a:custGeom>
+              <a:avLst/>
+              <a:pathLst>
+                <a:path w="7660515" h="0">
+                  <a:moveTo>
+                    <a:pt x="0" y="0"/>
+                  </a:moveTo>
+                  <a:lnTo>
+                    <a:pt x="7660515" y="0"/>
+                  </a:lnTo>
+                  <a:lnTo>
+                    <a:pt x="7660515" y="0"/>
+                  </a:lnTo>
+                </a:path>
+              </a:pathLst>
+            </a:custGeom>
+            <a:ln w="6775" cap="flat">
+              <a:solidFill>
+                <a:srgbClr val="EBEBEB">
+                  <a:alpha val="100000"/>
+                </a:srgbClr>
+              </a:solidFill>
+              <a:prstDash val="solid"/>
+              <a:round/>
+            </a:ln>
+          </p:spPr>
+          <p:txBody>
+            <a:bodyPr/>
+            <a:lstStyle/>
+            <a:p/>
+          </p:txBody>
+        </p:sp>
+        <p:sp>
+          <p:nvSpPr>
+            <p:cNvPr id="45" name="pl45"/>
+            <p:cNvSpPr/>
+            <p:nvPr/>
+          </p:nvSpPr>
+          <p:spPr>
+            <a:xfrm>
+              <a:off x="887106" y="5144686"/>
+              <a:ext cx="7660515" cy="0"/>
+            </a:xfrm>
+            <a:custGeom>
+              <a:avLst/>
+              <a:pathLst>
+                <a:path w="7660515" h="0">
+                  <a:moveTo>
+                    <a:pt x="0" y="0"/>
+                  </a:moveTo>
+                  <a:lnTo>
+                    <a:pt x="7660515" y="0"/>
+                  </a:lnTo>
+                  <a:lnTo>
+                    <a:pt x="7660515" y="0"/>
+                  </a:lnTo>
+                </a:path>
+              </a:pathLst>
+            </a:custGeom>
+            <a:ln w="6775" cap="flat">
+              <a:solidFill>
+                <a:srgbClr val="EBEBEB">
+                  <a:alpha val="100000"/>
+                </a:srgbClr>
+              </a:solidFill>
+              <a:prstDash val="solid"/>
+              <a:round/>
+            </a:ln>
+          </p:spPr>
+          <p:txBody>
+            <a:bodyPr/>
+            <a:lstStyle/>
+            <a:p/>
+          </p:txBody>
+        </p:sp>
+        <p:sp>
+          <p:nvSpPr>
+            <p:cNvPr id="46" name="pl46"/>
+            <p:cNvSpPr/>
+            <p:nvPr/>
+          </p:nvSpPr>
+          <p:spPr>
+            <a:xfrm>
+              <a:off x="887106" y="4845352"/>
+              <a:ext cx="7660515" cy="0"/>
+            </a:xfrm>
+            <a:custGeom>
+              <a:avLst/>
+              <a:pathLst>
+                <a:path w="7660515" h="0">
+                  <a:moveTo>
+                    <a:pt x="0" y="0"/>
+                  </a:moveTo>
+                  <a:lnTo>
+                    <a:pt x="7660515" y="0"/>
+                  </a:lnTo>
+                  <a:lnTo>
+                    <a:pt x="7660515" y="0"/>
+                  </a:lnTo>
+                </a:path>
+              </a:pathLst>
+            </a:custGeom>
+            <a:ln w="6775" cap="flat">
+              <a:solidFill>
+                <a:srgbClr val="EBEBEB">
+                  <a:alpha val="100000"/>
+                </a:srgbClr>
+              </a:solidFill>
+              <a:prstDash val="solid"/>
+              <a:round/>
+            </a:ln>
+          </p:spPr>
+          <p:txBody>
+            <a:bodyPr/>
+            <a:lstStyle/>
+            <a:p/>
+          </p:txBody>
+        </p:sp>
+        <p:sp>
+          <p:nvSpPr>
+            <p:cNvPr id="47" name="pl47"/>
+            <p:cNvSpPr/>
+            <p:nvPr/>
+          </p:nvSpPr>
+          <p:spPr>
+            <a:xfrm>
+              <a:off x="887106" y="4546018"/>
+              <a:ext cx="7660515" cy="0"/>
+            </a:xfrm>
+            <a:custGeom>
+              <a:avLst/>
+              <a:pathLst>
+                <a:path w="7660515" h="0">
+                  <a:moveTo>
+                    <a:pt x="0" y="0"/>
+                  </a:moveTo>
+                  <a:lnTo>
+                    <a:pt x="7660515" y="0"/>
+                  </a:lnTo>
+                  <a:lnTo>
+                    <a:pt x="7660515" y="0"/>
+                  </a:lnTo>
+                </a:path>
+              </a:pathLst>
+            </a:custGeom>
+            <a:ln w="6775" cap="flat">
+              <a:solidFill>
+                <a:srgbClr val="EBEBEB">
+                  <a:alpha val="100000"/>
+                </a:srgbClr>
+              </a:solidFill>
+              <a:prstDash val="solid"/>
+              <a:round/>
+            </a:ln>
+          </p:spPr>
+          <p:txBody>
+            <a:bodyPr/>
+            <a:lstStyle/>
+            <a:p/>
+          </p:txBody>
+        </p:sp>
+        <p:sp>
+          <p:nvSpPr>
+            <p:cNvPr id="48" name="pl48"/>
+            <p:cNvSpPr/>
+            <p:nvPr/>
+          </p:nvSpPr>
+          <p:spPr>
+            <a:xfrm>
+              <a:off x="977504" y="4336484"/>
+              <a:ext cx="0" cy="1317069"/>
+            </a:xfrm>
+            <a:custGeom>
+              <a:avLst/>
+              <a:pathLst>
+                <a:path w="0" h="1317069">
+                  <a:moveTo>
+                    <a:pt x="0" y="1317069"/>
+                  </a:moveTo>
+                  <a:lnTo>
+                    <a:pt x="0" y="0"/>
+                  </a:lnTo>
+                  <a:lnTo>
+                    <a:pt x="0" y="0"/>
+                  </a:lnTo>
+                </a:path>
+              </a:pathLst>
+            </a:custGeom>
+            <a:ln w="6775" cap="flat">
+              <a:solidFill>
+                <a:srgbClr val="EBEBEB">
+                  <a:alpha val="100000"/>
+                </a:srgbClr>
+              </a:solidFill>
+              <a:prstDash val="solid"/>
+              <a:round/>
+            </a:ln>
+          </p:spPr>
+          <p:txBody>
+            <a:bodyPr/>
+            <a:lstStyle/>
+            <a:p/>
+          </p:txBody>
+        </p:sp>
+        <p:sp>
+          <p:nvSpPr>
+            <p:cNvPr id="49" name="pl49"/>
+            <p:cNvSpPr/>
+            <p:nvPr/>
+          </p:nvSpPr>
+          <p:spPr>
+            <a:xfrm>
+              <a:off x="1832530" y="4336484"/>
+              <a:ext cx="0" cy="1317069"/>
+            </a:xfrm>
+            <a:custGeom>
+              <a:avLst/>
+              <a:pathLst>
+                <a:path w="0" h="1317069">
+                  <a:moveTo>
+                    <a:pt x="0" y="1317069"/>
+                  </a:moveTo>
+                  <a:lnTo>
+                    <a:pt x="0" y="0"/>
+                  </a:lnTo>
+                  <a:lnTo>
+                    <a:pt x="0" y="0"/>
+                  </a:lnTo>
+                </a:path>
+              </a:pathLst>
+            </a:custGeom>
+            <a:ln w="6775" cap="flat">
+              <a:solidFill>
+                <a:srgbClr val="EBEBEB">
+                  <a:alpha val="100000"/>
+                </a:srgbClr>
+              </a:solidFill>
+              <a:prstDash val="solid"/>
+              <a:round/>
+            </a:ln>
+          </p:spPr>
+          <p:txBody>
+            <a:bodyPr/>
+            <a:lstStyle/>
+            <a:p/>
+          </p:txBody>
+        </p:sp>
+        <p:sp>
+          <p:nvSpPr>
+            <p:cNvPr id="50" name="pl50"/>
+            <p:cNvSpPr/>
+            <p:nvPr/>
+          </p:nvSpPr>
+          <p:spPr>
+            <a:xfrm>
+              <a:off x="2687556" y="4336484"/>
+              <a:ext cx="0" cy="1317069"/>
+            </a:xfrm>
+            <a:custGeom>
+              <a:avLst/>
+              <a:pathLst>
+                <a:path w="0" h="1317069">
+                  <a:moveTo>
+                    <a:pt x="0" y="1317069"/>
+                  </a:moveTo>
+                  <a:lnTo>
+                    <a:pt x="0" y="0"/>
+                  </a:lnTo>
+                  <a:lnTo>
+                    <a:pt x="0" y="0"/>
+                  </a:lnTo>
+                </a:path>
+              </a:pathLst>
+            </a:custGeom>
+            <a:ln w="6775" cap="flat">
+              <a:solidFill>
+                <a:srgbClr val="EBEBEB">
+                  <a:alpha val="100000"/>
+                </a:srgbClr>
+              </a:solidFill>
+              <a:prstDash val="solid"/>
+              <a:round/>
+            </a:ln>
+          </p:spPr>
+          <p:txBody>
+            <a:bodyPr/>
+            <a:lstStyle/>
+            <a:p/>
+          </p:txBody>
+        </p:sp>
+        <p:sp>
+          <p:nvSpPr>
+            <p:cNvPr id="51" name="pl51"/>
+            <p:cNvSpPr/>
+            <p:nvPr/>
+          </p:nvSpPr>
+          <p:spPr>
+            <a:xfrm>
+              <a:off x="3542582" y="4336484"/>
+              <a:ext cx="0" cy="1317069"/>
+            </a:xfrm>
+            <a:custGeom>
+              <a:avLst/>
+              <a:pathLst>
+                <a:path w="0" h="1317069">
+                  <a:moveTo>
+                    <a:pt x="0" y="1317069"/>
+                  </a:moveTo>
+                  <a:lnTo>
+                    <a:pt x="0" y="0"/>
+                  </a:lnTo>
+                  <a:lnTo>
+                    <a:pt x="0" y="0"/>
+                  </a:lnTo>
+                </a:path>
+              </a:pathLst>
+            </a:custGeom>
+            <a:ln w="6775" cap="flat">
+              <a:solidFill>
+                <a:srgbClr val="EBEBEB">
+                  <a:alpha val="100000"/>
+                </a:srgbClr>
+              </a:solidFill>
+              <a:prstDash val="solid"/>
+              <a:round/>
+            </a:ln>
+          </p:spPr>
+          <p:txBody>
+            <a:bodyPr/>
+            <a:lstStyle/>
+            <a:p/>
+          </p:txBody>
+        </p:sp>
+        <p:sp>
+          <p:nvSpPr>
+            <p:cNvPr id="52" name="pl52"/>
+            <p:cNvSpPr/>
+            <p:nvPr/>
+          </p:nvSpPr>
+          <p:spPr>
+            <a:xfrm>
+              <a:off x="4397608" y="4336484"/>
+              <a:ext cx="0" cy="1317069"/>
+            </a:xfrm>
+            <a:custGeom>
+              <a:avLst/>
+              <a:pathLst>
+                <a:path w="0" h="1317069">
+                  <a:moveTo>
+                    <a:pt x="0" y="1317069"/>
+                  </a:moveTo>
+                  <a:lnTo>
+                    <a:pt x="0" y="0"/>
+                  </a:lnTo>
+                  <a:lnTo>
+                    <a:pt x="0" y="0"/>
+                  </a:lnTo>
+                </a:path>
+              </a:pathLst>
+            </a:custGeom>
+            <a:ln w="6775" cap="flat">
+              <a:solidFill>
+                <a:srgbClr val="EBEBEB">
+                  <a:alpha val="100000"/>
+                </a:srgbClr>
+              </a:solidFill>
+              <a:prstDash val="solid"/>
+              <a:round/>
+            </a:ln>
+          </p:spPr>
+          <p:txBody>
+            <a:bodyPr/>
+            <a:lstStyle/>
+            <a:p/>
+          </p:txBody>
+        </p:sp>
+        <p:sp>
+          <p:nvSpPr>
+            <p:cNvPr id="53" name="pl53"/>
+            <p:cNvSpPr/>
+            <p:nvPr/>
+          </p:nvSpPr>
+          <p:spPr>
+            <a:xfrm>
+              <a:off x="5252634" y="4336484"/>
+              <a:ext cx="0" cy="1317069"/>
+            </a:xfrm>
+            <a:custGeom>
+              <a:avLst/>
+              <a:pathLst>
+                <a:path w="0" h="1317069">
+                  <a:moveTo>
+                    <a:pt x="0" y="1317069"/>
+                  </a:moveTo>
+                  <a:lnTo>
+                    <a:pt x="0" y="0"/>
+                  </a:lnTo>
+                  <a:lnTo>
+                    <a:pt x="0" y="0"/>
+                  </a:lnTo>
+                </a:path>
+              </a:pathLst>
+            </a:custGeom>
+            <a:ln w="6775" cap="flat">
+              <a:solidFill>
+                <a:srgbClr val="EBEBEB">
+                  <a:alpha val="100000"/>
+                </a:srgbClr>
+              </a:solidFill>
+              <a:prstDash val="solid"/>
+              <a:round/>
+            </a:ln>
+          </p:spPr>
+          <p:txBody>
+            <a:bodyPr/>
+            <a:lstStyle/>
+            <a:p/>
+          </p:txBody>
+        </p:sp>
+        <p:sp>
+          <p:nvSpPr>
+            <p:cNvPr id="54" name="pl54"/>
+            <p:cNvSpPr/>
+            <p:nvPr/>
+          </p:nvSpPr>
+          <p:spPr>
+            <a:xfrm>
+              <a:off x="6107660" y="4336484"/>
+              <a:ext cx="0" cy="1317069"/>
+            </a:xfrm>
+            <a:custGeom>
+              <a:avLst/>
+              <a:pathLst>
+                <a:path w="0" h="1317069">
+                  <a:moveTo>
+                    <a:pt x="0" y="1317069"/>
+                  </a:moveTo>
+                  <a:lnTo>
+                    <a:pt x="0" y="0"/>
+                  </a:lnTo>
+                  <a:lnTo>
+                    <a:pt x="0" y="0"/>
+                  </a:lnTo>
+                </a:path>
+              </a:pathLst>
+            </a:custGeom>
+            <a:ln w="6775" cap="flat">
+              <a:solidFill>
+                <a:srgbClr val="EBEBEB">
+                  <a:alpha val="100000"/>
+                </a:srgbClr>
+              </a:solidFill>
+              <a:prstDash val="solid"/>
+              <a:round/>
+            </a:ln>
+          </p:spPr>
+          <p:txBody>
+            <a:bodyPr/>
+            <a:lstStyle/>
+            <a:p/>
+          </p:txBody>
+        </p:sp>
+        <p:sp>
+          <p:nvSpPr>
+            <p:cNvPr id="55" name="pl55"/>
+            <p:cNvSpPr/>
+            <p:nvPr/>
+          </p:nvSpPr>
+          <p:spPr>
+            <a:xfrm>
+              <a:off x="6962686" y="4336484"/>
+              <a:ext cx="0" cy="1317069"/>
+            </a:xfrm>
+            <a:custGeom>
+              <a:avLst/>
+              <a:pathLst>
+                <a:path w="0" h="1317069">
+                  <a:moveTo>
+                    <a:pt x="0" y="1317069"/>
+                  </a:moveTo>
+                  <a:lnTo>
+                    <a:pt x="0" y="0"/>
+                  </a:lnTo>
+                  <a:lnTo>
+                    <a:pt x="0" y="0"/>
+                  </a:lnTo>
+                </a:path>
+              </a:pathLst>
+            </a:custGeom>
+            <a:ln w="6775" cap="flat">
+              <a:solidFill>
+                <a:srgbClr val="EBEBEB">
+                  <a:alpha val="100000"/>
+                </a:srgbClr>
+              </a:solidFill>
+              <a:prstDash val="solid"/>
+              <a:round/>
+            </a:ln>
+          </p:spPr>
+          <p:txBody>
+            <a:bodyPr/>
+            <a:lstStyle/>
+            <a:p/>
+          </p:txBody>
+        </p:sp>
+        <p:sp>
+          <p:nvSpPr>
+            <p:cNvPr id="56" name="pl56"/>
+            <p:cNvSpPr/>
+            <p:nvPr/>
+          </p:nvSpPr>
+          <p:spPr>
+            <a:xfrm>
+              <a:off x="7817712" y="4336484"/>
+              <a:ext cx="0" cy="1317069"/>
+            </a:xfrm>
+            <a:custGeom>
+              <a:avLst/>
+              <a:pathLst>
+                <a:path w="0" h="1317069">
+                  <a:moveTo>
+                    <a:pt x="0" y="1317069"/>
+                  </a:moveTo>
+                  <a:lnTo>
+                    <a:pt x="0" y="0"/>
+                  </a:lnTo>
+                  <a:lnTo>
+                    <a:pt x="0" y="0"/>
+                  </a:lnTo>
+                </a:path>
+              </a:pathLst>
+            </a:custGeom>
+            <a:ln w="6775" cap="flat">
+              <a:solidFill>
+                <a:srgbClr val="EBEBEB">
+                  <a:alpha val="100000"/>
+                </a:srgbClr>
+              </a:solidFill>
+              <a:prstDash val="solid"/>
+              <a:round/>
+            </a:ln>
+          </p:spPr>
+          <p:txBody>
+            <a:bodyPr/>
+            <a:lstStyle/>
+            <a:p/>
+          </p:txBody>
+        </p:sp>
+        <p:sp>
+          <p:nvSpPr>
+            <p:cNvPr id="57" name="pl57"/>
+            <p:cNvSpPr/>
+            <p:nvPr/>
+          </p:nvSpPr>
+          <p:spPr>
+            <a:xfrm>
+              <a:off x="887106" y="5593686"/>
+              <a:ext cx="7660515" cy="0"/>
+            </a:xfrm>
+            <a:custGeom>
+              <a:avLst/>
+              <a:pathLst>
+                <a:path w="7660515" h="0">
+                  <a:moveTo>
+                    <a:pt x="0" y="0"/>
+                  </a:moveTo>
+                  <a:lnTo>
+                    <a:pt x="7660515" y="0"/>
+                  </a:lnTo>
+                  <a:lnTo>
+                    <a:pt x="7660515" y="0"/>
+                  </a:lnTo>
+                </a:path>
+              </a:pathLst>
+            </a:custGeom>
+            <a:ln w="13550" cap="flat">
+              <a:solidFill>
+                <a:srgbClr val="EBEBEB">
+                  <a:alpha val="100000"/>
+                </a:srgbClr>
+              </a:solidFill>
+              <a:prstDash val="solid"/>
+              <a:round/>
+            </a:ln>
+          </p:spPr>
+          <p:txBody>
+            <a:bodyPr/>
+            <a:lstStyle/>
+            <a:p/>
+          </p:txBody>
+        </p:sp>
+        <p:sp>
+          <p:nvSpPr>
+            <p:cNvPr id="58" name="pl58"/>
+            <p:cNvSpPr/>
+            <p:nvPr/>
+          </p:nvSpPr>
+          <p:spPr>
+            <a:xfrm>
+              <a:off x="887106" y="5294352"/>
+              <a:ext cx="7660515" cy="0"/>
+            </a:xfrm>
+            <a:custGeom>
+              <a:avLst/>
+              <a:pathLst>
+                <a:path w="7660515" h="0">
+                  <a:moveTo>
+                    <a:pt x="0" y="0"/>
+                  </a:moveTo>
+                  <a:lnTo>
+                    <a:pt x="7660515" y="0"/>
+                  </a:lnTo>
+                  <a:lnTo>
+                    <a:pt x="7660515" y="0"/>
+                  </a:lnTo>
+                </a:path>
+              </a:pathLst>
+            </a:custGeom>
+            <a:ln w="13550" cap="flat">
+              <a:solidFill>
+                <a:srgbClr val="EBEBEB">
+                  <a:alpha val="100000"/>
+                </a:srgbClr>
+              </a:solidFill>
+              <a:prstDash val="solid"/>
+              <a:round/>
+            </a:ln>
+          </p:spPr>
+          <p:txBody>
+            <a:bodyPr/>
+            <a:lstStyle/>
+            <a:p/>
+          </p:txBody>
+        </p:sp>
+        <p:sp>
+          <p:nvSpPr>
+            <p:cNvPr id="59" name="pl59"/>
+            <p:cNvSpPr/>
+            <p:nvPr/>
+          </p:nvSpPr>
+          <p:spPr>
+            <a:xfrm>
+              <a:off x="887106" y="4995019"/>
+              <a:ext cx="7660515" cy="0"/>
+            </a:xfrm>
+            <a:custGeom>
+              <a:avLst/>
+              <a:pathLst>
+                <a:path w="7660515" h="0">
+                  <a:moveTo>
+                    <a:pt x="0" y="0"/>
+                  </a:moveTo>
+                  <a:lnTo>
+                    <a:pt x="7660515" y="0"/>
+                  </a:lnTo>
+                  <a:lnTo>
+                    <a:pt x="7660515" y="0"/>
+                  </a:lnTo>
+                </a:path>
+              </a:pathLst>
+            </a:custGeom>
+            <a:ln w="13550" cap="flat">
+              <a:solidFill>
+                <a:srgbClr val="EBEBEB">
+                  <a:alpha val="100000"/>
+                </a:srgbClr>
+              </a:solidFill>
+              <a:prstDash val="solid"/>
+              <a:round/>
+            </a:ln>
+          </p:spPr>
+          <p:txBody>
+            <a:bodyPr/>
+            <a:lstStyle/>
+            <a:p/>
+          </p:txBody>
+        </p:sp>
+        <p:sp>
+          <p:nvSpPr>
+            <p:cNvPr id="60" name="pl60"/>
+            <p:cNvSpPr/>
+            <p:nvPr/>
+          </p:nvSpPr>
+          <p:spPr>
+            <a:xfrm>
+              <a:off x="887106" y="4695685"/>
+              <a:ext cx="7660515" cy="0"/>
+            </a:xfrm>
+            <a:custGeom>
+              <a:avLst/>
+              <a:pathLst>
+                <a:path w="7660515" h="0">
+                  <a:moveTo>
+                    <a:pt x="0" y="0"/>
+                  </a:moveTo>
+                  <a:lnTo>
+                    <a:pt x="7660515" y="0"/>
+                  </a:lnTo>
+                  <a:lnTo>
+                    <a:pt x="7660515" y="0"/>
+                  </a:lnTo>
+                </a:path>
+              </a:pathLst>
+            </a:custGeom>
+            <a:ln w="13550" cap="flat">
+              <a:solidFill>
+                <a:srgbClr val="EBEBEB">
+                  <a:alpha val="100000"/>
+                </a:srgbClr>
+              </a:solidFill>
+              <a:prstDash val="solid"/>
+              <a:round/>
+            </a:ln>
+          </p:spPr>
+          <p:txBody>
+            <a:bodyPr/>
+            <a:lstStyle/>
+            <a:p/>
+          </p:txBody>
+        </p:sp>
+        <p:sp>
+          <p:nvSpPr>
+            <p:cNvPr id="61" name="pl61"/>
+            <p:cNvSpPr/>
+            <p:nvPr/>
+          </p:nvSpPr>
+          <p:spPr>
+            <a:xfrm>
+              <a:off x="887106" y="4396351"/>
+              <a:ext cx="7660515" cy="0"/>
+            </a:xfrm>
+            <a:custGeom>
+              <a:avLst/>
+              <a:pathLst>
+                <a:path w="7660515" h="0">
+                  <a:moveTo>
+                    <a:pt x="0" y="0"/>
+                  </a:moveTo>
+                  <a:lnTo>
+                    <a:pt x="7660515" y="0"/>
+                  </a:lnTo>
+                  <a:lnTo>
+                    <a:pt x="7660515" y="0"/>
+                  </a:lnTo>
+                </a:path>
+              </a:pathLst>
+            </a:custGeom>
+            <a:ln w="13550" cap="flat">
+              <a:solidFill>
+                <a:srgbClr val="EBEBEB">
+                  <a:alpha val="100000"/>
+                </a:srgbClr>
+              </a:solidFill>
+              <a:prstDash val="solid"/>
+              <a:round/>
+            </a:ln>
+          </p:spPr>
+          <p:txBody>
+            <a:bodyPr/>
+            <a:lstStyle/>
+            <a:p/>
+          </p:txBody>
+        </p:sp>
+        <p:sp>
+          <p:nvSpPr>
+            <p:cNvPr id="62" name="pl62"/>
+            <p:cNvSpPr/>
+            <p:nvPr/>
+          </p:nvSpPr>
+          <p:spPr>
+            <a:xfrm>
+              <a:off x="1405017" y="4336484"/>
+              <a:ext cx="0" cy="1317069"/>
+            </a:xfrm>
+            <a:custGeom>
+              <a:avLst/>
+              <a:pathLst>
+                <a:path w="0" h="1317069">
+                  <a:moveTo>
+                    <a:pt x="0" y="1317069"/>
+                  </a:moveTo>
+                  <a:lnTo>
+                    <a:pt x="0" y="0"/>
+                  </a:lnTo>
+                  <a:lnTo>
+                    <a:pt x="0" y="0"/>
+                  </a:lnTo>
+                </a:path>
+              </a:pathLst>
+            </a:custGeom>
+            <a:ln w="13550" cap="flat">
+              <a:solidFill>
+                <a:srgbClr val="EBEBEB">
+                  <a:alpha val="100000"/>
+                </a:srgbClr>
+              </a:solidFill>
+              <a:prstDash val="solid"/>
+              <a:round/>
+            </a:ln>
+          </p:spPr>
+          <p:txBody>
+            <a:bodyPr/>
+            <a:lstStyle/>
+            <a:p/>
+          </p:txBody>
+        </p:sp>
+        <p:sp>
+          <p:nvSpPr>
+            <p:cNvPr id="63" name="pl63"/>
+            <p:cNvSpPr/>
+            <p:nvPr/>
+          </p:nvSpPr>
+          <p:spPr>
+            <a:xfrm>
+              <a:off x="2260043" y="4336484"/>
+              <a:ext cx="0" cy="1317069"/>
+            </a:xfrm>
+            <a:custGeom>
+              <a:avLst/>
+              <a:pathLst>
+                <a:path w="0" h="1317069">
+                  <a:moveTo>
+                    <a:pt x="0" y="1317069"/>
+                  </a:moveTo>
+                  <a:lnTo>
+                    <a:pt x="0" y="0"/>
+                  </a:lnTo>
+                  <a:lnTo>
+                    <a:pt x="0" y="0"/>
+                  </a:lnTo>
+                </a:path>
+              </a:pathLst>
+            </a:custGeom>
+            <a:ln w="13550" cap="flat">
+              <a:solidFill>
+                <a:srgbClr val="EBEBEB">
+                  <a:alpha val="100000"/>
+                </a:srgbClr>
+              </a:solidFill>
+              <a:prstDash val="solid"/>
+              <a:round/>
+            </a:ln>
+          </p:spPr>
+          <p:txBody>
+            <a:bodyPr/>
+            <a:lstStyle/>
+            <a:p/>
+          </p:txBody>
+        </p:sp>
+        <p:sp>
+          <p:nvSpPr>
+            <p:cNvPr id="64" name="pl64"/>
+            <p:cNvSpPr/>
+            <p:nvPr/>
+          </p:nvSpPr>
+          <p:spPr>
+            <a:xfrm>
+              <a:off x="3115069" y="4336484"/>
+              <a:ext cx="0" cy="1317069"/>
+            </a:xfrm>
+            <a:custGeom>
+              <a:avLst/>
+              <a:pathLst>
+                <a:path w="0" h="1317069">
+                  <a:moveTo>
+                    <a:pt x="0" y="1317069"/>
+                  </a:moveTo>
+                  <a:lnTo>
+                    <a:pt x="0" y="0"/>
+                  </a:lnTo>
+                  <a:lnTo>
+                    <a:pt x="0" y="0"/>
+                  </a:lnTo>
+                </a:path>
+              </a:pathLst>
+            </a:custGeom>
+            <a:ln w="13550" cap="flat">
+              <a:solidFill>
+                <a:srgbClr val="EBEBEB">
+                  <a:alpha val="100000"/>
+                </a:srgbClr>
+              </a:solidFill>
+              <a:prstDash val="solid"/>
+              <a:round/>
+            </a:ln>
+          </p:spPr>
+          <p:txBody>
+            <a:bodyPr/>
+            <a:lstStyle/>
+            <a:p/>
+          </p:txBody>
+        </p:sp>
+        <p:sp>
+          <p:nvSpPr>
+            <p:cNvPr id="65" name="pl65"/>
+            <p:cNvSpPr/>
+            <p:nvPr/>
+          </p:nvSpPr>
+          <p:spPr>
+            <a:xfrm>
+              <a:off x="3970095" y="4336484"/>
+              <a:ext cx="0" cy="1317069"/>
+            </a:xfrm>
+            <a:custGeom>
+              <a:avLst/>
+              <a:pathLst>
+                <a:path w="0" h="1317069">
+                  <a:moveTo>
+                    <a:pt x="0" y="1317069"/>
+                  </a:moveTo>
+                  <a:lnTo>
+                    <a:pt x="0" y="0"/>
+                  </a:lnTo>
+                  <a:lnTo>
+                    <a:pt x="0" y="0"/>
+                  </a:lnTo>
+                </a:path>
+              </a:pathLst>
+            </a:custGeom>
+            <a:ln w="13550" cap="flat">
+              <a:solidFill>
+                <a:srgbClr val="EBEBEB">
+                  <a:alpha val="100000"/>
+                </a:srgbClr>
+              </a:solidFill>
+              <a:prstDash val="solid"/>
+              <a:round/>
+            </a:ln>
+          </p:spPr>
+          <p:txBody>
+            <a:bodyPr/>
+            <a:lstStyle/>
+            <a:p/>
+          </p:txBody>
+        </p:sp>
+        <p:sp>
+          <p:nvSpPr>
+            <p:cNvPr id="66" name="pl66"/>
+            <p:cNvSpPr/>
+            <p:nvPr/>
+          </p:nvSpPr>
+          <p:spPr>
+            <a:xfrm>
+              <a:off x="4825121" y="4336484"/>
+              <a:ext cx="0" cy="1317069"/>
+            </a:xfrm>
+            <a:custGeom>
+              <a:avLst/>
+              <a:pathLst>
+                <a:path w="0" h="1317069">
+                  <a:moveTo>
+                    <a:pt x="0" y="1317069"/>
+                  </a:moveTo>
+                  <a:lnTo>
+                    <a:pt x="0" y="0"/>
+                  </a:lnTo>
+                  <a:lnTo>
+                    <a:pt x="0" y="0"/>
+                  </a:lnTo>
+                </a:path>
+              </a:pathLst>
+            </a:custGeom>
+            <a:ln w="13550" cap="flat">
+              <a:solidFill>
+                <a:srgbClr val="EBEBEB">
+                  <a:alpha val="100000"/>
+                </a:srgbClr>
+              </a:solidFill>
+              <a:prstDash val="solid"/>
+              <a:round/>
+            </a:ln>
+          </p:spPr>
+          <p:txBody>
+            <a:bodyPr/>
+            <a:lstStyle/>
+            <a:p/>
+          </p:txBody>
+        </p:sp>
+        <p:sp>
+          <p:nvSpPr>
+            <p:cNvPr id="67" name="pl67"/>
+            <p:cNvSpPr/>
+            <p:nvPr/>
+          </p:nvSpPr>
+          <p:spPr>
+            <a:xfrm>
+              <a:off x="5680147" y="4336484"/>
+              <a:ext cx="0" cy="1317069"/>
+            </a:xfrm>
+            <a:custGeom>
+              <a:avLst/>
+              <a:pathLst>
+                <a:path w="0" h="1317069">
+                  <a:moveTo>
+                    <a:pt x="0" y="1317069"/>
+                  </a:moveTo>
+                  <a:lnTo>
+                    <a:pt x="0" y="0"/>
+                  </a:lnTo>
+                  <a:lnTo>
+                    <a:pt x="0" y="0"/>
+                  </a:lnTo>
+                </a:path>
+              </a:pathLst>
+            </a:custGeom>
+            <a:ln w="13550" cap="flat">
+              <a:solidFill>
+                <a:srgbClr val="EBEBEB">
+                  <a:alpha val="100000"/>
+                </a:srgbClr>
+              </a:solidFill>
+              <a:prstDash val="solid"/>
+              <a:round/>
+            </a:ln>
+          </p:spPr>
+          <p:txBody>
+            <a:bodyPr/>
+            <a:lstStyle/>
+            <a:p/>
+          </p:txBody>
+        </p:sp>
+        <p:sp>
+          <p:nvSpPr>
+            <p:cNvPr id="68" name="pl68"/>
+            <p:cNvSpPr/>
+            <p:nvPr/>
+          </p:nvSpPr>
+          <p:spPr>
+            <a:xfrm>
+              <a:off x="6535173" y="4336484"/>
+              <a:ext cx="0" cy="1317069"/>
+            </a:xfrm>
+            <a:custGeom>
+              <a:avLst/>
+              <a:pathLst>
+                <a:path w="0" h="1317069">
+                  <a:moveTo>
+                    <a:pt x="0" y="1317069"/>
+                  </a:moveTo>
+                  <a:lnTo>
+                    <a:pt x="0" y="0"/>
+                  </a:lnTo>
+                  <a:lnTo>
+                    <a:pt x="0" y="0"/>
+                  </a:lnTo>
+                </a:path>
+              </a:pathLst>
+            </a:custGeom>
+            <a:ln w="13550" cap="flat">
+              <a:solidFill>
+                <a:srgbClr val="EBEBEB">
+                  <a:alpha val="100000"/>
+                </a:srgbClr>
+              </a:solidFill>
+              <a:prstDash val="solid"/>
+              <a:round/>
+            </a:ln>
+          </p:spPr>
+          <p:txBody>
+            <a:bodyPr/>
+            <a:lstStyle/>
+            <a:p/>
+          </p:txBody>
+        </p:sp>
+        <p:sp>
+          <p:nvSpPr>
+            <p:cNvPr id="69" name="pl69"/>
+            <p:cNvSpPr/>
+            <p:nvPr/>
+          </p:nvSpPr>
+          <p:spPr>
+            <a:xfrm>
+              <a:off x="7390199" y="4336484"/>
+              <a:ext cx="0" cy="1317069"/>
+            </a:xfrm>
+            <a:custGeom>
+              <a:avLst/>
+              <a:pathLst>
+                <a:path w="0" h="1317069">
+                  <a:moveTo>
+                    <a:pt x="0" y="1317069"/>
+                  </a:moveTo>
+                  <a:lnTo>
+                    <a:pt x="0" y="0"/>
+                  </a:lnTo>
+                  <a:lnTo>
+                    <a:pt x="0" y="0"/>
+                  </a:lnTo>
+                </a:path>
+              </a:pathLst>
+            </a:custGeom>
+            <a:ln w="13550" cap="flat">
+              <a:solidFill>
+                <a:srgbClr val="EBEBEB">
+                  <a:alpha val="100000"/>
+                </a:srgbClr>
+              </a:solidFill>
+              <a:prstDash val="solid"/>
+              <a:round/>
+            </a:ln>
+          </p:spPr>
+          <p:txBody>
+            <a:bodyPr/>
+            <a:lstStyle/>
+            <a:p/>
+          </p:txBody>
+        </p:sp>
+        <p:sp>
+          <p:nvSpPr>
+            <p:cNvPr id="70" name="pl70"/>
+            <p:cNvSpPr/>
+            <p:nvPr/>
+          </p:nvSpPr>
+          <p:spPr>
+            <a:xfrm>
+              <a:off x="8245225" y="4336484"/>
+              <a:ext cx="0" cy="1317069"/>
+            </a:xfrm>
+            <a:custGeom>
+              <a:avLst/>
+              <a:pathLst>
+                <a:path w="0" h="1317069">
+                  <a:moveTo>
+                    <a:pt x="0" y="1317069"/>
+                  </a:moveTo>
+                  <a:lnTo>
+                    <a:pt x="0" y="0"/>
+                  </a:lnTo>
+                  <a:lnTo>
+                    <a:pt x="0" y="0"/>
+                  </a:lnTo>
+                </a:path>
+              </a:pathLst>
+            </a:custGeom>
+            <a:ln w="13550" cap="flat">
+              <a:solidFill>
+                <a:srgbClr val="EBEBEB">
+                  <a:alpha val="100000"/>
+                </a:srgbClr>
+              </a:solidFill>
+              <a:prstDash val="solid"/>
+              <a:round/>
+            </a:ln>
+          </p:spPr>
+          <p:txBody>
+            <a:bodyPr/>
+            <a:lstStyle/>
+            <a:p/>
+          </p:txBody>
+        </p:sp>
+        <p:sp>
+          <p:nvSpPr>
+            <p:cNvPr id="71" name="pg71"/>
+            <p:cNvSpPr/>
+            <p:nvPr/>
+          </p:nvSpPr>
+          <p:spPr>
+            <a:xfrm>
+              <a:off x="1795657" y="4336484"/>
+              <a:ext cx="6403759" cy="1256890"/>
+            </a:xfrm>
+            <a:custGeom>
+              <a:avLst/>
+              <a:pathLst>
+                <a:path w="6403759" h="1256890">
+                  <a:moveTo>
+                    <a:pt x="1690274" y="0"/>
+                  </a:moveTo>
+                  <a:lnTo>
+                    <a:pt x="1690678" y="950"/>
+                  </a:lnTo>
+                  <a:lnTo>
+                    <a:pt x="1761022" y="147337"/>
+                  </a:lnTo>
+                  <a:lnTo>
+                    <a:pt x="1831367" y="276666"/>
+                  </a:lnTo>
+                  <a:lnTo>
+                    <a:pt x="1901711" y="390925"/>
+                  </a:lnTo>
+                  <a:lnTo>
+                    <a:pt x="1972056" y="491870"/>
+                  </a:lnTo>
+                  <a:lnTo>
+                    <a:pt x="2042400" y="581052"/>
+                  </a:lnTo>
+                  <a:lnTo>
+                    <a:pt x="2112745" y="659842"/>
+                  </a:lnTo>
+                  <a:lnTo>
+                    <a:pt x="2183089" y="729450"/>
+                  </a:lnTo>
+                  <a:lnTo>
+                    <a:pt x="2253434" y="790948"/>
+                  </a:lnTo>
+                  <a:lnTo>
+                    <a:pt x="2323778" y="845279"/>
+                  </a:lnTo>
+                  <a:lnTo>
+                    <a:pt x="2394123" y="893279"/>
+                  </a:lnTo>
+                  <a:lnTo>
+                    <a:pt x="2464467" y="935686"/>
+                  </a:lnTo>
+                  <a:lnTo>
+                    <a:pt x="2534812" y="962927"/>
+                  </a:lnTo>
+                  <a:lnTo>
+                    <a:pt x="2605156" y="974550"/>
+                  </a:lnTo>
+                  <a:lnTo>
+                    <a:pt x="2675501" y="985714"/>
+                  </a:lnTo>
+                  <a:lnTo>
+                    <a:pt x="2745845" y="996437"/>
+                  </a:lnTo>
+                  <a:lnTo>
+                    <a:pt x="2816190" y="1006736"/>
+                  </a:lnTo>
+                  <a:lnTo>
+                    <a:pt x="2886534" y="1016629"/>
+                  </a:lnTo>
+                  <a:lnTo>
+                    <a:pt x="2956879" y="1026130"/>
+                  </a:lnTo>
+                  <a:lnTo>
+                    <a:pt x="3027223" y="1035257"/>
+                  </a:lnTo>
+                  <a:lnTo>
+                    <a:pt x="3097568" y="1044023"/>
+                  </a:lnTo>
+                  <a:lnTo>
+                    <a:pt x="3167912" y="1052443"/>
+                  </a:lnTo>
+                  <a:lnTo>
+                    <a:pt x="3238257" y="1060530"/>
+                  </a:lnTo>
+                  <a:lnTo>
+                    <a:pt x="3308601" y="1068298"/>
+                  </a:lnTo>
+                  <a:lnTo>
+                    <a:pt x="3378946" y="1075759"/>
+                  </a:lnTo>
+                  <a:lnTo>
+                    <a:pt x="3449290" y="1082926"/>
+                  </a:lnTo>
+                  <a:lnTo>
+                    <a:pt x="3519635" y="1089809"/>
+                  </a:lnTo>
+                  <a:lnTo>
+                    <a:pt x="3589979" y="1096420"/>
+                  </a:lnTo>
+                  <a:lnTo>
+                    <a:pt x="3660324" y="1102771"/>
+                  </a:lnTo>
+                  <a:lnTo>
+                    <a:pt x="3730668" y="1108870"/>
+                  </a:lnTo>
+                  <a:lnTo>
+                    <a:pt x="3801012" y="1114729"/>
+                  </a:lnTo>
+                  <a:lnTo>
+                    <a:pt x="3871357" y="1120356"/>
+                  </a:lnTo>
+                  <a:lnTo>
+                    <a:pt x="3941701" y="1125761"/>
+                  </a:lnTo>
+                  <a:lnTo>
+                    <a:pt x="4012046" y="1130952"/>
+                  </a:lnTo>
+                  <a:lnTo>
+                    <a:pt x="4082390" y="1135939"/>
+                  </a:lnTo>
+                  <a:lnTo>
+                    <a:pt x="4152735" y="1140728"/>
+                  </a:lnTo>
+                  <a:lnTo>
+                    <a:pt x="4223079" y="1145329"/>
+                  </a:lnTo>
+                  <a:lnTo>
+                    <a:pt x="4293424" y="1149747"/>
+                  </a:lnTo>
+                  <a:lnTo>
+                    <a:pt x="4363768" y="1153991"/>
+                  </a:lnTo>
+                  <a:lnTo>
+                    <a:pt x="4434113" y="1158068"/>
+                  </a:lnTo>
+                  <a:lnTo>
+                    <a:pt x="4504457" y="1161983"/>
+                  </a:lnTo>
+                  <a:lnTo>
+                    <a:pt x="4574802" y="1165744"/>
+                  </a:lnTo>
+                  <a:lnTo>
+                    <a:pt x="4645146" y="1169356"/>
+                  </a:lnTo>
+                  <a:lnTo>
+                    <a:pt x="4715491" y="1172826"/>
+                  </a:lnTo>
+                  <a:lnTo>
+                    <a:pt x="4785835" y="1176159"/>
+                  </a:lnTo>
+                  <a:lnTo>
+                    <a:pt x="4856180" y="1179360"/>
+                  </a:lnTo>
+                  <a:lnTo>
+                    <a:pt x="4926524" y="1182434"/>
+                  </a:lnTo>
+                  <a:lnTo>
+                    <a:pt x="4996869" y="1185387"/>
+                  </a:lnTo>
+                  <a:lnTo>
+                    <a:pt x="5067213" y="1188224"/>
+                  </a:lnTo>
+                  <a:lnTo>
+                    <a:pt x="5137558" y="1190948"/>
+                  </a:lnTo>
+                  <a:lnTo>
+                    <a:pt x="5207902" y="1193565"/>
+                  </a:lnTo>
+                  <a:lnTo>
+                    <a:pt x="5278247" y="1196078"/>
+                  </a:lnTo>
+                  <a:lnTo>
+                    <a:pt x="5348591" y="1198492"/>
+                  </a:lnTo>
+                  <a:lnTo>
+                    <a:pt x="5418936" y="1200811"/>
+                  </a:lnTo>
+                  <a:lnTo>
+                    <a:pt x="5489280" y="1203038"/>
+                  </a:lnTo>
+                  <a:lnTo>
+                    <a:pt x="5559625" y="1205178"/>
+                  </a:lnTo>
+                  <a:lnTo>
+                    <a:pt x="5629969" y="1207233"/>
+                  </a:lnTo>
+                  <a:lnTo>
+                    <a:pt x="5700314" y="1209206"/>
+                  </a:lnTo>
+                  <a:lnTo>
+                    <a:pt x="5770658" y="1211102"/>
+                  </a:lnTo>
+                  <a:lnTo>
+                    <a:pt x="5841003" y="1212923"/>
+                  </a:lnTo>
+                  <a:lnTo>
+                    <a:pt x="5911347" y="1214671"/>
+                  </a:lnTo>
+                  <a:lnTo>
+                    <a:pt x="5981692" y="1216351"/>
+                  </a:lnTo>
+                  <a:lnTo>
+                    <a:pt x="6052036" y="1217965"/>
+                  </a:lnTo>
+                  <a:lnTo>
+                    <a:pt x="6122381" y="1219514"/>
+                  </a:lnTo>
+                  <a:lnTo>
+                    <a:pt x="6192725" y="1221003"/>
+                  </a:lnTo>
+                  <a:lnTo>
+                    <a:pt x="6263070" y="1222433"/>
+                  </a:lnTo>
+                  <a:lnTo>
+                    <a:pt x="6333414" y="1223806"/>
+                  </a:lnTo>
+                  <a:lnTo>
+                    <a:pt x="6403759" y="1225125"/>
+                  </a:lnTo>
+                  <a:lnTo>
+                    <a:pt x="6403759" y="1256890"/>
+                  </a:lnTo>
+                  <a:lnTo>
+                    <a:pt x="6333414" y="1256849"/>
+                  </a:lnTo>
+                  <a:lnTo>
+                    <a:pt x="6263070" y="1256802"/>
+                  </a:lnTo>
+                  <a:lnTo>
+                    <a:pt x="6192725" y="1256749"/>
+                  </a:lnTo>
+                  <a:lnTo>
+                    <a:pt x="6122381" y="1256690"/>
+                  </a:lnTo>
+                  <a:lnTo>
+                    <a:pt x="6052036" y="1256622"/>
+                  </a:lnTo>
+                  <a:lnTo>
+                    <a:pt x="5981692" y="1256546"/>
+                  </a:lnTo>
+                  <a:lnTo>
+                    <a:pt x="5911347" y="1256459"/>
+                  </a:lnTo>
+                  <a:lnTo>
+                    <a:pt x="5841003" y="1256361"/>
+                  </a:lnTo>
+                  <a:lnTo>
+                    <a:pt x="5770658" y="1256251"/>
+                  </a:lnTo>
+                  <a:lnTo>
+                    <a:pt x="5700314" y="1256125"/>
+                  </a:lnTo>
+                  <a:lnTo>
+                    <a:pt x="5629969" y="1255983"/>
+                  </a:lnTo>
+                  <a:lnTo>
+                    <a:pt x="5559625" y="1255822"/>
+                  </a:lnTo>
+                  <a:lnTo>
+                    <a:pt x="5489280" y="1255640"/>
+                  </a:lnTo>
+                  <a:lnTo>
+                    <a:pt x="5418936" y="1255434"/>
+                  </a:lnTo>
+                  <a:lnTo>
+                    <a:pt x="5348591" y="1255201"/>
+                  </a:lnTo>
+                  <a:lnTo>
+                    <a:pt x="5278247" y="1254938"/>
+                  </a:lnTo>
+                  <a:lnTo>
+                    <a:pt x="5207902" y="1254639"/>
+                  </a:lnTo>
+                  <a:lnTo>
+                    <a:pt x="5137558" y="1254301"/>
+                  </a:lnTo>
+                  <a:lnTo>
+                    <a:pt x="5067213" y="1253918"/>
+                  </a:lnTo>
+                  <a:lnTo>
+                    <a:pt x="4996869" y="1253485"/>
+                  </a:lnTo>
+                  <a:lnTo>
+                    <a:pt x="4926524" y="1252995"/>
+                  </a:lnTo>
+                  <a:lnTo>
+                    <a:pt x="4856180" y="1252440"/>
+                  </a:lnTo>
+                  <a:lnTo>
+                    <a:pt x="4785835" y="1251812"/>
+                  </a:lnTo>
+                  <a:lnTo>
+                    <a:pt x="4715491" y="1251101"/>
+                  </a:lnTo>
+                  <a:lnTo>
+                    <a:pt x="4645146" y="1250296"/>
+                  </a:lnTo>
+                  <a:lnTo>
+                    <a:pt x="4574802" y="1249386"/>
+                  </a:lnTo>
+                  <a:lnTo>
+                    <a:pt x="4504457" y="1248355"/>
+                  </a:lnTo>
+                  <a:lnTo>
+                    <a:pt x="4434113" y="1247188"/>
+                  </a:lnTo>
+                  <a:lnTo>
+                    <a:pt x="4363768" y="1245867"/>
+                  </a:lnTo>
+                  <a:lnTo>
+                    <a:pt x="4293424" y="1244372"/>
+                  </a:lnTo>
+                  <a:lnTo>
+                    <a:pt x="4223079" y="1242680"/>
+                  </a:lnTo>
+                  <a:lnTo>
+                    <a:pt x="4152735" y="1240764"/>
+                  </a:lnTo>
+                  <a:lnTo>
+                    <a:pt x="4082390" y="1238596"/>
+                  </a:lnTo>
+                  <a:lnTo>
+                    <a:pt x="4012046" y="1236142"/>
+                  </a:lnTo>
+                  <a:lnTo>
+                    <a:pt x="3941701" y="1233364"/>
+                  </a:lnTo>
+                  <a:lnTo>
+                    <a:pt x="3871357" y="1230220"/>
+                  </a:lnTo>
+                  <a:lnTo>
+                    <a:pt x="3801012" y="1226661"/>
+                  </a:lnTo>
+                  <a:lnTo>
+                    <a:pt x="3730668" y="1222633"/>
+                  </a:lnTo>
+                  <a:lnTo>
+                    <a:pt x="3660324" y="1218074"/>
+                  </a:lnTo>
+                  <a:lnTo>
+                    <a:pt x="3589979" y="1212913"/>
+                  </a:lnTo>
+                  <a:lnTo>
+                    <a:pt x="3519635" y="1207071"/>
+                  </a:lnTo>
+                  <a:lnTo>
+                    <a:pt x="3449290" y="1200459"/>
+                  </a:lnTo>
+                  <a:lnTo>
+                    <a:pt x="3378946" y="1192975"/>
+                  </a:lnTo>
+                  <a:lnTo>
+                    <a:pt x="3308601" y="1184504"/>
+                  </a:lnTo>
+                  <a:lnTo>
+                    <a:pt x="3238257" y="1174915"/>
+                  </a:lnTo>
+                  <a:lnTo>
+                    <a:pt x="3167912" y="1164062"/>
+                  </a:lnTo>
+                  <a:lnTo>
+                    <a:pt x="3097568" y="1151777"/>
+                  </a:lnTo>
+                  <a:lnTo>
+                    <a:pt x="3027223" y="1137872"/>
+                  </a:lnTo>
+                  <a:lnTo>
+                    <a:pt x="2956879" y="1122133"/>
+                  </a:lnTo>
+                  <a:lnTo>
+                    <a:pt x="2886534" y="1104318"/>
+                  </a:lnTo>
+                  <a:lnTo>
+                    <a:pt x="2816190" y="1084153"/>
+                  </a:lnTo>
+                  <a:lnTo>
+                    <a:pt x="2745845" y="1061329"/>
+                  </a:lnTo>
+                  <a:lnTo>
+                    <a:pt x="2675501" y="1035493"/>
+                  </a:lnTo>
+                  <a:lnTo>
+                    <a:pt x="2605156" y="1006251"/>
+                  </a:lnTo>
+                  <a:lnTo>
+                    <a:pt x="2534812" y="973151"/>
+                  </a:lnTo>
+                  <a:lnTo>
+                    <a:pt x="2464467" y="950826"/>
+                  </a:lnTo>
+                  <a:lnTo>
+                    <a:pt x="2394123" y="938228"/>
+                  </a:lnTo>
+                  <a:lnTo>
+                    <a:pt x="2323778" y="925111"/>
+                  </a:lnTo>
+                  <a:lnTo>
+                    <a:pt x="2253434" y="911456"/>
+                  </a:lnTo>
+                  <a:lnTo>
+                    <a:pt x="2183089" y="897238"/>
+                  </a:lnTo>
+                  <a:lnTo>
+                    <a:pt x="2112745" y="882436"/>
+                  </a:lnTo>
+                  <a:lnTo>
+                    <a:pt x="2042400" y="867026"/>
+                  </a:lnTo>
+                  <a:lnTo>
+                    <a:pt x="1972056" y="850981"/>
+                  </a:lnTo>
+                  <a:lnTo>
+                    <a:pt x="1901711" y="834277"/>
+                  </a:lnTo>
+                  <a:lnTo>
+                    <a:pt x="1831367" y="816886"/>
+                  </a:lnTo>
+                  <a:lnTo>
+                    <a:pt x="1761022" y="798780"/>
+                  </a:lnTo>
+                  <a:lnTo>
+                    <a:pt x="1690678" y="779929"/>
+                  </a:lnTo>
+                  <a:lnTo>
+                    <a:pt x="1620333" y="760303"/>
+                  </a:lnTo>
+                  <a:lnTo>
+                    <a:pt x="1549989" y="739871"/>
+                  </a:lnTo>
+                  <a:lnTo>
+                    <a:pt x="1479644" y="718597"/>
+                  </a:lnTo>
+                  <a:lnTo>
+                    <a:pt x="1409300" y="696450"/>
+                  </a:lnTo>
+                  <a:lnTo>
+                    <a:pt x="1338955" y="673391"/>
+                  </a:lnTo>
+                  <a:lnTo>
+                    <a:pt x="1268611" y="649384"/>
+                  </a:lnTo>
+                  <a:lnTo>
+                    <a:pt x="1198266" y="624390"/>
+                  </a:lnTo>
+                  <a:lnTo>
+                    <a:pt x="1127922" y="598369"/>
+                  </a:lnTo>
+                  <a:lnTo>
+                    <a:pt x="1057577" y="571277"/>
+                  </a:lnTo>
+                  <a:lnTo>
+                    <a:pt x="987233" y="543071"/>
+                  </a:lnTo>
+                  <a:lnTo>
+                    <a:pt x="916888" y="513705"/>
+                  </a:lnTo>
+                  <a:lnTo>
+                    <a:pt x="846544" y="483132"/>
+                  </a:lnTo>
+                  <a:lnTo>
+                    <a:pt x="776199" y="451302"/>
+                  </a:lnTo>
+                  <a:lnTo>
+                    <a:pt x="705855" y="418162"/>
+                  </a:lnTo>
+                  <a:lnTo>
+                    <a:pt x="635510" y="383660"/>
+                  </a:lnTo>
+                  <a:lnTo>
+                    <a:pt x="565166" y="347740"/>
+                  </a:lnTo>
+                  <a:lnTo>
+                    <a:pt x="494821" y="310342"/>
+                  </a:lnTo>
+                  <a:lnTo>
+                    <a:pt x="424477" y="271406"/>
+                  </a:lnTo>
+                  <a:lnTo>
+                    <a:pt x="354132" y="230870"/>
+                  </a:lnTo>
+                  <a:lnTo>
+                    <a:pt x="283788" y="188666"/>
+                  </a:lnTo>
+                  <a:lnTo>
+                    <a:pt x="213443" y="144727"/>
+                  </a:lnTo>
+                  <a:lnTo>
+                    <a:pt x="143099" y="98981"/>
+                  </a:lnTo>
+                  <a:lnTo>
+                    <a:pt x="72754" y="51354"/>
+                  </a:lnTo>
+                  <a:lnTo>
+                    <a:pt x="2410" y="1769"/>
+                  </a:lnTo>
+                  <a:lnTo>
+                    <a:pt x="0" y="0"/>
+                  </a:lnTo>
+                  <a:close/>
+                </a:path>
+              </a:pathLst>
+            </a:custGeom>
+            <a:solidFill>
+              <a:srgbClr val="FF8C00">
+                <a:alpha val="20000"/>
+              </a:srgbClr>
+            </a:solidFill>
+          </p:spPr>
+          <p:txBody>
+            <a:bodyPr/>
+            <a:lstStyle/>
+            <a:p/>
+          </p:txBody>
+        </p:sp>
+        <p:sp>
+          <p:nvSpPr>
+            <p:cNvPr id="72" name="pl72"/>
+            <p:cNvSpPr/>
+            <p:nvPr/>
+          </p:nvSpPr>
+          <p:spPr>
+            <a:xfrm>
+              <a:off x="3485932" y="4336484"/>
+              <a:ext cx="4713484" cy="1225125"/>
+            </a:xfrm>
+            <a:custGeom>
+              <a:avLst/>
+              <a:pathLst>
+                <a:path w="4713484" h="1225125">
+                  <a:moveTo>
+                    <a:pt x="0" y="0"/>
+                  </a:moveTo>
+                  <a:lnTo>
+                    <a:pt x="403" y="950"/>
+                  </a:lnTo>
+                  <a:lnTo>
+                    <a:pt x="70747" y="147337"/>
+                  </a:lnTo>
+                  <a:lnTo>
+                    <a:pt x="141092" y="276666"/>
+                  </a:lnTo>
+                  <a:lnTo>
+                    <a:pt x="211436" y="390925"/>
+                  </a:lnTo>
+                  <a:lnTo>
+                    <a:pt x="281781" y="491870"/>
+                  </a:lnTo>
+                  <a:lnTo>
+                    <a:pt x="352125" y="581052"/>
+                  </a:lnTo>
+                  <a:lnTo>
+                    <a:pt x="422470" y="659842"/>
+                  </a:lnTo>
+                  <a:lnTo>
+                    <a:pt x="492814" y="729450"/>
+                  </a:lnTo>
+                  <a:lnTo>
+                    <a:pt x="563159" y="790948"/>
+                  </a:lnTo>
+                  <a:lnTo>
+                    <a:pt x="633503" y="845279"/>
+                  </a:lnTo>
+                  <a:lnTo>
+                    <a:pt x="703848" y="893279"/>
+                  </a:lnTo>
+                  <a:lnTo>
+                    <a:pt x="774192" y="935686"/>
+                  </a:lnTo>
+                  <a:lnTo>
+                    <a:pt x="844537" y="962927"/>
+                  </a:lnTo>
+                  <a:lnTo>
+                    <a:pt x="914881" y="974550"/>
+                  </a:lnTo>
+                  <a:lnTo>
+                    <a:pt x="985226" y="985714"/>
+                  </a:lnTo>
+                  <a:lnTo>
+                    <a:pt x="1055570" y="996437"/>
+                  </a:lnTo>
+                  <a:lnTo>
+                    <a:pt x="1125915" y="1006736"/>
+                  </a:lnTo>
+                  <a:lnTo>
+                    <a:pt x="1196259" y="1016629"/>
+                  </a:lnTo>
+                  <a:lnTo>
+                    <a:pt x="1266604" y="1026130"/>
+                  </a:lnTo>
+                  <a:lnTo>
+                    <a:pt x="1336948" y="1035257"/>
+                  </a:lnTo>
+                  <a:lnTo>
+                    <a:pt x="1407293" y="1044023"/>
+                  </a:lnTo>
+                  <a:lnTo>
+                    <a:pt x="1477637" y="1052443"/>
+                  </a:lnTo>
+                  <a:lnTo>
+                    <a:pt x="1547982" y="1060530"/>
+                  </a:lnTo>
+                  <a:lnTo>
+                    <a:pt x="1618326" y="1068298"/>
+                  </a:lnTo>
+                  <a:lnTo>
+                    <a:pt x="1688671" y="1075759"/>
+                  </a:lnTo>
+                  <a:lnTo>
+                    <a:pt x="1759015" y="1082926"/>
+                  </a:lnTo>
+                  <a:lnTo>
+                    <a:pt x="1829360" y="1089809"/>
+                  </a:lnTo>
+                  <a:lnTo>
+                    <a:pt x="1899704" y="1096420"/>
+                  </a:lnTo>
+                  <a:lnTo>
+                    <a:pt x="1970049" y="1102771"/>
+                  </a:lnTo>
+                  <a:lnTo>
+                    <a:pt x="2040393" y="1108870"/>
+                  </a:lnTo>
+                  <a:lnTo>
+                    <a:pt x="2110738" y="1114729"/>
+                  </a:lnTo>
+                  <a:lnTo>
+                    <a:pt x="2181082" y="1120356"/>
+                  </a:lnTo>
+                  <a:lnTo>
+                    <a:pt x="2251427" y="1125761"/>
+                  </a:lnTo>
+                  <a:lnTo>
+                    <a:pt x="2321771" y="1130952"/>
+                  </a:lnTo>
+                  <a:lnTo>
+                    <a:pt x="2392116" y="1135939"/>
+                  </a:lnTo>
+                  <a:lnTo>
+                    <a:pt x="2462460" y="1140728"/>
+                  </a:lnTo>
+                  <a:lnTo>
+                    <a:pt x="2532805" y="1145329"/>
+                  </a:lnTo>
+                  <a:lnTo>
+                    <a:pt x="2603149" y="1149747"/>
+                  </a:lnTo>
+                  <a:lnTo>
+                    <a:pt x="2673493" y="1153991"/>
+                  </a:lnTo>
+                  <a:lnTo>
+                    <a:pt x="2743838" y="1158068"/>
+                  </a:lnTo>
+                  <a:lnTo>
+                    <a:pt x="2814182" y="1161983"/>
+                  </a:lnTo>
+                  <a:lnTo>
+                    <a:pt x="2884527" y="1165744"/>
+                  </a:lnTo>
+                  <a:lnTo>
+                    <a:pt x="2954871" y="1169356"/>
+                  </a:lnTo>
+                  <a:lnTo>
+                    <a:pt x="3025216" y="1172826"/>
+                  </a:lnTo>
+                  <a:lnTo>
+                    <a:pt x="3095560" y="1176159"/>
+                  </a:lnTo>
+                  <a:lnTo>
+                    <a:pt x="3165905" y="1179360"/>
+                  </a:lnTo>
+                  <a:lnTo>
+                    <a:pt x="3236249" y="1182434"/>
+                  </a:lnTo>
+                  <a:lnTo>
+                    <a:pt x="3306594" y="1185387"/>
+                  </a:lnTo>
+                  <a:lnTo>
+                    <a:pt x="3376938" y="1188224"/>
+                  </a:lnTo>
+                  <a:lnTo>
+                    <a:pt x="3447283" y="1190948"/>
+                  </a:lnTo>
+                  <a:lnTo>
+                    <a:pt x="3517627" y="1193565"/>
+                  </a:lnTo>
+                  <a:lnTo>
+                    <a:pt x="3587972" y="1196078"/>
+                  </a:lnTo>
+                  <a:lnTo>
+                    <a:pt x="3658316" y="1198492"/>
+                  </a:lnTo>
+                  <a:lnTo>
+                    <a:pt x="3728661" y="1200811"/>
+                  </a:lnTo>
+                  <a:lnTo>
+                    <a:pt x="3799005" y="1203038"/>
+                  </a:lnTo>
+                  <a:lnTo>
+                    <a:pt x="3869350" y="1205178"/>
+                  </a:lnTo>
+                  <a:lnTo>
+                    <a:pt x="3939694" y="1207233"/>
+                  </a:lnTo>
+                  <a:lnTo>
+                    <a:pt x="4010039" y="1209206"/>
+                  </a:lnTo>
+                  <a:lnTo>
+                    <a:pt x="4080383" y="1211102"/>
+                  </a:lnTo>
+                  <a:lnTo>
+                    <a:pt x="4150728" y="1212923"/>
+                  </a:lnTo>
+                  <a:lnTo>
+                    <a:pt x="4221072" y="1214671"/>
+                  </a:lnTo>
+                  <a:lnTo>
+                    <a:pt x="4291417" y="1216351"/>
+                  </a:lnTo>
+                  <a:lnTo>
+                    <a:pt x="4361761" y="1217965"/>
+                  </a:lnTo>
+                  <a:lnTo>
+                    <a:pt x="4432106" y="1219514"/>
+                  </a:lnTo>
+                  <a:lnTo>
+                    <a:pt x="4502450" y="1221003"/>
+                  </a:lnTo>
+                  <a:lnTo>
+                    <a:pt x="4572795" y="1222433"/>
+                  </a:lnTo>
+                  <a:lnTo>
+                    <a:pt x="4643139" y="1223806"/>
+                  </a:lnTo>
+                  <a:lnTo>
+                    <a:pt x="4713484" y="1225125"/>
+                  </a:lnTo>
+                </a:path>
+              </a:pathLst>
+            </a:custGeom>
+          </p:spPr>
+          <p:txBody>
+            <a:bodyPr/>
+            <a:lstStyle/>
+            <a:p/>
+          </p:txBody>
+        </p:sp>
+        <p:sp>
+          <p:nvSpPr>
+            <p:cNvPr id="73" name="pl73"/>
+            <p:cNvSpPr/>
+            <p:nvPr/>
+          </p:nvSpPr>
+          <p:spPr>
+            <a:xfrm>
+              <a:off x="1795657" y="4336484"/>
+              <a:ext cx="6403759" cy="1256890"/>
+            </a:xfrm>
+            <a:custGeom>
+              <a:avLst/>
+              <a:pathLst>
+                <a:path w="6403759" h="1256890">
+                  <a:moveTo>
+                    <a:pt x="6403759" y="1256890"/>
+                  </a:moveTo>
+                  <a:lnTo>
+                    <a:pt x="6333414" y="1256849"/>
+                  </a:lnTo>
+                  <a:lnTo>
+                    <a:pt x="6263070" y="1256802"/>
+                  </a:lnTo>
+                  <a:lnTo>
+                    <a:pt x="6192725" y="1256749"/>
+                  </a:lnTo>
+                  <a:lnTo>
+                    <a:pt x="6122381" y="1256690"/>
+                  </a:lnTo>
+                  <a:lnTo>
+                    <a:pt x="6052036" y="1256622"/>
+                  </a:lnTo>
+                  <a:lnTo>
+                    <a:pt x="5981692" y="1256546"/>
+                  </a:lnTo>
+                  <a:lnTo>
+                    <a:pt x="5911347" y="1256459"/>
+                  </a:lnTo>
+                  <a:lnTo>
+                    <a:pt x="5841003" y="1256361"/>
+                  </a:lnTo>
+                  <a:lnTo>
+                    <a:pt x="5770658" y="1256251"/>
+                  </a:lnTo>
+                  <a:lnTo>
+                    <a:pt x="5700314" y="1256125"/>
+                  </a:lnTo>
+                  <a:lnTo>
+                    <a:pt x="5629969" y="1255983"/>
+                  </a:lnTo>
+                  <a:lnTo>
+                    <a:pt x="5559625" y="1255822"/>
+                  </a:lnTo>
+                  <a:lnTo>
+                    <a:pt x="5489280" y="1255640"/>
+                  </a:lnTo>
+                  <a:lnTo>
+                    <a:pt x="5418936" y="1255434"/>
+                  </a:lnTo>
+                  <a:lnTo>
+                    <a:pt x="5348591" y="1255201"/>
+                  </a:lnTo>
+                  <a:lnTo>
+                    <a:pt x="5278247" y="1254938"/>
+                  </a:lnTo>
+                  <a:lnTo>
+                    <a:pt x="5207902" y="1254639"/>
+                  </a:lnTo>
+                  <a:lnTo>
+                    <a:pt x="5137558" y="1254301"/>
+                  </a:lnTo>
+                  <a:lnTo>
+                    <a:pt x="5067213" y="1253918"/>
+                  </a:lnTo>
+                  <a:lnTo>
+                    <a:pt x="4996869" y="1253485"/>
+                  </a:lnTo>
+                  <a:lnTo>
+                    <a:pt x="4926524" y="1252995"/>
+                  </a:lnTo>
+                  <a:lnTo>
+                    <a:pt x="4856180" y="1252440"/>
+                  </a:lnTo>
+                  <a:lnTo>
+                    <a:pt x="4785835" y="1251812"/>
+                  </a:lnTo>
+                  <a:lnTo>
+                    <a:pt x="4715491" y="1251101"/>
+                  </a:lnTo>
+                  <a:lnTo>
+                    <a:pt x="4645146" y="1250296"/>
+                  </a:lnTo>
+                  <a:lnTo>
+                    <a:pt x="4574802" y="1249386"/>
+                  </a:lnTo>
+                  <a:lnTo>
+                    <a:pt x="4504457" y="1248355"/>
+                  </a:lnTo>
+                  <a:lnTo>
+                    <a:pt x="4434113" y="1247188"/>
+                  </a:lnTo>
+                  <a:lnTo>
+                    <a:pt x="4363768" y="1245867"/>
+                  </a:lnTo>
+                  <a:lnTo>
+                    <a:pt x="4293424" y="1244372"/>
+                  </a:lnTo>
+                  <a:lnTo>
+                    <a:pt x="4223079" y="1242680"/>
+                  </a:lnTo>
+                  <a:lnTo>
+                    <a:pt x="4152735" y="1240764"/>
+                  </a:lnTo>
+                  <a:lnTo>
+                    <a:pt x="4082390" y="1238596"/>
+                  </a:lnTo>
+                  <a:lnTo>
+                    <a:pt x="4012046" y="1236142"/>
+                  </a:lnTo>
+                  <a:lnTo>
+                    <a:pt x="3941701" y="1233364"/>
+                  </a:lnTo>
+                  <a:lnTo>
+                    <a:pt x="3871357" y="1230220"/>
+                  </a:lnTo>
+                  <a:lnTo>
+                    <a:pt x="3801012" y="1226661"/>
+                  </a:lnTo>
+                  <a:lnTo>
+                    <a:pt x="3730668" y="1222633"/>
+                  </a:lnTo>
+                  <a:lnTo>
+                    <a:pt x="3660324" y="1218074"/>
+                  </a:lnTo>
+                  <a:lnTo>
+                    <a:pt x="3589979" y="1212913"/>
+                  </a:lnTo>
+                  <a:lnTo>
+                    <a:pt x="3519635" y="1207071"/>
+                  </a:lnTo>
+                  <a:lnTo>
+                    <a:pt x="3449290" y="1200459"/>
+                  </a:lnTo>
+                  <a:lnTo>
+                    <a:pt x="3378946" y="1192975"/>
+                  </a:lnTo>
+                  <a:lnTo>
+                    <a:pt x="3308601" y="1184504"/>
+                  </a:lnTo>
+                  <a:lnTo>
+                    <a:pt x="3238257" y="1174915"/>
+                  </a:lnTo>
+                  <a:lnTo>
+                    <a:pt x="3167912" y="1164062"/>
+                  </a:lnTo>
+                  <a:lnTo>
+                    <a:pt x="3097568" y="1151777"/>
+                  </a:lnTo>
+                  <a:lnTo>
+                    <a:pt x="3027223" y="1137872"/>
+                  </a:lnTo>
+                  <a:lnTo>
+                    <a:pt x="2956879" y="1122133"/>
+                  </a:lnTo>
+                  <a:lnTo>
+                    <a:pt x="2886534" y="1104318"/>
+                  </a:lnTo>
+                  <a:lnTo>
+                    <a:pt x="2816190" y="1084153"/>
+                  </a:lnTo>
+                  <a:lnTo>
+                    <a:pt x="2745845" y="1061329"/>
+                  </a:lnTo>
+                  <a:lnTo>
+                    <a:pt x="2675501" y="1035493"/>
+                  </a:lnTo>
+                  <a:lnTo>
+                    <a:pt x="2605156" y="1006251"/>
+                  </a:lnTo>
+                  <a:lnTo>
+                    <a:pt x="2534812" y="973151"/>
+                  </a:lnTo>
+                  <a:lnTo>
+                    <a:pt x="2464467" y="950826"/>
+                  </a:lnTo>
+                  <a:lnTo>
+                    <a:pt x="2394123" y="938228"/>
+                  </a:lnTo>
+                  <a:lnTo>
+                    <a:pt x="2323778" y="925111"/>
+                  </a:lnTo>
+                  <a:lnTo>
+                    <a:pt x="2253434" y="911456"/>
+                  </a:lnTo>
+                  <a:lnTo>
+                    <a:pt x="2183089" y="897238"/>
+                  </a:lnTo>
+                  <a:lnTo>
+                    <a:pt x="2112745" y="882436"/>
+                  </a:lnTo>
+                  <a:lnTo>
+                    <a:pt x="2042400" y="867026"/>
+                  </a:lnTo>
+                  <a:lnTo>
+                    <a:pt x="1972056" y="850981"/>
+                  </a:lnTo>
+                  <a:lnTo>
+                    <a:pt x="1901711" y="834277"/>
+                  </a:lnTo>
+                  <a:lnTo>
+                    <a:pt x="1831367" y="816886"/>
+                  </a:lnTo>
+                  <a:lnTo>
+                    <a:pt x="1761022" y="798780"/>
+                  </a:lnTo>
+                  <a:lnTo>
+                    <a:pt x="1690678" y="779929"/>
+                  </a:lnTo>
+                  <a:lnTo>
+                    <a:pt x="1620333" y="760303"/>
+                  </a:lnTo>
+                  <a:lnTo>
+                    <a:pt x="1549989" y="739871"/>
+                  </a:lnTo>
+                  <a:lnTo>
+                    <a:pt x="1479644" y="718597"/>
+                  </a:lnTo>
+                  <a:lnTo>
+                    <a:pt x="1409300" y="696450"/>
+                  </a:lnTo>
+                  <a:lnTo>
+                    <a:pt x="1338955" y="673391"/>
+                  </a:lnTo>
+                  <a:lnTo>
+                    <a:pt x="1268611" y="649384"/>
+                  </a:lnTo>
+                  <a:lnTo>
+                    <a:pt x="1198266" y="624390"/>
+                  </a:lnTo>
+                  <a:lnTo>
+                    <a:pt x="1127922" y="598369"/>
+                  </a:lnTo>
+                  <a:lnTo>
+                    <a:pt x="1057577" y="571277"/>
+                  </a:lnTo>
+                  <a:lnTo>
+                    <a:pt x="987233" y="543071"/>
+                  </a:lnTo>
+                  <a:lnTo>
+                    <a:pt x="916888" y="513705"/>
+                  </a:lnTo>
+                  <a:lnTo>
+                    <a:pt x="846544" y="483132"/>
+                  </a:lnTo>
+                  <a:lnTo>
+                    <a:pt x="776199" y="451302"/>
+                  </a:lnTo>
+                  <a:lnTo>
+                    <a:pt x="705855" y="418162"/>
+                  </a:lnTo>
+                  <a:lnTo>
+                    <a:pt x="635510" y="383660"/>
+                  </a:lnTo>
+                  <a:lnTo>
+                    <a:pt x="565166" y="347740"/>
+                  </a:lnTo>
+                  <a:lnTo>
+                    <a:pt x="494821" y="310342"/>
+                  </a:lnTo>
+                  <a:lnTo>
+                    <a:pt x="424477" y="271406"/>
+                  </a:lnTo>
+                  <a:lnTo>
+                    <a:pt x="354132" y="230870"/>
+                  </a:lnTo>
+                  <a:lnTo>
+                    <a:pt x="283788" y="188666"/>
+                  </a:lnTo>
+                  <a:lnTo>
+                    <a:pt x="213443" y="144727"/>
+                  </a:lnTo>
+                  <a:lnTo>
+                    <a:pt x="143099" y="98981"/>
+                  </a:lnTo>
+                  <a:lnTo>
+                    <a:pt x="72754" y="51354"/>
+                  </a:lnTo>
+                  <a:lnTo>
+                    <a:pt x="2410" y="1769"/>
+                  </a:lnTo>
+                  <a:lnTo>
+                    <a:pt x="0" y="0"/>
+                  </a:lnTo>
+                </a:path>
+              </a:pathLst>
+            </a:custGeom>
+          </p:spPr>
+          <p:txBody>
+            <a:bodyPr/>
+            <a:lstStyle/>
+            <a:p/>
+          </p:txBody>
+        </p:sp>
+        <p:sp>
+          <p:nvSpPr>
+            <p:cNvPr id="74" name="pl74"/>
+            <p:cNvSpPr/>
+            <p:nvPr/>
+          </p:nvSpPr>
+          <p:spPr>
+            <a:xfrm>
+              <a:off x="3071310" y="4336484"/>
+              <a:ext cx="5128105" cy="1254039"/>
+            </a:xfrm>
+            <a:custGeom>
+              <a:avLst/>
+              <a:pathLst>
+                <a:path w="5128105" h="1254039">
+                  <a:moveTo>
+                    <a:pt x="0" y="0"/>
+                  </a:moveTo>
+                  <a:lnTo>
+                    <a:pt x="63302" y="89878"/>
+                  </a:lnTo>
+                  <a:lnTo>
+                    <a:pt x="133647" y="181882"/>
+                  </a:lnTo>
+                  <a:lnTo>
+                    <a:pt x="203991" y="266636"/>
+                  </a:lnTo>
+                  <a:lnTo>
+                    <a:pt x="274336" y="344709"/>
+                  </a:lnTo>
+                  <a:lnTo>
+                    <a:pt x="344680" y="416628"/>
+                  </a:lnTo>
+                  <a:lnTo>
+                    <a:pt x="415025" y="482880"/>
+                  </a:lnTo>
+                  <a:lnTo>
+                    <a:pt x="485369" y="543909"/>
+                  </a:lnTo>
+                  <a:lnTo>
+                    <a:pt x="555713" y="600129"/>
+                  </a:lnTo>
+                  <a:lnTo>
+                    <a:pt x="626058" y="651917"/>
+                  </a:lnTo>
+                  <a:lnTo>
+                    <a:pt x="696402" y="699624"/>
+                  </a:lnTo>
+                  <a:lnTo>
+                    <a:pt x="766747" y="743570"/>
+                  </a:lnTo>
+                  <a:lnTo>
+                    <a:pt x="837091" y="784053"/>
+                  </a:lnTo>
+                  <a:lnTo>
+                    <a:pt x="907436" y="821345"/>
+                  </a:lnTo>
+                  <a:lnTo>
+                    <a:pt x="977780" y="855698"/>
+                  </a:lnTo>
+                  <a:lnTo>
+                    <a:pt x="1048125" y="887343"/>
+                  </a:lnTo>
+                  <a:lnTo>
+                    <a:pt x="1118469" y="916494"/>
+                  </a:lnTo>
+                  <a:lnTo>
+                    <a:pt x="1188814" y="943347"/>
+                  </a:lnTo>
+                  <a:lnTo>
+                    <a:pt x="1259158" y="968084"/>
+                  </a:lnTo>
+                  <a:lnTo>
+                    <a:pt x="1329503" y="990872"/>
+                  </a:lnTo>
+                  <a:lnTo>
+                    <a:pt x="1399847" y="1011863"/>
+                  </a:lnTo>
+                  <a:lnTo>
+                    <a:pt x="1470192" y="1031200"/>
+                  </a:lnTo>
+                  <a:lnTo>
+                    <a:pt x="1540536" y="1049013"/>
+                  </a:lnTo>
+                  <a:lnTo>
+                    <a:pt x="1610881" y="1065421"/>
+                  </a:lnTo>
+                  <a:lnTo>
+                    <a:pt x="1681225" y="1080537"/>
+                  </a:lnTo>
+                  <a:lnTo>
+                    <a:pt x="1751570" y="1094461"/>
+                  </a:lnTo>
+                  <a:lnTo>
+                    <a:pt x="1821914" y="1107288"/>
+                  </a:lnTo>
+                  <a:lnTo>
+                    <a:pt x="1892259" y="1119103"/>
+                  </a:lnTo>
+                  <a:lnTo>
+                    <a:pt x="1962603" y="1129988"/>
+                  </a:lnTo>
+                  <a:lnTo>
+                    <a:pt x="2032948" y="1140014"/>
+                  </a:lnTo>
+                  <a:lnTo>
+                    <a:pt x="2103292" y="1149251"/>
+                  </a:lnTo>
+                  <a:lnTo>
+                    <a:pt x="2173637" y="1157759"/>
+                  </a:lnTo>
+                  <a:lnTo>
+                    <a:pt x="2243981" y="1165597"/>
+                  </a:lnTo>
+                  <a:lnTo>
+                    <a:pt x="2314326" y="1172817"/>
+                  </a:lnTo>
+                  <a:lnTo>
+                    <a:pt x="2384670" y="1179468"/>
+                  </a:lnTo>
+                  <a:lnTo>
+                    <a:pt x="2455015" y="1185595"/>
+                  </a:lnTo>
+                  <a:lnTo>
+                    <a:pt x="2525359" y="1191238"/>
+                  </a:lnTo>
+                  <a:lnTo>
+                    <a:pt x="2595704" y="1196437"/>
+                  </a:lnTo>
+                  <a:lnTo>
+                    <a:pt x="2666048" y="1201227"/>
+                  </a:lnTo>
+                  <a:lnTo>
+                    <a:pt x="2736393" y="1205638"/>
+                  </a:lnTo>
+                  <a:lnTo>
+                    <a:pt x="2806737" y="1209702"/>
+                  </a:lnTo>
+                  <a:lnTo>
+                    <a:pt x="2877082" y="1213446"/>
+                  </a:lnTo>
+                  <a:lnTo>
+                    <a:pt x="2947426" y="1216895"/>
+                  </a:lnTo>
+                  <a:lnTo>
+                    <a:pt x="3017771" y="1220072"/>
+                  </a:lnTo>
+                  <a:lnTo>
+                    <a:pt x="3088115" y="1222998"/>
+                  </a:lnTo>
+                  <a:lnTo>
+                    <a:pt x="3158460" y="1225694"/>
+                  </a:lnTo>
+                  <a:lnTo>
+                    <a:pt x="3228804" y="1228177"/>
+                  </a:lnTo>
+                  <a:lnTo>
+                    <a:pt x="3299149" y="1230465"/>
+                  </a:lnTo>
+                  <a:lnTo>
+                    <a:pt x="3369493" y="1232572"/>
+                  </a:lnTo>
+                  <a:lnTo>
+                    <a:pt x="3439838" y="1234514"/>
+                  </a:lnTo>
+                  <a:lnTo>
+                    <a:pt x="3510182" y="1236302"/>
+                  </a:lnTo>
+                  <a:lnTo>
+                    <a:pt x="3580527" y="1237949"/>
+                  </a:lnTo>
+                  <a:lnTo>
+                    <a:pt x="3650871" y="1239466"/>
+                  </a:lnTo>
+                  <a:lnTo>
+                    <a:pt x="3721216" y="1240864"/>
+                  </a:lnTo>
+                  <a:lnTo>
+                    <a:pt x="3791560" y="1242152"/>
+                  </a:lnTo>
+                  <a:lnTo>
+                    <a:pt x="3861905" y="1243338"/>
+                  </a:lnTo>
+                  <a:lnTo>
+                    <a:pt x="3932249" y="1244431"/>
+                  </a:lnTo>
+                  <a:lnTo>
+                    <a:pt x="4002594" y="1245437"/>
+                  </a:lnTo>
+                  <a:lnTo>
+                    <a:pt x="4072938" y="1246365"/>
+                  </a:lnTo>
+                  <a:lnTo>
+                    <a:pt x="4143282" y="1247219"/>
+                  </a:lnTo>
+                  <a:lnTo>
+                    <a:pt x="4213627" y="1248006"/>
+                  </a:lnTo>
+                  <a:lnTo>
+                    <a:pt x="4283971" y="1248730"/>
+                  </a:lnTo>
+                  <a:lnTo>
+                    <a:pt x="4354316" y="1249398"/>
+                  </a:lnTo>
+                  <a:lnTo>
+                    <a:pt x="4424660" y="1250013"/>
+                  </a:lnTo>
+                  <a:lnTo>
+                    <a:pt x="4495005" y="1250580"/>
+                  </a:lnTo>
+                  <a:lnTo>
+                    <a:pt x="4565349" y="1251102"/>
+                  </a:lnTo>
+                  <a:lnTo>
+                    <a:pt x="4635694" y="1251582"/>
+                  </a:lnTo>
+                  <a:lnTo>
+                    <a:pt x="4706038" y="1252025"/>
+                  </a:lnTo>
+                  <a:lnTo>
+                    <a:pt x="4776383" y="1252433"/>
+                  </a:lnTo>
+                  <a:lnTo>
+                    <a:pt x="4846727" y="1252809"/>
+                  </a:lnTo>
+                  <a:lnTo>
+                    <a:pt x="4917072" y="1253155"/>
+                  </a:lnTo>
+                  <a:lnTo>
+                    <a:pt x="4987416" y="1253474"/>
+                  </a:lnTo>
+                  <a:lnTo>
+                    <a:pt x="5057761" y="1253768"/>
+                  </a:lnTo>
+                  <a:lnTo>
+                    <a:pt x="5128105" y="1254039"/>
+                  </a:lnTo>
+                </a:path>
+              </a:pathLst>
+            </a:custGeom>
+            <a:ln w="27101" cap="flat">
+              <a:solidFill>
+                <a:srgbClr val="FF8C00">
+                  <a:alpha val="100000"/>
+                </a:srgbClr>
+              </a:solidFill>
+              <a:prstDash val="solid"/>
+              <a:round/>
+            </a:ln>
+          </p:spPr>
+          <p:txBody>
+            <a:bodyPr/>
+            <a:lstStyle/>
+            <a:p/>
+          </p:txBody>
+        </p:sp>
+        <p:sp>
+          <p:nvSpPr>
+            <p:cNvPr id="75" name="pl75"/>
+            <p:cNvSpPr/>
+            <p:nvPr/>
+          </p:nvSpPr>
+          <p:spPr>
+            <a:xfrm>
+              <a:off x="887106" y="5294352"/>
+              <a:ext cx="7660515" cy="0"/>
+            </a:xfrm>
+            <a:custGeom>
+              <a:avLst/>
+              <a:pathLst>
+                <a:path w="7660515" h="0">
+                  <a:moveTo>
+                    <a:pt x="0" y="0"/>
+                  </a:moveTo>
+                  <a:lnTo>
+                    <a:pt x="7660515" y="0"/>
+                  </a:lnTo>
+                  <a:lnTo>
+                    <a:pt x="7660515" y="0"/>
+                  </a:lnTo>
+                </a:path>
+              </a:pathLst>
+            </a:custGeom>
+            <a:ln w="13550" cap="flat">
+              <a:solidFill>
+                <a:srgbClr val="7F7F7F">
+                  <a:alpha val="100000"/>
+                </a:srgbClr>
+              </a:solidFill>
+              <a:prstDash val="dash"/>
+              <a:round/>
+            </a:ln>
+          </p:spPr>
+          <p:txBody>
+            <a:bodyPr/>
+            <a:lstStyle/>
+            <a:p/>
+          </p:txBody>
+        </p:sp>
+        <p:sp>
+          <p:nvSpPr>
+            <p:cNvPr id="76" name="pl76"/>
+            <p:cNvSpPr/>
+            <p:nvPr/>
+          </p:nvSpPr>
+          <p:spPr>
+            <a:xfrm>
+              <a:off x="4300713" y="4336484"/>
+              <a:ext cx="0" cy="1317069"/>
+            </a:xfrm>
+            <a:custGeom>
+              <a:avLst/>
+              <a:pathLst>
+                <a:path w="0" h="1317069">
+                  <a:moveTo>
+                    <a:pt x="0" y="1317069"/>
+                  </a:moveTo>
+                  <a:lnTo>
+                    <a:pt x="0" y="0"/>
+                  </a:lnTo>
+                  <a:lnTo>
+                    <a:pt x="0" y="0"/>
+                  </a:lnTo>
+                </a:path>
+              </a:pathLst>
+            </a:custGeom>
+            <a:ln w="13550" cap="flat">
+              <a:solidFill>
+                <a:srgbClr val="666666">
+                  <a:alpha val="100000"/>
+                </a:srgbClr>
+              </a:solidFill>
+              <a:prstDash val="dot"/>
+              <a:round/>
+            </a:ln>
+          </p:spPr>
+          <p:txBody>
+            <a:bodyPr/>
+            <a:lstStyle/>
+            <a:p/>
+          </p:txBody>
+        </p:sp>
+        <p:sp>
+          <p:nvSpPr>
+            <p:cNvPr id="77" name="pl77"/>
+            <p:cNvSpPr/>
+            <p:nvPr/>
+          </p:nvSpPr>
+          <p:spPr>
+            <a:xfrm>
+              <a:off x="3103710" y="4336484"/>
+              <a:ext cx="0" cy="1317069"/>
+            </a:xfrm>
+            <a:custGeom>
+              <a:avLst/>
+              <a:pathLst>
+                <a:path w="0" h="1317069">
+                  <a:moveTo>
+                    <a:pt x="0" y="1317069"/>
+                  </a:moveTo>
+                  <a:lnTo>
+                    <a:pt x="0" y="0"/>
+                  </a:lnTo>
+                  <a:lnTo>
+                    <a:pt x="0" y="0"/>
+                  </a:lnTo>
+                </a:path>
+              </a:pathLst>
+            </a:custGeom>
+            <a:ln w="13550" cap="flat">
+              <a:solidFill>
+                <a:srgbClr val="4682B4">
+                  <a:alpha val="69803"/>
+                </a:srgbClr>
+              </a:solidFill>
+              <a:prstDash val="dash"/>
+              <a:round/>
+            </a:ln>
+          </p:spPr>
+          <p:txBody>
+            <a:bodyPr/>
+            <a:lstStyle/>
+            <a:p/>
+          </p:txBody>
+        </p:sp>
+        <p:sp>
+          <p:nvSpPr>
+            <p:cNvPr id="78" name="pl78"/>
+            <p:cNvSpPr/>
+            <p:nvPr/>
+          </p:nvSpPr>
+          <p:spPr>
+            <a:xfrm>
+              <a:off x="5504283" y="4336484"/>
+              <a:ext cx="0" cy="1317069"/>
+            </a:xfrm>
+            <a:custGeom>
+              <a:avLst/>
+              <a:pathLst>
+                <a:path w="0" h="1317069">
+                  <a:moveTo>
+                    <a:pt x="0" y="1317069"/>
+                  </a:moveTo>
+                  <a:lnTo>
+                    <a:pt x="0" y="0"/>
+                  </a:lnTo>
+                  <a:lnTo>
+                    <a:pt x="0" y="0"/>
+                  </a:lnTo>
+                </a:path>
+              </a:pathLst>
+            </a:custGeom>
+            <a:ln w="13550" cap="flat">
+              <a:solidFill>
+                <a:srgbClr val="4682B4">
+                  <a:alpha val="69803"/>
+                </a:srgbClr>
+              </a:solidFill>
+              <a:prstDash val="dash"/>
+              <a:round/>
+            </a:ln>
+          </p:spPr>
+          <p:txBody>
+            <a:bodyPr/>
+            <a:lstStyle/>
+            <a:p/>
+          </p:txBody>
+        </p:sp>
+        <p:sp>
+          <p:nvSpPr>
+            <p:cNvPr id="79" name="tx79"/>
+            <p:cNvSpPr/>
+            <p:nvPr/>
+          </p:nvSpPr>
+          <p:spPr>
+            <a:xfrm>
+              <a:off x="762297" y="5553636"/>
+              <a:ext cx="62179" cy="80101"/>
+            </a:xfrm>
+            <a:prstGeom prst="rect">
+              <a:avLst/>
+            </a:prstGeom>
+            <a:noFill/>
+          </p:spPr>
+          <p:txBody>
+            <a:bodyPr lIns="0" rIns="0" tIns="0" bIns="0" anchorCtr="1" anchor="ctr" wrap="none"/>
+            <a:lstStyle/>
+            <a:p>
+              <a:pPr algn="l" marL="0" marR="0" indent="0">
+                <a:lnSpc>
+                  <a:spcPts val="880"/>
+                </a:lnSpc>
+                <a:spcBef>
+                  <a:spcPts val="0"/>
+                </a:spcBef>
+                <a:spcAft>
+                  <a:spcPts val="0"/>
+                </a:spcAft>
+              </a:pPr>
+              <a:r>
+                <a:rPr sz="880">
+                  <a:solidFill>
+                    <a:srgbClr val="4D4D4D">
+                      <a:alpha val="100000"/>
+                    </a:srgbClr>
+                  </a:solidFill>
+                  <a:latin typeface="Helvetica"/>
+                  <a:cs typeface="Helvetica"/>
+                </a:rPr>
+                <a:t>0</a:t>
+              </a:r>
+            </a:p>
+          </p:txBody>
+        </p:sp>
+        <p:sp>
+          <p:nvSpPr>
+            <p:cNvPr id="80" name="tx80"/>
+            <p:cNvSpPr/>
+            <p:nvPr/>
+          </p:nvSpPr>
+          <p:spPr>
+            <a:xfrm>
+              <a:off x="762297" y="5254302"/>
+              <a:ext cx="62179" cy="80101"/>
+            </a:xfrm>
+            <a:prstGeom prst="rect">
+              <a:avLst/>
+            </a:prstGeom>
+            <a:noFill/>
+          </p:spPr>
+          <p:txBody>
+            <a:bodyPr lIns="0" rIns="0" tIns="0" bIns="0" anchorCtr="1" anchor="ctr" wrap="none"/>
+            <a:lstStyle/>
+            <a:p>
+              <a:pPr algn="l" marL="0" marR="0" indent="0">
+                <a:lnSpc>
+                  <a:spcPts val="880"/>
+                </a:lnSpc>
+                <a:spcBef>
+                  <a:spcPts val="0"/>
+                </a:spcBef>
+                <a:spcAft>
+                  <a:spcPts val="0"/>
+                </a:spcAft>
+              </a:pPr>
+              <a:r>
+                <a:rPr sz="880">
+                  <a:solidFill>
+                    <a:srgbClr val="4D4D4D">
+                      <a:alpha val="100000"/>
+                    </a:srgbClr>
+                  </a:solidFill>
+                  <a:latin typeface="Helvetica"/>
+                  <a:cs typeface="Helvetica"/>
+                </a:rPr>
+                <a:t>1</a:t>
+              </a:r>
+            </a:p>
+          </p:txBody>
+        </p:sp>
+        <p:sp>
+          <p:nvSpPr>
+            <p:cNvPr id="81" name="tx81"/>
+            <p:cNvSpPr/>
+            <p:nvPr/>
+          </p:nvSpPr>
+          <p:spPr>
+            <a:xfrm>
+              <a:off x="762297" y="4954968"/>
+              <a:ext cx="62179" cy="80101"/>
+            </a:xfrm>
+            <a:prstGeom prst="rect">
+              <a:avLst/>
+            </a:prstGeom>
+            <a:noFill/>
+          </p:spPr>
+          <p:txBody>
+            <a:bodyPr lIns="0" rIns="0" tIns="0" bIns="0" anchorCtr="1" anchor="ctr" wrap="none"/>
+            <a:lstStyle/>
+            <a:p>
+              <a:pPr algn="l" marL="0" marR="0" indent="0">
+                <a:lnSpc>
+                  <a:spcPts val="880"/>
+                </a:lnSpc>
+                <a:spcBef>
+                  <a:spcPts val="0"/>
+                </a:spcBef>
+                <a:spcAft>
+                  <a:spcPts val="0"/>
+                </a:spcAft>
+              </a:pPr>
+              <a:r>
+                <a:rPr sz="880">
+                  <a:solidFill>
+                    <a:srgbClr val="4D4D4D">
+                      <a:alpha val="100000"/>
+                    </a:srgbClr>
+                  </a:solidFill>
+                  <a:latin typeface="Helvetica"/>
+                  <a:cs typeface="Helvetica"/>
+                </a:rPr>
+                <a:t>2</a:t>
+              </a:r>
+            </a:p>
+          </p:txBody>
+        </p:sp>
+        <p:sp>
+          <p:nvSpPr>
+            <p:cNvPr id="82" name="tx82"/>
+            <p:cNvSpPr/>
+            <p:nvPr/>
+          </p:nvSpPr>
+          <p:spPr>
+            <a:xfrm>
+              <a:off x="762297" y="4655634"/>
+              <a:ext cx="62179" cy="80101"/>
+            </a:xfrm>
+            <a:prstGeom prst="rect">
+              <a:avLst/>
+            </a:prstGeom>
+            <a:noFill/>
+          </p:spPr>
+          <p:txBody>
+            <a:bodyPr lIns="0" rIns="0" tIns="0" bIns="0" anchorCtr="1" anchor="ctr" wrap="none"/>
+            <a:lstStyle/>
+            <a:p>
+              <a:pPr algn="l" marL="0" marR="0" indent="0">
+                <a:lnSpc>
+                  <a:spcPts val="880"/>
+                </a:lnSpc>
+                <a:spcBef>
+                  <a:spcPts val="0"/>
+                </a:spcBef>
+                <a:spcAft>
+                  <a:spcPts val="0"/>
+                </a:spcAft>
+              </a:pPr>
+              <a:r>
+                <a:rPr sz="880">
+                  <a:solidFill>
+                    <a:srgbClr val="4D4D4D">
+                      <a:alpha val="100000"/>
+                    </a:srgbClr>
+                  </a:solidFill>
+                  <a:latin typeface="Helvetica"/>
+                  <a:cs typeface="Helvetica"/>
+                </a:rPr>
+                <a:t>3</a:t>
+              </a:r>
+            </a:p>
+          </p:txBody>
+        </p:sp>
+        <p:sp>
+          <p:nvSpPr>
+            <p:cNvPr id="83" name="tx83"/>
+            <p:cNvSpPr/>
+            <p:nvPr/>
+          </p:nvSpPr>
+          <p:spPr>
+            <a:xfrm>
+              <a:off x="762297" y="4356300"/>
+              <a:ext cx="62179" cy="80101"/>
+            </a:xfrm>
+            <a:prstGeom prst="rect">
+              <a:avLst/>
+            </a:prstGeom>
+            <a:noFill/>
+          </p:spPr>
+          <p:txBody>
+            <a:bodyPr lIns="0" rIns="0" tIns="0" bIns="0" anchorCtr="1" anchor="ctr" wrap="none"/>
+            <a:lstStyle/>
+            <a:p>
+              <a:pPr algn="l" marL="0" marR="0" indent="0">
+                <a:lnSpc>
+                  <a:spcPts val="880"/>
+                </a:lnSpc>
+                <a:spcBef>
+                  <a:spcPts val="0"/>
+                </a:spcBef>
+                <a:spcAft>
+                  <a:spcPts val="0"/>
+                </a:spcAft>
+              </a:pPr>
+              <a:r>
+                <a:rPr sz="880">
+                  <a:solidFill>
+                    <a:srgbClr val="4D4D4D">
+                      <a:alpha val="100000"/>
+                    </a:srgbClr>
+                  </a:solidFill>
+                  <a:latin typeface="Helvetica"/>
+                  <a:cs typeface="Helvetica"/>
+                </a:rPr>
+                <a:t>4</a:t>
+              </a:r>
+            </a:p>
+          </p:txBody>
+        </p:sp>
+        <p:sp>
+          <p:nvSpPr>
+            <p:cNvPr id="84" name="tx84"/>
+            <p:cNvSpPr/>
+            <p:nvPr/>
+          </p:nvSpPr>
+          <p:spPr>
+            <a:xfrm>
+              <a:off x="1324230" y="5716183"/>
+              <a:ext cx="161574" cy="80101"/>
+            </a:xfrm>
+            <a:prstGeom prst="rect">
+              <a:avLst/>
+            </a:prstGeom>
+            <a:noFill/>
+          </p:spPr>
+          <p:txBody>
+            <a:bodyPr lIns="0" rIns="0" tIns="0" bIns="0" anchorCtr="1" anchor="ctr" wrap="none"/>
+            <a:lstStyle/>
+            <a:p>
+              <a:pPr algn="l" marL="0" marR="0" indent="0">
+                <a:lnSpc>
+                  <a:spcPts val="880"/>
+                </a:lnSpc>
+                <a:spcBef>
+                  <a:spcPts val="0"/>
+                </a:spcBef>
+                <a:spcAft>
+                  <a:spcPts val="0"/>
+                </a:spcAft>
+              </a:pPr>
+              <a:r>
+                <a:rPr sz="880">
+                  <a:solidFill>
+                    <a:srgbClr val="4D4D4D">
+                      <a:alpha val="100000"/>
+                    </a:srgbClr>
+                  </a:solidFill>
+                  <a:latin typeface="Helvetica"/>
+                  <a:cs typeface="Helvetica"/>
+                </a:rPr>
+                <a:t>-50</a:t>
+              </a:r>
+            </a:p>
+          </p:txBody>
+        </p:sp>
+        <p:sp>
+          <p:nvSpPr>
+            <p:cNvPr id="85" name="tx85"/>
+            <p:cNvSpPr/>
+            <p:nvPr/>
+          </p:nvSpPr>
+          <p:spPr>
+            <a:xfrm>
+              <a:off x="2179256" y="5716183"/>
+              <a:ext cx="161574" cy="80101"/>
+            </a:xfrm>
+            <a:prstGeom prst="rect">
+              <a:avLst/>
+            </a:prstGeom>
+            <a:noFill/>
+          </p:spPr>
+          <p:txBody>
+            <a:bodyPr lIns="0" rIns="0" tIns="0" bIns="0" anchorCtr="1" anchor="ctr" wrap="none"/>
+            <a:lstStyle/>
+            <a:p>
+              <a:pPr algn="l" marL="0" marR="0" indent="0">
+                <a:lnSpc>
+                  <a:spcPts val="880"/>
+                </a:lnSpc>
+                <a:spcBef>
+                  <a:spcPts val="0"/>
+                </a:spcBef>
+                <a:spcAft>
+                  <a:spcPts val="0"/>
+                </a:spcAft>
+              </a:pPr>
+              <a:r>
+                <a:rPr sz="880">
+                  <a:solidFill>
+                    <a:srgbClr val="4D4D4D">
+                      <a:alpha val="100000"/>
+                    </a:srgbClr>
+                  </a:solidFill>
+                  <a:latin typeface="Helvetica"/>
+                  <a:cs typeface="Helvetica"/>
+                </a:rPr>
+                <a:t>-40</a:t>
+              </a:r>
+            </a:p>
+          </p:txBody>
+        </p:sp>
+        <p:sp>
+          <p:nvSpPr>
+            <p:cNvPr id="86" name="tx86"/>
+            <p:cNvSpPr/>
+            <p:nvPr/>
+          </p:nvSpPr>
+          <p:spPr>
+            <a:xfrm>
+              <a:off x="3034282" y="5716183"/>
+              <a:ext cx="161574" cy="80101"/>
+            </a:xfrm>
+            <a:prstGeom prst="rect">
+              <a:avLst/>
+            </a:prstGeom>
+            <a:noFill/>
+          </p:spPr>
+          <p:txBody>
+            <a:bodyPr lIns="0" rIns="0" tIns="0" bIns="0" anchorCtr="1" anchor="ctr" wrap="none"/>
+            <a:lstStyle/>
+            <a:p>
+              <a:pPr algn="l" marL="0" marR="0" indent="0">
+                <a:lnSpc>
+                  <a:spcPts val="880"/>
+                </a:lnSpc>
+                <a:spcBef>
+                  <a:spcPts val="0"/>
+                </a:spcBef>
+                <a:spcAft>
+                  <a:spcPts val="0"/>
+                </a:spcAft>
+              </a:pPr>
+              <a:r>
+                <a:rPr sz="880">
+                  <a:solidFill>
+                    <a:srgbClr val="4D4D4D">
+                      <a:alpha val="100000"/>
+                    </a:srgbClr>
+                  </a:solidFill>
+                  <a:latin typeface="Helvetica"/>
+                  <a:cs typeface="Helvetica"/>
+                </a:rPr>
+                <a:t>-30</a:t>
+              </a:r>
+            </a:p>
+          </p:txBody>
+        </p:sp>
+        <p:sp>
+          <p:nvSpPr>
+            <p:cNvPr id="87" name="tx87"/>
+            <p:cNvSpPr/>
+            <p:nvPr/>
+          </p:nvSpPr>
+          <p:spPr>
+            <a:xfrm>
+              <a:off x="3889308" y="5716183"/>
+              <a:ext cx="161574" cy="80101"/>
+            </a:xfrm>
+            <a:prstGeom prst="rect">
+              <a:avLst/>
+            </a:prstGeom>
+            <a:noFill/>
+          </p:spPr>
+          <p:txBody>
+            <a:bodyPr lIns="0" rIns="0" tIns="0" bIns="0" anchorCtr="1" anchor="ctr" wrap="none"/>
+            <a:lstStyle/>
+            <a:p>
+              <a:pPr algn="l" marL="0" marR="0" indent="0">
+                <a:lnSpc>
+                  <a:spcPts val="880"/>
+                </a:lnSpc>
+                <a:spcBef>
+                  <a:spcPts val="0"/>
+                </a:spcBef>
+                <a:spcAft>
+                  <a:spcPts val="0"/>
+                </a:spcAft>
+              </a:pPr>
+              <a:r>
+                <a:rPr sz="880">
+                  <a:solidFill>
+                    <a:srgbClr val="4D4D4D">
+                      <a:alpha val="100000"/>
+                    </a:srgbClr>
+                  </a:solidFill>
+                  <a:latin typeface="Helvetica"/>
+                  <a:cs typeface="Helvetica"/>
+                </a:rPr>
+                <a:t>-20</a:t>
+              </a:r>
+            </a:p>
+          </p:txBody>
+        </p:sp>
+        <p:sp>
+          <p:nvSpPr>
+            <p:cNvPr id="88" name="tx88"/>
+            <p:cNvSpPr/>
+            <p:nvPr/>
+          </p:nvSpPr>
+          <p:spPr>
+            <a:xfrm>
+              <a:off x="4744334" y="5716183"/>
+              <a:ext cx="161574" cy="80101"/>
+            </a:xfrm>
+            <a:prstGeom prst="rect">
+              <a:avLst/>
+            </a:prstGeom>
+            <a:noFill/>
+          </p:spPr>
+          <p:txBody>
+            <a:bodyPr lIns="0" rIns="0" tIns="0" bIns="0" anchorCtr="1" anchor="ctr" wrap="none"/>
+            <a:lstStyle/>
+            <a:p>
+              <a:pPr algn="l" marL="0" marR="0" indent="0">
+                <a:lnSpc>
+                  <a:spcPts val="880"/>
+                </a:lnSpc>
+                <a:spcBef>
+                  <a:spcPts val="0"/>
+                </a:spcBef>
+                <a:spcAft>
+                  <a:spcPts val="0"/>
+                </a:spcAft>
+              </a:pPr>
+              <a:r>
+                <a:rPr sz="880">
+                  <a:solidFill>
+                    <a:srgbClr val="4D4D4D">
+                      <a:alpha val="100000"/>
+                    </a:srgbClr>
+                  </a:solidFill>
+                  <a:latin typeface="Helvetica"/>
+                  <a:cs typeface="Helvetica"/>
+                </a:rPr>
+                <a:t>-10</a:t>
+              </a:r>
+            </a:p>
+          </p:txBody>
+        </p:sp>
+        <p:sp>
+          <p:nvSpPr>
+            <p:cNvPr id="89" name="tx89"/>
+            <p:cNvSpPr/>
+            <p:nvPr/>
+          </p:nvSpPr>
+          <p:spPr>
+            <a:xfrm>
+              <a:off x="5649057" y="5716183"/>
+              <a:ext cx="62179" cy="80101"/>
+            </a:xfrm>
+            <a:prstGeom prst="rect">
+              <a:avLst/>
+            </a:prstGeom>
+            <a:noFill/>
+          </p:spPr>
+          <p:txBody>
+            <a:bodyPr lIns="0" rIns="0" tIns="0" bIns="0" anchorCtr="1" anchor="ctr" wrap="none"/>
+            <a:lstStyle/>
+            <a:p>
+              <a:pPr algn="l" marL="0" marR="0" indent="0">
+                <a:lnSpc>
+                  <a:spcPts val="880"/>
+                </a:lnSpc>
+                <a:spcBef>
+                  <a:spcPts val="0"/>
+                </a:spcBef>
+                <a:spcAft>
+                  <a:spcPts val="0"/>
+                </a:spcAft>
+              </a:pPr>
+              <a:r>
+                <a:rPr sz="880">
+                  <a:solidFill>
+                    <a:srgbClr val="4D4D4D">
+                      <a:alpha val="100000"/>
+                    </a:srgbClr>
+                  </a:solidFill>
+                  <a:latin typeface="Helvetica"/>
+                  <a:cs typeface="Helvetica"/>
+                </a:rPr>
+                <a:t>0</a:t>
+              </a:r>
+            </a:p>
+          </p:txBody>
+        </p:sp>
+        <p:sp>
+          <p:nvSpPr>
+            <p:cNvPr id="90" name="tx90"/>
+            <p:cNvSpPr/>
+            <p:nvPr/>
+          </p:nvSpPr>
+          <p:spPr>
+            <a:xfrm>
+              <a:off x="6472994" y="5716183"/>
+              <a:ext cx="124358" cy="80101"/>
+            </a:xfrm>
+            <a:prstGeom prst="rect">
+              <a:avLst/>
+            </a:prstGeom>
+            <a:noFill/>
+          </p:spPr>
+          <p:txBody>
+            <a:bodyPr lIns="0" rIns="0" tIns="0" bIns="0" anchorCtr="1" anchor="ctr" wrap="none"/>
+            <a:lstStyle/>
+            <a:p>
+              <a:pPr algn="l" marL="0" marR="0" indent="0">
+                <a:lnSpc>
+                  <a:spcPts val="880"/>
+                </a:lnSpc>
+                <a:spcBef>
+                  <a:spcPts val="0"/>
+                </a:spcBef>
+                <a:spcAft>
+                  <a:spcPts val="0"/>
+                </a:spcAft>
+              </a:pPr>
+              <a:r>
+                <a:rPr sz="880">
+                  <a:solidFill>
+                    <a:srgbClr val="4D4D4D">
+                      <a:alpha val="100000"/>
+                    </a:srgbClr>
+                  </a:solidFill>
+                  <a:latin typeface="Helvetica"/>
+                  <a:cs typeface="Helvetica"/>
+                </a:rPr>
+                <a:t>10</a:t>
+              </a:r>
+            </a:p>
+          </p:txBody>
+        </p:sp>
+        <p:sp>
+          <p:nvSpPr>
+            <p:cNvPr id="91" name="tx91"/>
+            <p:cNvSpPr/>
+            <p:nvPr/>
+          </p:nvSpPr>
+          <p:spPr>
+            <a:xfrm>
+              <a:off x="7328020" y="5716183"/>
+              <a:ext cx="124358" cy="80101"/>
+            </a:xfrm>
+            <a:prstGeom prst="rect">
+              <a:avLst/>
+            </a:prstGeom>
+            <a:noFill/>
+          </p:spPr>
+          <p:txBody>
+            <a:bodyPr lIns="0" rIns="0" tIns="0" bIns="0" anchorCtr="1" anchor="ctr" wrap="none"/>
+            <a:lstStyle/>
+            <a:p>
+              <a:pPr algn="l" marL="0" marR="0" indent="0">
+                <a:lnSpc>
+                  <a:spcPts val="880"/>
+                </a:lnSpc>
+                <a:spcBef>
+                  <a:spcPts val="0"/>
+                </a:spcBef>
+                <a:spcAft>
+                  <a:spcPts val="0"/>
+                </a:spcAft>
+              </a:pPr>
+              <a:r>
+                <a:rPr sz="880">
+                  <a:solidFill>
+                    <a:srgbClr val="4D4D4D">
+                      <a:alpha val="100000"/>
+                    </a:srgbClr>
+                  </a:solidFill>
+                  <a:latin typeface="Helvetica"/>
+                  <a:cs typeface="Helvetica"/>
+                </a:rPr>
+                <a:t>20</a:t>
+              </a:r>
+            </a:p>
+          </p:txBody>
+        </p:sp>
+        <p:sp>
+          <p:nvSpPr>
+            <p:cNvPr id="92" name="tx92"/>
+            <p:cNvSpPr/>
+            <p:nvPr/>
+          </p:nvSpPr>
+          <p:spPr>
+            <a:xfrm>
+              <a:off x="8183046" y="5716183"/>
+              <a:ext cx="124358" cy="80101"/>
+            </a:xfrm>
+            <a:prstGeom prst="rect">
+              <a:avLst/>
+            </a:prstGeom>
+            <a:noFill/>
+          </p:spPr>
+          <p:txBody>
+            <a:bodyPr lIns="0" rIns="0" tIns="0" bIns="0" anchorCtr="1" anchor="ctr" wrap="none"/>
+            <a:lstStyle/>
+            <a:p>
+              <a:pPr algn="l" marL="0" marR="0" indent="0">
+                <a:lnSpc>
+                  <a:spcPts val="880"/>
+                </a:lnSpc>
+                <a:spcBef>
+                  <a:spcPts val="0"/>
+                </a:spcBef>
+                <a:spcAft>
+                  <a:spcPts val="0"/>
+                </a:spcAft>
+              </a:pPr>
+              <a:r>
+                <a:rPr sz="880">
+                  <a:solidFill>
+                    <a:srgbClr val="4D4D4D">
+                      <a:alpha val="100000"/>
+                    </a:srgbClr>
+                  </a:solidFill>
+                  <a:latin typeface="Helvetica"/>
+                  <a:cs typeface="Helvetica"/>
+                </a:rPr>
+                <a:t>30</a:t>
+              </a:r>
+            </a:p>
+          </p:txBody>
+        </p:sp>
+        <p:sp>
+          <p:nvSpPr>
+            <p:cNvPr id="93" name="tx93"/>
+            <p:cNvSpPr/>
+            <p:nvPr/>
+          </p:nvSpPr>
+          <p:spPr>
+            <a:xfrm>
+              <a:off x="1561815" y="5855859"/>
+              <a:ext cx="6311097" cy="100218"/>
+            </a:xfrm>
+            <a:prstGeom prst="rect">
+              <a:avLst/>
+            </a:prstGeom>
+            <a:noFill/>
+          </p:spPr>
+          <p:txBody>
+            <a:bodyPr lIns="0" rIns="0" tIns="0" bIns="0" anchorCtr="1" anchor="ctr" wrap="none"/>
+            <a:lstStyle/>
+            <a:p>
+              <a:pPr algn="l" marL="0" marR="0" indent="0">
+                <a:lnSpc>
+                  <a:spcPts val="1100"/>
+                </a:lnSpc>
+                <a:spcBef>
+                  <a:spcPts val="0"/>
+                </a:spcBef>
+                <a:spcAft>
+                  <a:spcPts val="0"/>
+                </a:spcAft>
+              </a:pPr>
+              <a:r>
+                <a:rPr sz="1100">
+                  <a:solidFill>
+                    <a:srgbClr val="000000">
+                      <a:alpha val="100000"/>
+                    </a:srgbClr>
+                  </a:solidFill>
+                  <a:latin typeface="Helvetica"/>
+                  <a:cs typeface="Helvetica"/>
+                </a:rPr>
+                <a:t>Sensitivity eGFR Difference (%): 100 × (CKD-EPI 2012 CysC − CKD-EPI 2021 Cr) / CKD-EPI 2021 Cr</a:t>
+              </a:r>
+            </a:p>
+          </p:txBody>
+        </p:sp>
+        <p:sp>
+          <p:nvSpPr>
+            <p:cNvPr id="94" name="tx94"/>
+            <p:cNvSpPr/>
+            <p:nvPr/>
+          </p:nvSpPr>
+          <p:spPr>
+            <a:xfrm rot="-5400000">
+              <a:off x="250689" y="4944909"/>
+              <a:ext cx="791596" cy="100218"/>
+            </a:xfrm>
+            <a:prstGeom prst="rect">
+              <a:avLst/>
+            </a:prstGeom>
+            <a:noFill/>
+          </p:spPr>
+          <p:txBody>
+            <a:bodyPr lIns="0" rIns="0" tIns="0" bIns="0" anchorCtr="1" anchor="ctr" wrap="none"/>
+            <a:lstStyle/>
+            <a:p>
+              <a:pPr algn="l" marL="0" marR="0" indent="0">
+                <a:lnSpc>
+                  <a:spcPts val="1100"/>
+                </a:lnSpc>
+                <a:spcBef>
+                  <a:spcPts val="0"/>
+                </a:spcBef>
+                <a:spcAft>
+                  <a:spcPts val="0"/>
+                </a:spcAft>
+              </a:pPr>
+              <a:r>
+                <a:rPr sz="1100">
+                  <a:solidFill>
+                    <a:srgbClr val="000000">
+                      <a:alpha val="100000"/>
+                    </a:srgbClr>
+                  </a:solidFill>
+                  <a:latin typeface="Helvetica"/>
+                  <a:cs typeface="Helvetica"/>
+                </a:rPr>
+                <a:t>HR (95% CI)</a:t>
+              </a:r>
+            </a:p>
+          </p:txBody>
+        </p:sp>
+        <p:sp>
+          <p:nvSpPr>
+            <p:cNvPr id="95" name="tx95"/>
+            <p:cNvSpPr/>
+            <p:nvPr/>
+          </p:nvSpPr>
+          <p:spPr>
+            <a:xfrm>
+              <a:off x="887106" y="4159544"/>
+              <a:ext cx="6969465" cy="82021"/>
+            </a:xfrm>
+            <a:prstGeom prst="rect">
+              <a:avLst/>
+            </a:prstGeom>
+            <a:noFill/>
+          </p:spPr>
+          <p:txBody>
+            <a:bodyPr lIns="0" rIns="0" tIns="0" bIns="0" anchorCtr="1" anchor="ctr" wrap="none"/>
+            <a:lstStyle/>
+            <a:p>
+              <a:pPr algn="l" marL="0" marR="0" indent="0">
+                <a:lnSpc>
+                  <a:spcPts val="900"/>
+                </a:lnSpc>
+                <a:spcBef>
+                  <a:spcPts val="0"/>
+                </a:spcBef>
+                <a:spcAft>
+                  <a:spcPts val="0"/>
+                </a:spcAft>
+              </a:pPr>
+              <a:r>
+                <a:rPr sz="900">
+                  <a:solidFill>
+                    <a:srgbClr val="404040">
+                      <a:alpha val="100000"/>
+                    </a:srgbClr>
+                  </a:solidFill>
+                  <a:latin typeface="Helvetica"/>
+                  <a:cs typeface="Helvetica"/>
+                </a:rPr>
+                <a:t>HR per 10 % decline: 2.71 (1.63-4.51), p_Bonf = &lt;0.001 (n = 6)  |  per IQR decline (Δ = 28.1 %): 16.47 (3.96-68.58)  |  IQR: [-30.1, -2.1] %</a:t>
+              </a:r>
+            </a:p>
+          </p:txBody>
+        </p:sp>
+        <p:sp>
+          <p:nvSpPr>
+            <p:cNvPr id="96" name="tx96"/>
+            <p:cNvSpPr/>
+            <p:nvPr/>
+          </p:nvSpPr>
+          <p:spPr>
+            <a:xfrm>
+              <a:off x="887106" y="3932770"/>
               <a:ext cx="4309384" cy="120152"/>
             </a:xfrm>
             <a:prstGeom prst="rect">
